--- a/docs/slides.pptx
+++ b/docs/slides.pptx
@@ -1959,8 +1959,8 @@
         </p:blipFill>
         <p:spPr>
           <a:xfrm>
-            <a:off x="7882128" y="822960"/>
-            <a:ext cx="914400" cy="4617720"/>
+            <a:off x="8732520" y="786384"/>
+            <a:ext cx="1923627" cy="4754880"/>
           </a:xfrm>
           <a:prstGeom prst="rect">
             <a:avLst/>
@@ -1995,7 +1995,7 @@
               <a:buNone/>
             </a:pPr>
             <a:r>
-              <a:rPr lang="en-US" sz="1100" b="1" spc="220" kern="0" dirty="0">
+              <a:rPr lang="en-US" sz="1150" b="1" spc="220" kern="0" dirty="0">
                 <a:solidFill>
                   <a:srgbClr val="F5C542"/>
                 </a:solidFill>
@@ -2003,9 +2003,9 @@
                 <a:ea typeface="Arial" pitchFamily="34" charset="-122"/>
                 <a:cs typeface="Arial" pitchFamily="34" charset="-120"/>
               </a:rPr>
-              <a:t>COURSE PRACTICE · 2026</a:t>
-            </a:r>
-            <a:endParaRPr lang="en-US" sz="1100" dirty="0"/>
+              <a:t>课程实践 · 2026</a:t>
+            </a:r>
+            <a:endParaRPr lang="en-US" sz="1150" dirty="0"/>
           </a:p>
         </p:txBody>
       </p:sp>
@@ -2102,7 +2102,7 @@
         <p:spPr>
           <a:xfrm>
             <a:off x="713232" y="2926080"/>
-            <a:ext cx="6583680" cy="640080"/>
+            <a:ext cx="6766560" cy="365760"/>
           </a:xfrm>
           <a:prstGeom prst="rect">
             <a:avLst/>
@@ -2116,7 +2116,7 @@
           <a:p>
             <a:pPr algn="l" indent="0" marL="0">
               <a:lnSpc>
-                <a:spcPct val="145000"/>
+                <a:spcPct val="115000"/>
               </a:lnSpc>
               <a:buNone/>
             </a:pPr>
@@ -2129,7 +2129,7 @@
                 <a:ea typeface="Arial" pitchFamily="34" charset="-122"/>
                 <a:cs typeface="Arial" pitchFamily="34" charset="-120"/>
               </a:rPr>
-              <a:t>从论文复现到可演示的系统：RGB-D 分割 · 六类检测 · 三级分级 · 四后端部署</a:t>
+              <a:t>从复现论文到做成能演示的系统，覆盖分割、检测、分级和四种推理后端</a:t>
             </a:r>
             <a:endParaRPr lang="en-US" sz="1300" dirty="0"/>
           </a:p>
@@ -2499,7 +2499,7 @@
               <a:buNone/>
             </a:pPr>
             <a:r>
-              <a:rPr lang="en-US" sz="1100" dirty="0">
+              <a:rPr lang="en-US" sz="1150" dirty="0">
                 <a:solidFill>
                   <a:srgbClr val="30A46C"/>
                 </a:solidFill>
@@ -2507,9 +2507,9 @@
                 <a:ea typeface="Arial" pitchFamily="34" charset="-122"/>
                 <a:cs typeface="Arial" pitchFamily="34" charset="-120"/>
               </a:rPr>
-              <a:t>与论文四位小数一致 · 12 种对比方法中 S-measure 第一</a:t>
-            </a:r>
-            <a:endParaRPr lang="en-US" sz="1100" dirty="0"/>
+              <a:t>四项指标与论文一致，12 种对比方法里 S-measure 排第一</a:t>
+            </a:r>
+            <a:endParaRPr lang="en-US" sz="1150" dirty="0"/>
           </a:p>
         </p:txBody>
       </p:sp>
@@ -2521,8 +2521,8 @@
         </p:nvSpPr>
         <p:spPr>
           <a:xfrm>
-            <a:off x="7882128" y="5596128"/>
-            <a:ext cx="3749040" cy="457200"/>
+            <a:off x="713232" y="5897880"/>
+            <a:ext cx="6949440" cy="274320"/>
           </a:xfrm>
           <a:prstGeom prst="rect">
             <a:avLst/>
@@ -2536,6 +2536,48 @@
           <a:p>
             <a:pPr algn="l" indent="0" marL="0">
               <a:lnSpc>
+                <a:spcPct val="115000"/>
+              </a:lnSpc>
+              <a:buNone/>
+            </a:pPr>
+            <a:r>
+              <a:rPr lang="en-US" sz="1050" dirty="0">
+                <a:solidFill>
+                  <a:srgbClr val="5A6875"/>
+                </a:solidFill>
+                <a:latin typeface="Arial" pitchFamily="34" charset="0"/>
+                <a:ea typeface="Arial" pitchFamily="34" charset="-122"/>
+                <a:cs typeface="Arial" pitchFamily="34" charset="-120"/>
+              </a:rPr>
+              <a:t>课程实践小组 7 人，A 到 G 各自负责一块，分工和验收证据见 docs/team.md</a:t>
+            </a:r>
+            <a:endParaRPr lang="en-US" sz="1050" dirty="0"/>
+          </a:p>
+        </p:txBody>
+      </p:sp>
+      <p:sp>
+        <p:nvSpPr>
+          <p:cNvPr id="17" name="Text 14"/>
+          <p:cNvSpPr txBox="1"/>
+          <p:nvPr/>
+        </p:nvSpPr>
+        <p:spPr>
+          <a:xfrm>
+            <a:off x="7635240" y="5687568"/>
+            <a:ext cx="3931920" cy="502920"/>
+          </a:xfrm>
+          <a:prstGeom prst="rect">
+            <a:avLst/>
+          </a:prstGeom>
+          <a:noFill/>
+          <a:ln/>
+        </p:spPr>
+        <p:txBody>
+          <a:bodyPr wrap="square" lIns="0" tIns="0" rIns="0" bIns="0" rtlCol="0" anchor="t"/>
+          <a:lstStyle/>
+          <a:p>
+            <a:pPr algn="l" indent="0" marL="0">
+              <a:lnSpc>
                 <a:spcPct val="130000"/>
               </a:lnSpc>
               <a:buNone/>
@@ -2549,7 +2591,7 @@
                 <a:ea typeface="Arial" pitchFamily="34" charset="-122"/>
                 <a:cs typeface="Arial" pitchFamily="34" charset="-120"/>
               </a:rPr>
-              <a:t>左侧图为系统真实输出：红/橙掩膜来自分割分支，黄框与类别来自检测分支</a:t>
+              <a:t>右侧是系统对测试图 101.bmp 的真实输出。掩膜来自分割分支，框和类别来自检测分支。</a:t>
             </a:r>
             <a:endParaRPr lang="en-US" sz="950" dirty="0"/>
           </a:p>
@@ -2731,7 +2773,7 @@
                 <a:ea typeface="Arial" pitchFamily="34" charset="-122"/>
                 <a:cs typeface="Arial" pitchFamily="34" charset="-120"/>
               </a:rPr>
-              <a:t>每个加速都附上代价</a:t>
+              <a:t>四种后端的实测延迟</a:t>
             </a:r>
             <a:endParaRPr lang="en-US" sz="3000" dirty="0"/>
           </a:p>
@@ -2773,7 +2815,7 @@
                 <a:ea typeface="Arial" pitchFamily="34" charset="-122"/>
                 <a:cs typeface="Arial" pitchFamily="34" charset="-120"/>
               </a:rPr>
-              <a:t>ONNX 不是加速方案；TensorRT 未完成——这两句话都写在报告里，而不是只写在备注里</a:t>
+              <a:t>24 张真实图和 5 次预热，计时前后同步 CUDA，两次独立重跑差不到 1%</a:t>
             </a:r>
             <a:endParaRPr lang="en-US" sz="1250" dirty="0"/>
           </a:p>
@@ -3099,7 +3141,7 @@
                           <a:ea typeface="Arial" pitchFamily="34" charset="-122"/>
                           <a:cs typeface="Arial" pitchFamily="34" charset="-120"/>
                         </a:rPr>
-                        <a:t>torch-fp32-cuda</a:t>
+                        <a:t>torch-fp32</a:t>
                       </a:r>
                       <a:endParaRPr lang="en-US" sz="1100" dirty="0">
                         <a:latin typeface="Arial" charset="0"/>
@@ -3303,7 +3345,7 @@
                           <a:ea typeface="Arial" pitchFamily="34" charset="-122"/>
                           <a:cs typeface="Arial" pitchFamily="34" charset="-120"/>
                         </a:rPr>
-                        <a:t>1.0000 / 1.0000</a:t>
+                        <a:t>基线</a:t>
                       </a:r>
                       <a:endParaRPr lang="en-US" sz="1100" dirty="0">
                         <a:latin typeface="Arial" charset="0"/>
@@ -3373,7 +3415,7 @@
                           <a:ea typeface="Arial" pitchFamily="34" charset="-122"/>
                           <a:cs typeface="Arial" pitchFamily="34" charset="-120"/>
                         </a:rPr>
-                        <a:t>torch-fp16-cuda</a:t>
+                        <a:t>torch-fp16</a:t>
                       </a:r>
                       <a:endParaRPr lang="en-US" sz="1100" dirty="0">
                         <a:latin typeface="Arial" charset="0"/>
@@ -3577,7 +3619,7 @@
                           <a:ea typeface="Arial" pitchFamily="34" charset="-122"/>
                           <a:cs typeface="Arial" pitchFamily="34" charset="-120"/>
                         </a:rPr>
-                        <a:t>1.0000 / 1.0000</a:t>
+                        <a:t>0.9813 / 0.9638</a:t>
                       </a:r>
                       <a:endParaRPr lang="en-US" sz="1100" dirty="0">
                         <a:latin typeface="Arial" charset="0"/>
@@ -4391,7 +4433,7 @@
         <p:spPr>
           <a:xfrm>
             <a:off x="521208" y="3675888"/>
-            <a:ext cx="6675120" cy="914400"/>
+            <a:ext cx="6675120" cy="2215310"/>
           </a:xfrm>
           <a:prstGeom prst="rect">
             <a:avLst/>
@@ -4407,11 +4449,11 @@
         <p:spPr>
           <a:xfrm>
             <a:off x="7406640" y="1993392"/>
-            <a:ext cx="4206240" cy="1627632"/>
+            <a:ext cx="4206240" cy="1389888"/>
           </a:xfrm>
           <a:prstGeom prst="roundRect">
             <a:avLst>
-              <a:gd name="adj" fmla="val 3371"/>
+              <a:gd name="adj" fmla="val 3947"/>
             </a:avLst>
           </a:prstGeom>
           <a:solidFill>
@@ -4483,7 +4525,7 @@
         <p:spPr>
           <a:xfrm>
             <a:off x="7607808" y="2450592"/>
-            <a:ext cx="3803904" cy="969264"/>
+            <a:ext cx="3803904" cy="731520"/>
           </a:xfrm>
           <a:prstGeom prst="rect">
             <a:avLst/>
@@ -4510,47 +4552,7 @@
                 <a:ea typeface="Arial" pitchFamily="34" charset="-122"/>
                 <a:cs typeface="Arial" pitchFamily="34" charset="-120"/>
               </a:rPr>
-              <a:t>40.2 ms，比 fp32 快 2.18×</a:t>
-            </a:r>
-            <a:endParaRPr lang="en-US" sz="1200" dirty="0"/>
-          </a:p>
-          <a:p>
-            <a:pPr algn="l" indent="0" marL="0">
-              <a:lnSpc>
-                <a:spcPct val="132000"/>
-              </a:lnSpc>
-              <a:buNone/>
-            </a:pPr>
-            <a:r>
-              <a:rPr lang="en-US" sz="1200" dirty="0">
-                <a:solidFill>
-                  <a:srgbClr val="E8EEF4"/>
-                </a:solidFill>
-                <a:latin typeface="Arial" pitchFamily="34" charset="0"/>
-                <a:ea typeface="Arial" pitchFamily="34" charset="-122"/>
-                <a:cs typeface="Arial" pitchFamily="34" charset="-120"/>
-              </a:rPr>
-              <a:t>掩膜 IoU 0.981 / 最差 0.964</a:t>
-            </a:r>
-            <a:endParaRPr lang="en-US" sz="1200" dirty="0"/>
-          </a:p>
-          <a:p>
-            <a:pPr algn="l" indent="0" marL="0">
-              <a:lnSpc>
-                <a:spcPct val="132000"/>
-              </a:lnSpc>
-              <a:buNone/>
-            </a:pPr>
-            <a:r>
-              <a:rPr lang="en-US" sz="1200" dirty="0">
-                <a:solidFill>
-                  <a:srgbClr val="E8EEF4"/>
-                </a:solidFill>
-                <a:latin typeface="Arial" pitchFamily="34" charset="0"/>
-                <a:ea typeface="Arial" pitchFamily="34" charset="-122"/>
-                <a:cs typeface="Arial" pitchFamily="34" charset="-120"/>
-              </a:rPr>
-              <a:t>无导出步骤，权重更新即生效</a:t>
+              <a:t>40.2 ms，比 fp32 快 2.18 倍。掩膜 IoU 0.981，最差 0.964。不用导出，权重一改就生效。</a:t>
             </a:r>
             <a:endParaRPr lang="en-US" sz="1200" dirty="0"/>
           </a:p>
@@ -4564,12 +4566,12 @@
         </p:nvSpPr>
         <p:spPr>
           <a:xfrm>
-            <a:off x="7406640" y="3785616"/>
-            <a:ext cx="4206240" cy="1572768"/>
+            <a:off x="7406640" y="3566160"/>
+            <a:ext cx="4206240" cy="1417320"/>
           </a:xfrm>
           <a:prstGeom prst="roundRect">
             <a:avLst>
-              <a:gd name="adj" fmla="val 3488"/>
+              <a:gd name="adj" fmla="val 3871"/>
             </a:avLst>
           </a:prstGeom>
           <a:solidFill>
@@ -4598,7 +4600,7 @@
         </p:nvSpPr>
         <p:spPr>
           <a:xfrm>
-            <a:off x="7607808" y="3931920"/>
+            <a:off x="7607808" y="3712464"/>
             <a:ext cx="3803904" cy="219456"/>
           </a:xfrm>
           <a:prstGeom prst="rect">
@@ -4626,7 +4628,7 @@
                 <a:ea typeface="Arial" pitchFamily="34" charset="-122"/>
                 <a:cs typeface="Arial" pitchFamily="34" charset="-120"/>
               </a:rPr>
-              <a:t>TensorRT：未完成</a:t>
+              <a:t>TensorRT 没做完</a:t>
             </a:r>
             <a:endParaRPr lang="en-US" sz="1100" dirty="0"/>
           </a:p>
@@ -4640,8 +4642,8 @@
         </p:nvSpPr>
         <p:spPr>
           <a:xfrm>
-            <a:off x="7607808" y="4242816"/>
-            <a:ext cx="3803904" cy="914400"/>
+            <a:off x="7607808" y="4023360"/>
+            <a:ext cx="3803904" cy="758952"/>
           </a:xfrm>
           <a:prstGeom prst="rect">
             <a:avLst/>
@@ -4668,7 +4670,7 @@
                 <a:ea typeface="Arial" pitchFamily="34" charset="-122"/>
                 <a:cs typeface="Arial" pitchFamily="34" charset="-120"/>
               </a:rPr>
-              <a:t>DLL 依赖已解决，但 8 GB 显存被训练占满 + 页面文件不足 → 引擎构建被系统拒绝。不写入任何 TRT 数字。</a:t>
+              <a:t>DLL 依赖已经解决，引擎构建要的显存和页面文件不够，本机做不下去。报告里不写任何 TensorRT 的数字。</a:t>
             </a:r>
             <a:endParaRPr lang="en-US" sz="1100" dirty="0"/>
           </a:p>
@@ -4710,7 +4712,7 @@
                 <a:ea typeface="Arial" pitchFamily="34" charset="-122"/>
                 <a:cs typeface="Arial" pitchFamily="34" charset="-120"/>
               </a:rPr>
-              <a:t>24 张真实图 + 5 次预热 + cuda.synchronize()；两次独立重跑差异 &lt; 1%（NVIDIA GeForce RTX 4060 Laptop GPU）</a:t>
+              <a:t>ONNX 的定位是可移植，fp32 ONNX 与 torch 的误差只有 2.7e-05，延迟并不更快　NVIDIA GeForce RTX 4060 Laptop GPU</a:t>
             </a:r>
             <a:endParaRPr lang="en-US" sz="900" dirty="0"/>
           </a:p>
@@ -4850,7 +4852,7 @@
                 <a:ea typeface="Arial" pitchFamily="34" charset="-122"/>
                 <a:cs typeface="Arial" pitchFamily="34" charset="-120"/>
               </a:rPr>
-              <a:t>工程反思</a:t>
+              <a:t>过程问题</a:t>
             </a:r>
             <a:endParaRPr lang="en-US" sz="1000" dirty="0"/>
           </a:p>
@@ -4892,7 +4894,7 @@
                 <a:ea typeface="Arial" pitchFamily="34" charset="-122"/>
                 <a:cs typeface="Arial" pitchFamily="34" charset="-120"/>
               </a:rPr>
-              <a:t>三个我们愿意主动讲的错误</a:t>
+              <a:t>几个花了时间才修对的问题</a:t>
             </a:r>
             <a:endParaRPr lang="en-US" sz="3000" dirty="0"/>
           </a:p>
@@ -4934,7 +4936,7 @@
                 <a:ea typeface="Arial" pitchFamily="34" charset="-122"/>
                 <a:cs typeface="Arial" pitchFamily="34" charset="-120"/>
               </a:rPr>
-              <a:t>报告的诚实度取决于它记录了多少自己的弯路，而不是它隐藏了多少</a:t>
+              <a:t>下面这些在 docs/experiment-log.md 里都有现象、原因和改法</a:t>
             </a:r>
             <a:endParaRPr lang="en-US" sz="1250" dirty="0"/>
           </a:p>
@@ -4949,11 +4951,11 @@
         <p:spPr>
           <a:xfrm>
             <a:off x="566928" y="1938528"/>
-            <a:ext cx="11057839" cy="1170432"/>
+            <a:ext cx="11057839" cy="1152144"/>
           </a:xfrm>
           <a:prstGeom prst="roundRect">
             <a:avLst>
-              <a:gd name="adj" fmla="val 4688"/>
+              <a:gd name="adj" fmla="val 4762"/>
             </a:avLst>
           </a:prstGeom>
           <a:solidFill>
@@ -5010,7 +5012,7 @@
                 <a:ea typeface="Arial" pitchFamily="34" charset="-122"/>
                 <a:cs typeface="Arial" pitchFamily="34" charset="-120"/>
               </a:rPr>
-              <a:t>延迟错了 2 倍，而且方向是对的</a:t>
+              <a:t>延迟第一次量出了一倍误差</a:t>
             </a:r>
             <a:endParaRPr lang="en-US" sz="1100" dirty="0"/>
           </a:p>
@@ -5025,7 +5027,7 @@
         <p:spPr>
           <a:xfrm>
             <a:off x="768096" y="2395728"/>
-            <a:ext cx="10655503" cy="512064"/>
+            <a:ext cx="10655503" cy="493776"/>
           </a:xfrm>
           <a:prstGeom prst="rect">
             <a:avLst/>
@@ -5052,7 +5054,7 @@
                 <a:ea typeface="Arial" pitchFamily="34" charset="-122"/>
                 <a:cs typeface="Arial" pitchFamily="34" charset="-120"/>
               </a:rPr>
-              <a:t>179 → 88 ms。没预热、没 synchronize()、样本只有 12 张，还把 GPU 训练一起算进去。</a:t>
+              <a:t>初测端到端 175 ms，重测是 88 ms。没预热、没同步、样本只有 12 张，还把同时在跑的 GPU 训练算进去了。</a:t>
             </a:r>
             <a:endParaRPr lang="en-US" sz="1150" dirty="0"/>
           </a:p>
@@ -5072,7 +5074,7 @@
                 <a:ea typeface="Arial" pitchFamily="34" charset="-122"/>
                 <a:cs typeface="Arial" pitchFamily="34" charset="-120"/>
               </a:rPr>
-              <a:t>危险之处在于“fp16 比 fp32 快”这个方向完全正确，所以没人怀疑幅度。</a:t>
+              <a:t>改法是把预热次数和 cuda.synchronize() 写进基准脚本，固定 24 张样本，两次重跑差异压到 1% 以内。</a:t>
             </a:r>
             <a:endParaRPr lang="en-US" sz="1150" dirty="0"/>
           </a:p>
@@ -5087,11 +5089,11 @@
         <p:spPr>
           <a:xfrm>
             <a:off x="566928" y="3218688"/>
-            <a:ext cx="11057839" cy="1170432"/>
+            <a:ext cx="11057839" cy="1152144"/>
           </a:xfrm>
           <a:prstGeom prst="roundRect">
             <a:avLst>
-              <a:gd name="adj" fmla="val 4688"/>
+              <a:gd name="adj" fmla="val 4762"/>
             </a:avLst>
           </a:prstGeom>
           <a:solidFill>
@@ -5148,7 +5150,7 @@
                 <a:ea typeface="Arial" pitchFamily="34" charset="-122"/>
                 <a:cs typeface="Arial" pitchFamily="34" charset="-120"/>
               </a:rPr>
-              <a:t>架构图是一张空白横条</a:t>
+              <a:t>架构图导出来是空白横条</a:t>
             </a:r>
             <a:endParaRPr lang="en-US" sz="1100" dirty="0"/>
           </a:p>
@@ -5163,7 +5165,7 @@
         <p:spPr>
           <a:xfrm>
             <a:off x="768096" y="3675888"/>
-            <a:ext cx="10655503" cy="512064"/>
+            <a:ext cx="10655503" cy="493776"/>
           </a:xfrm>
           <a:prstGeom prst="rect">
             <a:avLst/>
@@ -5190,7 +5192,7 @@
                 <a:ea typeface="Arial" pitchFamily="34" charset="-122"/>
                 <a:cs typeface="Arial" pitchFamily="34" charset="-120"/>
               </a:rPr>
-              <a:t>value= 里写了裸 &lt;b&gt; 标签，文件从头就是非法 XML；draw.io CLI 退出码 0，只导出 2200×101 的空白。</a:t>
+              <a:t>画图脚本里写了裸的 &lt;b&gt; 标签，文件本身就不是合法 XML。draw.io 命令行照样返回 0，导出的 PNG 只有 2200×101。</a:t>
             </a:r>
             <a:endParaRPr lang="en-US" sz="1150" dirty="0"/>
           </a:p>
@@ -5210,7 +5212,7 @@
                 <a:ea typeface="Arial" pitchFamily="34" charset="-122"/>
                 <a:cs typeface="Arial" pitchFamily="34" charset="-120"/>
               </a:rPr>
-              <a:t>现在生成器统一转义 + 布局自检，XML 合法性成了验收项。</a:t>
+              <a:t>现在生成器统一转义，并检查盒子不越界、不重叠，XML 是否合法也进了验收项。</a:t>
             </a:r>
             <a:endParaRPr lang="en-US" sz="1150" dirty="0"/>
           </a:p>
@@ -5225,11 +5227,11 @@
         <p:spPr>
           <a:xfrm>
             <a:off x="566928" y="4498848"/>
-            <a:ext cx="11057839" cy="1170432"/>
+            <a:ext cx="11057839" cy="1152144"/>
           </a:xfrm>
           <a:prstGeom prst="roundRect">
             <a:avLst>
-              <a:gd name="adj" fmla="val 4688"/>
+              <a:gd name="adj" fmla="val 4762"/>
             </a:avLst>
           </a:prstGeom>
           <a:solidFill>
@@ -5286,7 +5288,7 @@
                 <a:ea typeface="Arial" pitchFamily="34" charset="-122"/>
                 <a:cs typeface="Arial" pitchFamily="34" charset="-120"/>
               </a:rPr>
-              <a:t>深度分支实测无效，原因是数据而不是模型</a:t>
+              <a:t>检测精度没到目标值</a:t>
             </a:r>
             <a:endParaRPr lang="en-US" sz="1100" dirty="0"/>
           </a:p>
@@ -5301,7 +5303,7 @@
         <p:spPr>
           <a:xfrm>
             <a:off x="768096" y="4956048"/>
-            <a:ext cx="10655503" cy="512064"/>
+            <a:ext cx="10655503" cy="493776"/>
           </a:xfrm>
           <a:prstGeom prst="rect">
             <a:avLst/>
@@ -5328,7 +5330,7 @@
                 <a:ea typeface="Arial" pitchFamily="34" charset="-122"/>
                 <a:cs typeface="Arial" pitchFamily="34" charset="-120"/>
               </a:rPr>
-              <a:t>16 位 TIFF 被 convert("L") 饱和成纯白，深度通道是常数，消融里 CNN 只掉 0.0042。</a:t>
+              <a:t>YOLOv8m 训满 150 epoch，test 180 张上 mAP@0.5 是 0.7721，目标是 0.85。</a:t>
             </a:r>
             <a:endParaRPr lang="en-US" sz="1150" dirty="0"/>
           </a:p>
@@ -5348,7 +5350,7 @@
                 <a:ea typeface="Arial" pitchFamily="34" charset="-122"/>
                 <a:cs typeface="Arial" pitchFamily="34" charset="-120"/>
               </a:rPr>
-              <a:t>量化影响：换成拉伸后 IoU 0.9916 —— 需要重训才能验证模块真实贡献。</a:t>
+              <a:t>逐类看，crazing 0.403、rolled-in_scale 0.682，另外四类都在 0.83 以上。报告里给了三条改法，没做成的不写成做成了。</a:t>
             </a:r>
             <a:endParaRPr lang="en-US" sz="1150" dirty="0"/>
           </a:p>
@@ -5390,7 +5392,7 @@
                 <a:ea typeface="Arial" pitchFamily="34" charset="-122"/>
                 <a:cs typeface="Arial" pitchFamily="34" charset="-120"/>
               </a:rPr>
-              <a:t>三条在 docs/experiment-log.md 里都有现象、根因、修复与教训</a:t>
+              <a:t>第 11 页 · 过程问题</a:t>
             </a:r>
             <a:endParaRPr lang="en-US" sz="900" dirty="0"/>
           </a:p>
@@ -5572,7 +5574,7 @@
                 <a:ea typeface="Arial" pitchFamily="34" charset="-122"/>
                 <a:cs typeface="Arial" pitchFamily="34" charset="-120"/>
               </a:rPr>
-              <a:t>三件已完成，三件明确没做</a:t>
+              <a:t>现在能做什么，还差什么</a:t>
             </a:r>
             <a:endParaRPr lang="en-US" sz="3000" dirty="0"/>
           </a:p>
@@ -5614,7 +5616,7 @@
                 <a:ea typeface="Arial" pitchFamily="34" charset="-122"/>
                 <a:cs typeface="Arial" pitchFamily="34" charset="-120"/>
               </a:rPr>
-              <a:t>交付物的可信度不来自“看起来完整”，而来自每一条都能被一条命令复核</a:t>
+              <a:t>能演示的部分都有命令和文件对应，没做完的部分也写清楚停在哪一步</a:t>
             </a:r>
             <a:endParaRPr lang="en-US" sz="1250" dirty="0"/>
           </a:p>
@@ -5629,11 +5631,11 @@
         <p:spPr>
           <a:xfrm>
             <a:off x="566928" y="1956816"/>
-            <a:ext cx="5486400" cy="2084832"/>
+            <a:ext cx="5486400" cy="1920240"/>
           </a:xfrm>
           <a:prstGeom prst="roundRect">
             <a:avLst>
-              <a:gd name="adj" fmla="val 2632"/>
+              <a:gd name="adj" fmla="val 2857"/>
             </a:avLst>
           </a:prstGeom>
           <a:solidFill>
@@ -5690,7 +5692,7 @@
                 <a:ea typeface="Arial" pitchFamily="34" charset="-122"/>
                 <a:cs typeface="Arial" pitchFamily="34" charset="-120"/>
               </a:rPr>
-              <a:t>已完成</a:t>
+              <a:t>现在已经能</a:t>
             </a:r>
             <a:endParaRPr lang="en-US" sz="1100" dirty="0"/>
           </a:p>
@@ -5705,7 +5707,7 @@
         <p:spPr>
           <a:xfrm>
             <a:off x="768096" y="2414016"/>
-            <a:ext cx="5084064" cy="1426464"/>
+            <a:ext cx="5084064" cy="1261872"/>
           </a:xfrm>
           <a:prstGeom prst="rect">
             <a:avLst/>
@@ -5732,7 +5734,7 @@
                 <a:ea typeface="Arial" pitchFamily="34" charset="-122"/>
                 <a:cs typeface="Arial" pitchFamily="34" charset="-120"/>
               </a:rPr>
-              <a:t>· 论文四项指标逐位复现（S 0.8718 / MAE 0.0501）</a:t>
+              <a:t>· 论文四项指标复现，S 0.8718，MAE 0.0501</a:t>
             </a:r>
             <a:endParaRPr lang="en-US" sz="1250" dirty="0"/>
           </a:p>
@@ -5752,7 +5754,7 @@
                 <a:ea typeface="Arial" pitchFamily="34" charset="-122"/>
                 <a:cs typeface="Arial" pitchFamily="34" charset="-120"/>
               </a:rPr>
-              <a:t>· 端到端 362 张 0 失败，P50 60.9 ms</a:t>
+              <a:t>· 362 张端到端 0 失败，P50 60.9 ms</a:t>
             </a:r>
             <a:endParaRPr lang="en-US" sz="1250" dirty="0"/>
           </a:p>
@@ -5772,7 +5774,7 @@
                 <a:ea typeface="Arial" pitchFamily="34" charset="-122"/>
                 <a:cs typeface="Arial" pitchFamily="34" charset="-120"/>
               </a:rPr>
-              <a:t>· 工作站 + 批量 CLI + 34 项可执行验收自检</a:t>
+              <a:t>· 工作站、批量命令行和 40 项自检断言</a:t>
             </a:r>
             <a:endParaRPr lang="en-US" sz="1250" dirty="0"/>
           </a:p>
@@ -5787,11 +5789,11 @@
         <p:spPr>
           <a:xfrm>
             <a:off x="6144768" y="1956816"/>
-            <a:ext cx="5486400" cy="2084832"/>
+            <a:ext cx="5486400" cy="1920240"/>
           </a:xfrm>
           <a:prstGeom prst="roundRect">
             <a:avLst>
-              <a:gd name="adj" fmla="val 2632"/>
+              <a:gd name="adj" fmla="val 2857"/>
             </a:avLst>
           </a:prstGeom>
           <a:solidFill>
@@ -5848,7 +5850,7 @@
                 <a:ea typeface="Arial" pitchFamily="34" charset="-122"/>
                 <a:cs typeface="Arial" pitchFamily="34" charset="-120"/>
               </a:rPr>
-              <a:t>未完成（不掩饰）</a:t>
+              <a:t>还没做完</a:t>
             </a:r>
             <a:endParaRPr lang="en-US" sz="1100" dirty="0"/>
           </a:p>
@@ -5863,7 +5865,7 @@
         <p:spPr>
           <a:xfrm>
             <a:off x="6345936" y="2414016"/>
-            <a:ext cx="5084064" cy="1426464"/>
+            <a:ext cx="5084064" cy="1261872"/>
           </a:xfrm>
           <a:prstGeom prst="rect">
             <a:avLst/>
@@ -5890,7 +5892,7 @@
                 <a:ea typeface="Arial" pitchFamily="34" charset="-122"/>
                 <a:cs typeface="Arial" pitchFamily="34" charset="-120"/>
               </a:rPr>
-              <a:t>· 检测 mAP@0.5 0.772 &lt; 0.85 目标</a:t>
+              <a:t>· 检测 mAP@0.5 为 0.772，低于 0.85 的目标</a:t>
             </a:r>
             <a:endParaRPr lang="en-US" sz="1250" dirty="0"/>
           </a:p>
@@ -5910,7 +5912,7 @@
                 <a:ea typeface="Arial" pitchFamily="34" charset="-122"/>
                 <a:cs typeface="Arial" pitchFamily="34" charset="-120"/>
               </a:rPr>
-              <a:t>· TensorRT 引擎未构建（本机内存不足）</a:t>
+              <a:t>· TensorRT 引擎没构建出来</a:t>
             </a:r>
             <a:endParaRPr lang="en-US" sz="1250" dirty="0"/>
           </a:p>
@@ -5930,7 +5932,7 @@
                 <a:ea typeface="Arial" pitchFamily="34" charset="-122"/>
                 <a:cs typeface="Arial" pitchFamily="34" charset="-120"/>
               </a:rPr>
-              <a:t>· 深度流未用拉伸后的数据重训</a:t>
+              <a:t>· 深度流没有用拉伸后的数据重训</a:t>
             </a:r>
             <a:endParaRPr lang="en-US" sz="1250" dirty="0"/>
           </a:p>
@@ -5944,12 +5946,12 @@
         </p:nvSpPr>
         <p:spPr>
           <a:xfrm>
-            <a:off x="566928" y="4261104"/>
-            <a:ext cx="11057839" cy="1298448"/>
+            <a:off x="566928" y="4078224"/>
+            <a:ext cx="11057839" cy="1554480"/>
           </a:xfrm>
           <a:prstGeom prst="roundRect">
             <a:avLst>
-              <a:gd name="adj" fmla="val 4225"/>
+              <a:gd name="adj" fmla="val 3529"/>
             </a:avLst>
           </a:prstGeom>
           <a:solidFill>
@@ -5978,7 +5980,7 @@
         </p:nvSpPr>
         <p:spPr>
           <a:xfrm>
-            <a:off x="768096" y="4407408"/>
+            <a:off x="768096" y="4224528"/>
             <a:ext cx="10655503" cy="219456"/>
           </a:xfrm>
           <a:prstGeom prst="rect">
@@ -6006,7 +6008,7 @@
                 <a:ea typeface="Arial" pitchFamily="34" charset="-122"/>
                 <a:cs typeface="Arial" pitchFamily="34" charset="-120"/>
               </a:rPr>
-              <a:t>后续三件事</a:t>
+              <a:t>接下来三件事</a:t>
             </a:r>
             <a:endParaRPr lang="en-US" sz="1100" dirty="0"/>
           </a:p>
@@ -6020,8 +6022,8 @@
         </p:nvSpPr>
         <p:spPr>
           <a:xfrm>
-            <a:off x="768096" y="4718304"/>
-            <a:ext cx="10655503" cy="640080"/>
+            <a:off x="768096" y="4535424"/>
+            <a:ext cx="10655503" cy="896112"/>
           </a:xfrm>
           <a:prstGeom prst="rect">
             <a:avLst/>
@@ -6048,7 +6050,7 @@
                 <a:ea typeface="Arial" pitchFamily="34" charset="-122"/>
                 <a:cs typeface="Arial" pitchFamily="34" charset="-120"/>
               </a:rPr>
-              <a:t>1) 用拉伸后的深度重训，验证 CMF / CNN 的真实贡献　2) 两路推理并行（60.9 → 约 45 ms）</a:t>
+              <a:t>1) 用拉伸后的深度重训，看 CMF 和 CNN 分支的真实贡献</a:t>
             </a:r>
             <a:endParaRPr lang="en-US" sz="1200" dirty="0"/>
           </a:p>
@@ -6068,7 +6070,27 @@
                 <a:ea typeface="Arial" pitchFamily="34" charset="-122"/>
                 <a:cs typeface="Arial" pitchFamily="34" charset="-120"/>
               </a:rPr>
-              <a:t>3) 与产线合作获取人工评级，做分级一致性检验（Cohen's κ）</a:t>
+              <a:t>2) 分割与检测放两个 CUDA stream，把 60.9 ms 压到 45 ms 左右</a:t>
+            </a:r>
+            <a:endParaRPr lang="en-US" sz="1200" dirty="0"/>
+          </a:p>
+          <a:p>
+            <a:pPr algn="l" indent="0" marL="0">
+              <a:lnSpc>
+                <a:spcPct val="132000"/>
+              </a:lnSpc>
+              <a:buNone/>
+            </a:pPr>
+            <a:r>
+              <a:rPr lang="en-US" sz="1200" dirty="0">
+                <a:solidFill>
+                  <a:srgbClr val="E8EEF4"/>
+                </a:solidFill>
+                <a:latin typeface="Arial" pitchFamily="34" charset="0"/>
+                <a:ea typeface="Arial" pitchFamily="34" charset="-122"/>
+                <a:cs typeface="Arial" pitchFamily="34" charset="-120"/>
+              </a:rPr>
+              <a:t>3) 拿到产线的人工评级，做分级一致性检验（Cohen's κ）</a:t>
             </a:r>
             <a:endParaRPr lang="en-US" sz="1200" dirty="0"/>
           </a:p>
@@ -6110,7 +6132,7 @@
                 <a:ea typeface="Arial" pitchFamily="34" charset="-122"/>
                 <a:cs typeface="Arial" pitchFamily="34" charset="-120"/>
               </a:rPr>
-              <a:t>第 12 页 · 结论</a:t>
+              <a:t>第 12 页 · 总结</a:t>
             </a:r>
             <a:endParaRPr lang="en-US" sz="900" dirty="0"/>
           </a:p>
@@ -6292,7 +6314,7 @@
                 <a:ea typeface="Arial" pitchFamily="34" charset="-122"/>
                 <a:cs typeface="Arial" pitchFamily="34" charset="-120"/>
               </a:rPr>
-              <a:t>一条命令验证全部承诺</a:t>
+              <a:t>这些数字怎么复核</a:t>
             </a:r>
             <a:endParaRPr lang="en-US" sz="3000" dirty="0"/>
           </a:p>
@@ -6334,7 +6356,7 @@
                 <a:ea typeface="Arial" pitchFamily="34" charset="-122"/>
                 <a:cs typeface="Arial" pitchFamily="34" charset="-120"/>
               </a:rPr>
-              <a:t>评审不需要相信我们，只需要跑一次；任何一条不满足就返回非 0 退出码</a:t>
+              <a:t>所有承诺都能用命令跑一遍，任何一条不满足，脚本返回非零退出码</a:t>
             </a:r>
             <a:endParaRPr lang="en-US" sz="1250" dirty="0"/>
           </a:p>
@@ -6452,7 +6474,7 @@
                 <a:ea typeface="Arial" pitchFamily="34" charset="-122"/>
                 <a:cs typeface="Arial" pitchFamily="34" charset="-120"/>
               </a:rPr>
-              <a:t>34 项：指标文件 / 文档链接 / 忽略规则 / 图表齐全 / 单测全绿</a:t>
+              <a:t>40 项断言，覆盖指标、评测口径、文档链接、忽略规则、图表和单测</a:t>
             </a:r>
             <a:endParaRPr lang="en-US" sz="1050" dirty="0"/>
           </a:p>
@@ -6570,7 +6592,7 @@
                 <a:ea typeface="Arial" pitchFamily="34" charset="-122"/>
                 <a:cs typeface="Arial" pitchFamily="34" charset="-120"/>
               </a:rPr>
-              <a:t>23 passed，CPU-only，不需要权重与 GPU</a:t>
+              <a:t>23 个用例全过，只用 CPU，不需要权重和 GPU</a:t>
             </a:r>
             <a:endParaRPr lang="en-US" sz="1050" dirty="0"/>
           </a:p>
@@ -6688,7 +6710,7 @@
                 <a:ea typeface="Arial" pitchFamily="34" charset="-122"/>
                 <a:cs typeface="Arial" pitchFamily="34" charset="-120"/>
               </a:rPr>
-              <a:t>四点五秒起服务，四个 Tab 全部实测过</a:t>
+              <a:t>四点五秒起服务，四个 Tab 都在现场点过</a:t>
             </a:r>
             <a:endParaRPr lang="en-US" sz="1050" dirty="0"/>
           </a:p>
@@ -6764,7 +6786,7 @@
                 <a:ea typeface="Arial" pitchFamily="34" charset="-122"/>
                 <a:cs typeface="Arial" pitchFamily="34" charset="-120"/>
               </a:rPr>
-              <a:t>docs/ 11 篇</a:t>
+              <a:t>docs/ 下 11 篇文档</a:t>
             </a:r>
             <a:endParaRPr lang="en-US" sz="1100" dirty="0"/>
           </a:p>
@@ -6888,7 +6910,7 @@
                 <a:ea typeface="Arial" pitchFamily="34" charset="-122"/>
                 <a:cs typeface="Arial" pitchFamily="34" charset="-120"/>
               </a:rPr>
-              <a:t>每个数字标注来源文件；每张图由脚本生成，不手改 PNG。</a:t>
+              <a:t>每个数字都标了来源文件，每张图由脚本生成，不手改 PNG。</a:t>
             </a:r>
             <a:endParaRPr lang="en-US" sz="1000" dirty="0"/>
           </a:p>
@@ -6964,7 +6986,7 @@
                 <a:ea typeface="Arial" pitchFamily="34" charset="-122"/>
                 <a:cs typeface="Arial" pitchFamily="34" charset="-120"/>
               </a:rPr>
-              <a:t>联系方式</a:t>
+              <a:t>小组分工</a:t>
             </a:r>
             <a:endParaRPr lang="en-US" sz="1100" dirty="0"/>
           </a:p>
@@ -7006,7 +7028,7 @@
                 <a:ea typeface="Arial" pitchFamily="34" charset="-122"/>
                 <a:cs typeface="Arial" pitchFamily="34" charset="-120"/>
               </a:rPr>
-              <a:t>小组 7 人（A–G），分工与验收证据见</a:t>
+              <a:t>小组 7 人（A 到 G），分工和验收证据见</a:t>
             </a:r>
             <a:endParaRPr lang="en-US" sz="1100" dirty="0"/>
           </a:p>
@@ -7029,48 +7051,6 @@
               <a:t>docs/team.md</a:t>
             </a:r>
             <a:endParaRPr lang="en-US" sz="1100" dirty="0"/>
-          </a:p>
-        </p:txBody>
-      </p:sp>
-      <p:sp>
-        <p:nvSpPr>
-          <p:cNvPr id="23" name="Text 21"/>
-          <p:cNvSpPr txBox="1"/>
-          <p:nvPr/>
-        </p:nvSpPr>
-        <p:spPr>
-          <a:xfrm>
-            <a:off x="566928" y="6355080"/>
-            <a:ext cx="11057839" cy="219456"/>
-          </a:xfrm>
-          <a:prstGeom prst="rect">
-            <a:avLst/>
-          </a:prstGeom>
-          <a:noFill/>
-          <a:ln/>
-        </p:spPr>
-        <p:txBody>
-          <a:bodyPr wrap="square" lIns="0" tIns="0" rIns="0" bIns="0" rtlCol="0" anchor="t"/>
-          <a:lstStyle/>
-          <a:p>
-            <a:pPr algn="l" indent="0" marL="0">
-              <a:lnSpc>
-                <a:spcPct val="115000"/>
-              </a:lnSpc>
-              <a:buNone/>
-            </a:pPr>
-            <a:r>
-              <a:rPr lang="en-US" sz="900" dirty="0">
-                <a:solidFill>
-                  <a:srgbClr val="5A6875"/>
-                </a:solidFill>
-                <a:latin typeface="Arial" pitchFamily="34" charset="0"/>
-                <a:ea typeface="Arial" pitchFamily="34" charset="-122"/>
-                <a:cs typeface="Arial" pitchFamily="34" charset="-120"/>
-              </a:rPr>
-              <a:t>python tools/verify.py --json　→　{"failed": [], "passed": true}</a:t>
-            </a:r>
-            <a:endParaRPr lang="en-US" sz="900" dirty="0"/>
           </a:p>
         </p:txBody>
       </p:sp>
@@ -7250,7 +7230,7 @@
                 <a:ea typeface="Arial" pitchFamily="34" charset="-122"/>
                 <a:cs typeface="Arial" pitchFamily="34" charset="-120"/>
               </a:rPr>
-              <a:t>一个问题，三种答案</a:t>
+              <a:t>一张钢轨图上的三个问题</a:t>
             </a:r>
             <a:endParaRPr lang="en-US" sz="3000" dirty="0"/>
           </a:p>
@@ -7292,7 +7272,7 @@
                 <a:ea typeface="Arial" pitchFamily="34" charset="-122"/>
                 <a:cs typeface="Arial" pitchFamily="34" charset="-120"/>
               </a:rPr>
-              <a:t>人工巡检靠眼睛和手电；系统要给出可量化、可复检的证据链，而不只是一张热力图</a:t>
+              <a:t>人工巡检靠眼睛和手电，一个天窗点只能走几公里。系统要回答的是同一张图上的三个层次</a:t>
             </a:r>
             <a:endParaRPr lang="en-US" sz="1250" dirty="0"/>
           </a:p>
@@ -7410,7 +7390,7 @@
                 <a:ea typeface="Arial" pitchFamily="34" charset="-122"/>
                 <a:cs typeface="Arial" pitchFamily="34" charset="-120"/>
               </a:rPr>
-              <a:t>哪些像素是缺陷</a:t>
+              <a:t>缺陷落在哪些像素</a:t>
             </a:r>
             <a:endParaRPr lang="en-US" sz="1500" dirty="0"/>
           </a:p>
@@ -7452,7 +7432,7 @@
                 <a:ea typeface="Arial" pitchFamily="34" charset="-122"/>
                 <a:cs typeface="Arial" pitchFamily="34" charset="-120"/>
               </a:rPr>
-              <a:t>GLIDE-Net，RGB-D 四通道输入</a:t>
+              <a:t>GLIDE-Net 接收 RGB 与深度四通道</a:t>
             </a:r>
             <a:endParaRPr lang="en-US" sz="1150" dirty="0"/>
           </a:p>
@@ -7501,7 +7481,7 @@
                 <a:ea typeface="Arial" pitchFamily="34" charset="-122"/>
                 <a:cs typeface="Arial" pitchFamily="34" charset="-120"/>
               </a:rPr>
-              <a:t>主指标 S-measure / MAE</a:t>
+              <a:t>主指标是 S-measure 和 MAE</a:t>
             </a:r>
             <a:endParaRPr lang="en-US" sz="1150" dirty="0"/>
           </a:p>
@@ -7521,7 +7501,7 @@
                 <a:ea typeface="Arial" pitchFamily="34" charset="-122"/>
                 <a:cs typeface="Arial" pitchFamily="34" charset="-120"/>
               </a:rPr>
-              <a:t>与论文四位小数对齐</a:t>
+              <a:t>与论文对齐到四位小数</a:t>
             </a:r>
             <a:endParaRPr lang="en-US" sz="1150" dirty="0"/>
           </a:p>
@@ -7639,7 +7619,7 @@
                 <a:ea typeface="Arial" pitchFamily="34" charset="-122"/>
                 <a:cs typeface="Arial" pitchFamily="34" charset="-120"/>
               </a:rPr>
-              <a:t>缺陷是什么类别</a:t>
+              <a:t>这块缺陷属于哪一类</a:t>
             </a:r>
             <a:endParaRPr lang="en-US" sz="1500" dirty="0"/>
           </a:p>
@@ -7681,7 +7661,7 @@
                 <a:ea typeface="Arial" pitchFamily="34" charset="-122"/>
                 <a:cs typeface="Arial" pitchFamily="34" charset="-120"/>
               </a:rPr>
-              <a:t>YOLOv8m，NEU-DET 六类</a:t>
+              <a:t>YOLOv8m 在 NEU-DET 六类上训练</a:t>
             </a:r>
             <a:endParaRPr lang="en-US" sz="1150" dirty="0"/>
           </a:p>
@@ -7701,7 +7681,7 @@
                 <a:ea typeface="Arial" pitchFamily="34" charset="-122"/>
                 <a:cs typeface="Arial" pitchFamily="34" charset="-120"/>
               </a:rPr>
-              <a:t>输出框 + 置信度</a:t>
+              <a:t>输出候选框和置信度</a:t>
             </a:r>
             <a:endParaRPr lang="en-US" sz="1150" dirty="0"/>
           </a:p>
@@ -7750,7 +7730,7 @@
                 <a:ea typeface="Arial" pitchFamily="34" charset="-122"/>
                 <a:cs typeface="Arial" pitchFamily="34" charset="-120"/>
               </a:rPr>
-              <a:t>mAP@0.5 = 0.772</a:t>
+              <a:t>mAP@0.5 为 0.772</a:t>
             </a:r>
             <a:endParaRPr lang="en-US" sz="1150" dirty="0"/>
           </a:p>
@@ -7910,7 +7890,7 @@
                 <a:ea typeface="Arial" pitchFamily="34" charset="-122"/>
                 <a:cs typeface="Arial" pitchFamily="34" charset="-120"/>
               </a:rPr>
-              <a:t>规则引擎，不是学习模型</a:t>
+              <a:t>规则引擎，不训练模型</a:t>
             </a:r>
             <a:endParaRPr lang="en-US" sz="1150" dirty="0"/>
           </a:p>
@@ -7930,7 +7910,7 @@
                 <a:ea typeface="Arial" pitchFamily="34" charset="-122"/>
                 <a:cs typeface="Arial" pitchFamily="34" charset="-120"/>
               </a:rPr>
-              <a:t>面积 × 细长 × 置信</a:t>
+              <a:t>面积、细长比和置信度合成评分</a:t>
             </a:r>
             <a:endParaRPr lang="en-US" sz="1150" dirty="0"/>
           </a:p>
@@ -7959,7 +7939,7 @@
                 <a:ea typeface="Arial" pitchFamily="34" charset="-122"/>
                 <a:cs typeface="Arial" pitchFamily="34" charset="-120"/>
               </a:rPr>
-              <a:t>输出 light / medium / severe</a:t>
+              <a:t>落到轻微、中等、严重三档</a:t>
             </a:r>
             <a:endParaRPr lang="en-US" sz="1150" dirty="0"/>
           </a:p>
@@ -7993,7 +7973,7 @@
         </p:nvSpPr>
         <p:spPr>
           <a:xfrm>
-            <a:off x="566928" y="4828032"/>
+            <a:off x="566928" y="4846320"/>
             <a:ext cx="10600639" cy="640080"/>
           </a:xfrm>
           <a:prstGeom prst="rect">
@@ -8021,7 +8001,7 @@
                 <a:ea typeface="Arial" pitchFamily="34" charset="-122"/>
                 <a:cs typeface="Arial" pitchFamily="34" charset="-120"/>
               </a:rPr>
-              <a:t>三者不冲突，而是同一张图上的三种粒度。课程实践的工作量集中在后两层，以及把它们串成一条可运行流水线的工程层。</a:t>
+              <a:t>课程实践的重心放在后两层，以及把三层串成一条能跑起来的流水线。</a:t>
             </a:r>
             <a:endParaRPr lang="en-US" sz="1300" dirty="0"/>
           </a:p>
@@ -8245,7 +8225,7 @@
                 <a:ea typeface="Arial" pitchFamily="34" charset="-122"/>
                 <a:cs typeface="Arial" pitchFamily="34" charset="-120"/>
               </a:rPr>
-              <a:t>冻结主干，只训 12.4%</a:t>
+              <a:t>模型结构沿用原论文</a:t>
             </a:r>
             <a:endParaRPr lang="en-US" sz="3000" dirty="0"/>
           </a:p>
@@ -8287,7 +8267,7 @@
                 <a:ea typeface="Arial" pitchFamily="34" charset="-122"/>
                 <a:cs typeface="Arial" pitchFamily="34" charset="-120"/>
               </a:rPr>
-              <a:t>242.06 M 参数里只有 29.91 M 可训练——这是 8 GB 显存逼出来的设计，也是它的合理性所在</a:t>
+              <a:t>总参数 242.06 M，可训练的只有 29.91 M。8 GB 显存装不下全量微调，冻结主干加轻量适配是走得通的做法</a:t>
             </a:r>
             <a:endParaRPr lang="en-US" sz="1250" dirty="0"/>
           </a:p>
@@ -8309,8 +8289,8 @@
         </p:blipFill>
         <p:spPr>
           <a:xfrm>
-            <a:off x="493776" y="1938528"/>
-            <a:ext cx="11204143" cy="914400"/>
+            <a:off x="457200" y="1792224"/>
+            <a:ext cx="6949440" cy="4166505"/>
           </a:xfrm>
           <a:prstGeom prst="rect">
             <a:avLst/>
@@ -8325,8 +8305,8 @@
         </p:nvSpPr>
         <p:spPr>
           <a:xfrm>
-            <a:off x="566928" y="4681728"/>
-            <a:ext cx="2651760" cy="566928"/>
+            <a:off x="7882128" y="1847088"/>
+            <a:ext cx="3749040" cy="566928"/>
           </a:xfrm>
           <a:prstGeom prst="rect">
             <a:avLst/>
@@ -8345,7 +8325,7 @@
               <a:buNone/>
             </a:pPr>
             <a:r>
-              <a:rPr lang="en-US" sz="2200" b="1" dirty="0">
+              <a:rPr lang="en-US" sz="2600" b="1" dirty="0">
                 <a:solidFill>
                   <a:srgbClr val="E8EEF4"/>
                 </a:solidFill>
@@ -8355,7 +8335,7 @@
               </a:rPr>
               <a:t>242.06 M</a:t>
             </a:r>
-            <a:endParaRPr lang="en-US" sz="2200" dirty="0"/>
+            <a:endParaRPr lang="en-US" sz="2600" dirty="0"/>
           </a:p>
         </p:txBody>
       </p:sp>
@@ -8367,8 +8347,8 @@
         </p:nvSpPr>
         <p:spPr>
           <a:xfrm>
-            <a:off x="566928" y="5193792"/>
-            <a:ext cx="2651760" cy="365760"/>
+            <a:off x="7882128" y="2359152"/>
+            <a:ext cx="3749040" cy="365760"/>
           </a:xfrm>
           <a:prstGeom prst="rect">
             <a:avLst/>
@@ -8409,8 +8389,8 @@
         </p:nvSpPr>
         <p:spPr>
           <a:xfrm>
-            <a:off x="3364992" y="4681728"/>
-            <a:ext cx="2651760" cy="566928"/>
+            <a:off x="7882128" y="2779776"/>
+            <a:ext cx="3749040" cy="566928"/>
           </a:xfrm>
           <a:prstGeom prst="rect">
             <a:avLst/>
@@ -8429,7 +8409,7 @@
               <a:buNone/>
             </a:pPr>
             <a:r>
-              <a:rPr lang="en-US" sz="2200" b="1" dirty="0">
+              <a:rPr lang="en-US" sz="2600" b="1" dirty="0">
                 <a:solidFill>
                   <a:srgbClr val="E8EEF4"/>
                 </a:solidFill>
@@ -8439,7 +8419,7 @@
               </a:rPr>
               <a:t>29.91 M</a:t>
             </a:r>
-            <a:endParaRPr lang="en-US" sz="2200" dirty="0"/>
+            <a:endParaRPr lang="en-US" sz="2600" dirty="0"/>
           </a:p>
         </p:txBody>
       </p:sp>
@@ -8451,8 +8431,8 @@
         </p:nvSpPr>
         <p:spPr>
           <a:xfrm>
-            <a:off x="3364992" y="5193792"/>
-            <a:ext cx="2651760" cy="365760"/>
+            <a:off x="7882128" y="3291840"/>
+            <a:ext cx="3749040" cy="365760"/>
           </a:xfrm>
           <a:prstGeom prst="rect">
             <a:avLst/>
@@ -8479,7 +8459,7 @@
                 <a:ea typeface="Arial" pitchFamily="34" charset="-122"/>
                 <a:cs typeface="Arial" pitchFamily="34" charset="-120"/>
               </a:rPr>
-              <a:t>可训练（12.4%）</a:t>
+              <a:t>可训练，占 12.4%</a:t>
             </a:r>
             <a:endParaRPr lang="en-US" sz="1050" dirty="0"/>
           </a:p>
@@ -8493,8 +8473,8 @@
         </p:nvSpPr>
         <p:spPr>
           <a:xfrm>
-            <a:off x="6163056" y="4681728"/>
-            <a:ext cx="2651760" cy="566928"/>
+            <a:off x="7882128" y="3712464"/>
+            <a:ext cx="3749040" cy="566928"/>
           </a:xfrm>
           <a:prstGeom prst="rect">
             <a:avLst/>
@@ -8513,7 +8493,7 @@
               <a:buNone/>
             </a:pPr>
             <a:r>
-              <a:rPr lang="en-US" sz="2200" b="1" dirty="0">
+              <a:rPr lang="en-US" sz="2600" b="1" dirty="0">
                 <a:solidFill>
                   <a:srgbClr val="E8EEF4"/>
                 </a:solidFill>
@@ -8523,7 +8503,7 @@
               </a:rPr>
               <a:t>213.86 M</a:t>
             </a:r>
-            <a:endParaRPr lang="en-US" sz="2200" dirty="0"/>
+            <a:endParaRPr lang="en-US" sz="2600" dirty="0"/>
           </a:p>
         </p:txBody>
       </p:sp>
@@ -8535,8 +8515,8 @@
         </p:nvSpPr>
         <p:spPr>
           <a:xfrm>
-            <a:off x="6163056" y="5193792"/>
-            <a:ext cx="2651760" cy="365760"/>
+            <a:off x="7882128" y="4224528"/>
+            <a:ext cx="3749040" cy="365760"/>
           </a:xfrm>
           <a:prstGeom prst="rect">
             <a:avLst/>
@@ -8577,8 +8557,8 @@
         </p:nvSpPr>
         <p:spPr>
           <a:xfrm>
-            <a:off x="8961120" y="4681728"/>
-            <a:ext cx="2651760" cy="566928"/>
+            <a:off x="7882128" y="4645152"/>
+            <a:ext cx="3749040" cy="566928"/>
           </a:xfrm>
           <a:prstGeom prst="rect">
             <a:avLst/>
@@ -8597,7 +8577,7 @@
               <a:buNone/>
             </a:pPr>
             <a:r>
-              <a:rPr lang="en-US" sz="2200" b="1" dirty="0">
+              <a:rPr lang="en-US" sz="2600" b="1" dirty="0">
                 <a:solidFill>
                   <a:srgbClr val="E8EEF4"/>
                 </a:solidFill>
@@ -8607,7 +8587,7 @@
               </a:rPr>
               <a:t>12.26 GB</a:t>
             </a:r>
-            <a:endParaRPr lang="en-US" sz="2200" dirty="0"/>
+            <a:endParaRPr lang="en-US" sz="2600" dirty="0"/>
           </a:p>
         </p:txBody>
       </p:sp>
@@ -8619,8 +8599,8 @@
         </p:nvSpPr>
         <p:spPr>
           <a:xfrm>
-            <a:off x="8961120" y="5193792"/>
-            <a:ext cx="2651760" cy="365760"/>
+            <a:off x="7882128" y="5157216"/>
+            <a:ext cx="3749040" cy="365760"/>
           </a:xfrm>
           <a:prstGeom prst="rect">
             <a:avLst/>
@@ -8647,7 +8627,7 @@
                 <a:ea typeface="Arial" pitchFamily="34" charset="-122"/>
                 <a:cs typeface="Arial" pitchFamily="34" charset="-120"/>
               </a:rPr>
-              <a:t>全量微调峰值（装不下）</a:t>
+              <a:t>全量微调的峰值显存</a:t>
             </a:r>
             <a:endParaRPr lang="en-US" sz="1050" dirty="0"/>
           </a:p>
@@ -8661,6 +8641,68 @@
         </p:nvSpPr>
         <p:spPr>
           <a:xfrm>
+            <a:off x="7882128" y="5596128"/>
+            <a:ext cx="3749040" cy="548640"/>
+          </a:xfrm>
+          <a:prstGeom prst="rect">
+            <a:avLst/>
+          </a:prstGeom>
+          <a:noFill/>
+          <a:ln/>
+        </p:spPr>
+        <p:txBody>
+          <a:bodyPr wrap="square" lIns="0" tIns="0" rIns="0" bIns="0" rtlCol="0" anchor="t"/>
+          <a:lstStyle/>
+          <a:p>
+            <a:pPr algn="l" indent="0" marL="0">
+              <a:lnSpc>
+                <a:spcPct val="130000"/>
+              </a:lnSpc>
+              <a:buNone/>
+            </a:pPr>
+            <a:r>
+              <a:rPr lang="en-US" sz="950" dirty="0">
+                <a:solidFill>
+                  <a:srgbClr val="8695A4"/>
+                </a:solidFill>
+                <a:latin typeface="Arial" pitchFamily="34" charset="0"/>
+                <a:ea typeface="Arial" pitchFamily="34" charset="-122"/>
+                <a:cs typeface="Arial" pitchFamily="34" charset="-120"/>
+              </a:rPr>
+              <a:t>可训练部分是 Adapter 1.71 M、CNN-RGB 8.96 M、</a:t>
+            </a:r>
+            <a:endParaRPr lang="en-US" sz="950" dirty="0"/>
+          </a:p>
+          <a:p>
+            <a:pPr algn="l" indent="0" marL="0">
+              <a:lnSpc>
+                <a:spcPct val="130000"/>
+              </a:lnSpc>
+              <a:buNone/>
+            </a:pPr>
+            <a:r>
+              <a:rPr lang="en-US" sz="950" dirty="0">
+                <a:solidFill>
+                  <a:srgbClr val="8695A4"/>
+                </a:solidFill>
+                <a:latin typeface="Arial" pitchFamily="34" charset="0"/>
+                <a:ea typeface="Arial" pitchFamily="34" charset="-122"/>
+                <a:cs typeface="Arial" pitchFamily="34" charset="-120"/>
+              </a:rPr>
+              <a:t>CNN-Depth 8.94 M、CMF 2.61 M 和 MSDEF 7.68 M。</a:t>
+            </a:r>
+            <a:endParaRPr lang="en-US" sz="950" dirty="0"/>
+          </a:p>
+        </p:txBody>
+      </p:sp>
+      <p:sp>
+        <p:nvSpPr>
+          <p:cNvPr id="17" name="Text 14"/>
+          <p:cNvSpPr txBox="1"/>
+          <p:nvPr/>
+        </p:nvSpPr>
+        <p:spPr>
+          <a:xfrm>
             <a:off x="566928" y="6355080"/>
             <a:ext cx="11057839" cy="219456"/>
           </a:xfrm>
@@ -8689,7 +8731,7 @@
                 <a:ea typeface="Arial" pitchFamily="34" charset="-122"/>
                 <a:cs typeface="Arial" pitchFamily="34" charset="-120"/>
               </a:rPr>
-              <a:t>Adapter 1.71 M · CNN-RGB 8.96 M · CNN-Depth 8.94 M · CMF 2.61 M · MSDEF 7.68 M</a:t>
+              <a:t>图为 tools/make_diagrams.py 生成，左侧 RGB 与深度两条输入，中间三个 CMF 做跨模态融合，右侧 MSDEF 解码到四个尺度</a:t>
             </a:r>
             <a:endParaRPr lang="en-US" sz="900" dirty="0"/>
           </a:p>
@@ -8871,7 +8913,7 @@
                 <a:ea typeface="Arial" pitchFamily="34" charset="-122"/>
                 <a:cs typeface="Arial" pitchFamily="34" charset="-120"/>
               </a:rPr>
-              <a:t>四项指标，逐位对齐</a:t>
+              <a:t>复现结果对得上论文</a:t>
             </a:r>
             <a:endParaRPr lang="en-US" sz="3000" dirty="0"/>
           </a:p>
@@ -8913,7 +8955,7 @@
                 <a:ea typeface="Arial" pitchFamily="34" charset="-122"/>
                 <a:cs typeface="Arial" pitchFamily="34" charset="-120"/>
               </a:rPr>
-              <a:t>不是“接近”，是小数点后四位一致——这证明代码链路与论文完全相同，后续增量才有意义</a:t>
+              <a:t>四项指标都落在小数点后四位，后面的工程增量才站得住</a:t>
             </a:r>
             <a:endParaRPr lang="en-US" sz="1250" dirty="0"/>
           </a:p>
@@ -9567,8 +9609,8 @@
         </p:nvSpPr>
         <p:spPr>
           <a:xfrm>
-            <a:off x="566928" y="3401568"/>
-            <a:ext cx="6766560" cy="274320"/>
+            <a:off x="566928" y="3456432"/>
+            <a:ext cx="5852160" cy="256032"/>
           </a:xfrm>
           <a:prstGeom prst="rect">
             <a:avLst/>
@@ -9587,7 +9629,7 @@
               <a:buNone/>
             </a:pPr>
             <a:r>
-              <a:rPr lang="en-US" sz="1200" dirty="0">
+              <a:rPr lang="en-US" sz="1150" dirty="0">
                 <a:solidFill>
                   <a:srgbClr val="30A46C"/>
                 </a:solidFill>
@@ -9595,36 +9637,12 @@
                 <a:ea typeface="Arial" pitchFamily="34" charset="-122"/>
                 <a:cs typeface="Arial" pitchFamily="34" charset="-120"/>
               </a:rPr>
-              <a:t>12 种对比方法中排名第一：S 0.8718，次优 MENet-KD 0.8562</a:t>
-            </a:r>
-            <a:endParaRPr lang="en-US" sz="1200" dirty="0"/>
-          </a:p>
-        </p:txBody>
-      </p:sp>
-      <p:pic>
-        <p:nvPicPr>
-          <p:cNvPr id="24" name="Image 0" descr="D:\projects\vpteam\GLIDE-Net\docs\assets\comparison-bars.png">    </p:cNvPr>
-          <p:cNvPicPr>
-            <a:picLocks noChangeAspect="1"/>
-          </p:cNvPicPr>
-          <p:nvPr/>
-        </p:nvPicPr>
-        <p:blipFill>
-          <a:blip r:embed="rId1"/>
-          <a:stretch>
-            <a:fillRect/>
-          </a:stretch>
-        </p:blipFill>
-        <p:spPr>
-          <a:xfrm>
-            <a:off x="521208" y="3749040"/>
-            <a:ext cx="6903720" cy="914400"/>
-          </a:xfrm>
-          <a:prstGeom prst="rect">
-            <a:avLst/>
-          </a:prstGeom>
-        </p:spPr>
-      </p:pic>
+              <a:t>S-measure 排名前五，完整 12 行在 predictions/metrics.csv</a:t>
+            </a:r>
+            <a:endParaRPr lang="en-US" sz="1150" dirty="0"/>
+          </a:p>
+        </p:txBody>
+      </p:sp>
       <p:graphicFrame>
         <p:nvGraphicFramePr>
           <p:cNvPr id="5" name="Table 0"/>
@@ -9640,19 +9658,19 @@
           </p:nvPr>
         </p:nvGraphicFramePr>
         <p:xfrm>
-          <a:off x="7699248" y="3749040"/>
-          <a:ext cx="3749040" cy="914400"/>
+          <a:off x="566928" y="3785616"/>
+          <a:ext cx="5029200" cy="914400"/>
         </p:xfrm>
         <a:graphic>
           <a:graphicData uri="http://schemas.openxmlformats.org/drawingml/2006/table">
             <a:tbl>
               <a:tblPr/>
               <a:tblGrid>
-                <a:gridCol w="1737360"/>
-                <a:gridCol w="1005840"/>
-                <a:gridCol w="1005840"/>
+                <a:gridCol w="2834640"/>
+                <a:gridCol w="1097280"/>
+                <a:gridCol w="1097280"/>
               </a:tblGrid>
-              <a:tr h="292608">
+              <a:tr h="310896">
                 <a:tc>
                   <a:txBody>
                     <a:bodyPr/>
@@ -9662,7 +9680,7 @@
                         <a:buNone/>
                       </a:pPr>
                       <a:r>
-                        <a:rPr lang="en-US" sz="1050" dirty="0">
+                        <a:rPr lang="en-US" sz="1100" dirty="0">
                           <a:solidFill>
                             <a:srgbClr val="E8EEF4"/>
                           </a:solidFill>
@@ -9670,9 +9688,9 @@
                           <a:ea typeface="Arial" pitchFamily="34" charset="-122"/>
                           <a:cs typeface="Arial" pitchFamily="34" charset="-120"/>
                         </a:rPr>
-                        <a:t>消融变体</a:t>
+                        <a:t>方法</a:t>
                       </a:r>
-                      <a:endParaRPr lang="en-US" sz="1050" dirty="0">
+                      <a:endParaRPr lang="en-US" sz="1100" dirty="0">
                         <a:latin typeface="Arial" charset="0"/>
                         <a:ea typeface="Arial" charset="0"/>
                         <a:cs typeface="Arial" charset="0"/>
@@ -9730,7 +9748,7 @@
                         <a:buNone/>
                       </a:pPr>
                       <a:r>
-                        <a:rPr lang="en-US" sz="1050" dirty="0">
+                        <a:rPr lang="en-US" sz="1100" dirty="0">
                           <a:solidFill>
                             <a:srgbClr val="E8EEF4"/>
                           </a:solidFill>
@@ -9740,7 +9758,7 @@
                         </a:rPr>
                         <a:t>S</a:t>
                       </a:r>
-                      <a:endParaRPr lang="en-US" sz="1050" dirty="0">
+                      <a:endParaRPr lang="en-US" sz="1100" dirty="0">
                         <a:latin typeface="Arial" charset="0"/>
                         <a:ea typeface="Arial" charset="0"/>
                         <a:cs typeface="Arial" charset="0"/>
@@ -9798,7 +9816,7 @@
                         <a:buNone/>
                       </a:pPr>
                       <a:r>
-                        <a:rPr lang="en-US" sz="1050" dirty="0">
+                        <a:rPr lang="en-US" sz="1100" dirty="0">
                           <a:solidFill>
                             <a:srgbClr val="E8EEF4"/>
                           </a:solidFill>
@@ -9806,9 +9824,9 @@
                           <a:ea typeface="Arial" pitchFamily="34" charset="-122"/>
                           <a:cs typeface="Arial" pitchFamily="34" charset="-120"/>
                         </a:rPr>
-                        <a:t>ΔS</a:t>
+                        <a:t>MAE</a:t>
                       </a:r>
-                      <a:endParaRPr lang="en-US" sz="1050" dirty="0">
+                      <a:endParaRPr lang="en-US" sz="1100" dirty="0">
                         <a:latin typeface="Arial" charset="0"/>
                         <a:ea typeface="Arial" charset="0"/>
                         <a:cs typeface="Arial" charset="0"/>
@@ -9858,7 +9876,7 @@
                   </a:tcPr>
                 </a:tc>
               </a:tr>
-              <a:tr h="292608">
+              <a:tr h="310896">
                 <a:tc>
                   <a:txBody>
                     <a:bodyPr/>
@@ -9868,7 +9886,7 @@
                         <a:buNone/>
                       </a:pPr>
                       <a:r>
-                        <a:rPr lang="en-US" sz="1050" dirty="0">
+                        <a:rPr lang="en-US" sz="1100" dirty="0">
                           <a:solidFill>
                             <a:srgbClr val="E8EEF4"/>
                           </a:solidFill>
@@ -9876,9 +9894,9 @@
                           <a:ea typeface="Arial" pitchFamily="34" charset="-122"/>
                           <a:cs typeface="Arial" pitchFamily="34" charset="-120"/>
                         </a:rPr>
-                        <a:t>w_o_CMF</a:t>
+                        <a:t>GLIDE-Net（本组）</a:t>
                       </a:r>
-                      <a:endParaRPr lang="en-US" sz="1050" dirty="0">
+                      <a:endParaRPr lang="en-US" sz="1100" dirty="0">
                         <a:latin typeface="Arial" charset="0"/>
                         <a:ea typeface="Arial" charset="0"/>
                         <a:cs typeface="Arial" charset="0"/>
@@ -9936,7 +9954,7 @@
                         <a:buNone/>
                       </a:pPr>
                       <a:r>
-                        <a:rPr lang="en-US" sz="1050" dirty="0">
+                        <a:rPr lang="en-US" sz="1100" dirty="0">
                           <a:solidFill>
                             <a:srgbClr val="E8EEF4"/>
                           </a:solidFill>
@@ -9944,9 +9962,9 @@
                           <a:ea typeface="Arial" pitchFamily="34" charset="-122"/>
                           <a:cs typeface="Arial" pitchFamily="34" charset="-120"/>
                         </a:rPr>
-                        <a:t>0.8662</a:t>
+                        <a:t>0.8718</a:t>
                       </a:r>
-                      <a:endParaRPr lang="en-US" sz="1050" dirty="0">
+                      <a:endParaRPr lang="en-US" sz="1100" dirty="0">
                         <a:latin typeface="Arial" charset="0"/>
                         <a:ea typeface="Arial" charset="0"/>
                         <a:cs typeface="Arial" charset="0"/>
@@ -10004,7 +10022,7 @@
                         <a:buNone/>
                       </a:pPr>
                       <a:r>
-                        <a:rPr lang="en-US" sz="1050" dirty="0">
+                        <a:rPr lang="en-US" sz="1100" dirty="0">
                           <a:solidFill>
                             <a:srgbClr val="E8EEF4"/>
                           </a:solidFill>
@@ -10012,9 +10030,9 @@
                           <a:ea typeface="Arial" pitchFamily="34" charset="-122"/>
                           <a:cs typeface="Arial" pitchFamily="34" charset="-120"/>
                         </a:rPr>
-                        <a:t>-0.0056</a:t>
+                        <a:t>0.0501</a:t>
                       </a:r>
-                      <a:endParaRPr lang="en-US" sz="1050" dirty="0">
+                      <a:endParaRPr lang="en-US" sz="1100" dirty="0">
                         <a:latin typeface="Arial" charset="0"/>
                         <a:ea typeface="Arial" charset="0"/>
                         <a:cs typeface="Arial" charset="0"/>
@@ -10064,7 +10082,7 @@
                   </a:tcPr>
                 </a:tc>
               </a:tr>
-              <a:tr h="292608">
+              <a:tr h="310896">
                 <a:tc>
                   <a:txBody>
                     <a:bodyPr/>
@@ -10074,7 +10092,7 @@
                         <a:buNone/>
                       </a:pPr>
                       <a:r>
-                        <a:rPr lang="en-US" sz="1050" dirty="0">
+                        <a:rPr lang="en-US" sz="1100" dirty="0">
                           <a:solidFill>
                             <a:srgbClr val="E8EEF4"/>
                           </a:solidFill>
@@ -10082,9 +10100,9 @@
                           <a:ea typeface="Arial" pitchFamily="34" charset="-122"/>
                           <a:cs typeface="Arial" pitchFamily="34" charset="-120"/>
                         </a:rPr>
-                        <a:t>w_o_CNN</a:t>
+                        <a:t>MENet-KD</a:t>
                       </a:r>
-                      <a:endParaRPr lang="en-US" sz="1050" dirty="0">
+                      <a:endParaRPr lang="en-US" sz="1100" dirty="0">
                         <a:latin typeface="Arial" charset="0"/>
                         <a:ea typeface="Arial" charset="0"/>
                         <a:cs typeface="Arial" charset="0"/>
@@ -10142,7 +10160,7 @@
                         <a:buNone/>
                       </a:pPr>
                       <a:r>
-                        <a:rPr lang="en-US" sz="1050" dirty="0">
+                        <a:rPr lang="en-US" sz="1100" dirty="0">
                           <a:solidFill>
                             <a:srgbClr val="E8EEF4"/>
                           </a:solidFill>
@@ -10150,9 +10168,9 @@
                           <a:ea typeface="Arial" pitchFamily="34" charset="-122"/>
                           <a:cs typeface="Arial" pitchFamily="34" charset="-120"/>
                         </a:rPr>
-                        <a:t>0.8676</a:t>
+                        <a:t>0.8562</a:t>
                       </a:r>
-                      <a:endParaRPr lang="en-US" sz="1050" dirty="0">
+                      <a:endParaRPr lang="en-US" sz="1100" dirty="0">
                         <a:latin typeface="Arial" charset="0"/>
                         <a:ea typeface="Arial" charset="0"/>
                         <a:cs typeface="Arial" charset="0"/>
@@ -10210,7 +10228,7 @@
                         <a:buNone/>
                       </a:pPr>
                       <a:r>
-                        <a:rPr lang="en-US" sz="1050" dirty="0">
+                        <a:rPr lang="en-US" sz="1100" dirty="0">
                           <a:solidFill>
                             <a:srgbClr val="E8EEF4"/>
                           </a:solidFill>
@@ -10218,9 +10236,9 @@
                           <a:ea typeface="Arial" pitchFamily="34" charset="-122"/>
                           <a:cs typeface="Arial" pitchFamily="34" charset="-120"/>
                         </a:rPr>
-                        <a:t>-0.0042</a:t>
+                        <a:t>0.0559</a:t>
                       </a:r>
-                      <a:endParaRPr lang="en-US" sz="1050" dirty="0">
+                      <a:endParaRPr lang="en-US" sz="1100" dirty="0">
                         <a:latin typeface="Arial" charset="0"/>
                         <a:ea typeface="Arial" charset="0"/>
                         <a:cs typeface="Arial" charset="0"/>
@@ -10270,7 +10288,7 @@
                   </a:tcPr>
                 </a:tc>
               </a:tr>
-              <a:tr h="292608">
+              <a:tr h="310896">
                 <a:tc>
                   <a:txBody>
                     <a:bodyPr/>
@@ -10280,7 +10298,7 @@
                         <a:buNone/>
                       </a:pPr>
                       <a:r>
-                        <a:rPr lang="en-US" sz="1050" dirty="0">
+                        <a:rPr lang="en-US" sz="1100" dirty="0">
                           <a:solidFill>
                             <a:srgbClr val="E8EEF4"/>
                           </a:solidFill>
@@ -10288,9 +10306,9 @@
                           <a:ea typeface="Arial" pitchFamily="34" charset="-122"/>
                           <a:cs typeface="Arial" pitchFamily="34" charset="-120"/>
                         </a:rPr>
-                        <a:t>w_o_MSDEF</a:t>
+                        <a:t>RDNet-KD</a:t>
                       </a:r>
-                      <a:endParaRPr lang="en-US" sz="1050" dirty="0">
+                      <a:endParaRPr lang="en-US" sz="1100" dirty="0">
                         <a:latin typeface="Arial" charset="0"/>
                         <a:ea typeface="Arial" charset="0"/>
                         <a:cs typeface="Arial" charset="0"/>
@@ -10348,7 +10366,7 @@
                         <a:buNone/>
                       </a:pPr>
                       <a:r>
-                        <a:rPr lang="en-US" sz="1050" dirty="0">
+                        <a:rPr lang="en-US" sz="1100" dirty="0">
                           <a:solidFill>
                             <a:srgbClr val="E8EEF4"/>
                           </a:solidFill>
@@ -10356,9 +10374,9 @@
                           <a:ea typeface="Arial" pitchFamily="34" charset="-122"/>
                           <a:cs typeface="Arial" pitchFamily="34" charset="-120"/>
                         </a:rPr>
-                        <a:t>0.8641</a:t>
+                        <a:t>0.8558</a:t>
                       </a:r>
-                      <a:endParaRPr lang="en-US" sz="1050" dirty="0">
+                      <a:endParaRPr lang="en-US" sz="1100" dirty="0">
                         <a:latin typeface="Arial" charset="0"/>
                         <a:ea typeface="Arial" charset="0"/>
                         <a:cs typeface="Arial" charset="0"/>
@@ -10416,7 +10434,7 @@
                         <a:buNone/>
                       </a:pPr>
                       <a:r>
-                        <a:rPr lang="en-US" sz="1050" dirty="0">
+                        <a:rPr lang="en-US" sz="1100" dirty="0">
                           <a:solidFill>
                             <a:srgbClr val="E8EEF4"/>
                           </a:solidFill>
@@ -10424,9 +10442,9 @@
                           <a:ea typeface="Arial" pitchFamily="34" charset="-122"/>
                           <a:cs typeface="Arial" pitchFamily="34" charset="-120"/>
                         </a:rPr>
-                        <a:t>-0.0077</a:t>
+                        <a:t>0.0581</a:t>
                       </a:r>
-                      <a:endParaRPr lang="en-US" sz="1050" dirty="0">
+                      <a:endParaRPr lang="en-US" sz="1100" dirty="0">
                         <a:latin typeface="Arial" charset="0"/>
                         <a:ea typeface="Arial" charset="0"/>
                         <a:cs typeface="Arial" charset="0"/>
@@ -10476,7 +10494,7 @@
                   </a:tcPr>
                 </a:tc>
               </a:tr>
-              <a:tr h="292608">
+              <a:tr h="310896">
                 <a:tc>
                   <a:txBody>
                     <a:bodyPr/>
@@ -10486,7 +10504,7 @@
                         <a:buNone/>
                       </a:pPr>
                       <a:r>
-                        <a:rPr lang="en-US" sz="1050" dirty="0">
+                        <a:rPr lang="en-US" sz="1100" dirty="0">
                           <a:solidFill>
                             <a:srgbClr val="E8EEF4"/>
                           </a:solidFill>
@@ -10494,9 +10512,9 @@
                           <a:ea typeface="Arial" pitchFamily="34" charset="-122"/>
                           <a:cs typeface="Arial" pitchFamily="34" charset="-120"/>
                         </a:rPr>
-                        <a:t>w_o_Transformer</a:t>
+                        <a:t>OpenRSS</a:t>
                       </a:r>
-                      <a:endParaRPr lang="en-US" sz="1050" dirty="0">
+                      <a:endParaRPr lang="en-US" sz="1100" dirty="0">
                         <a:latin typeface="Arial" charset="0"/>
                         <a:ea typeface="Arial" charset="0"/>
                         <a:cs typeface="Arial" charset="0"/>
@@ -10554,7 +10572,7 @@
                         <a:buNone/>
                       </a:pPr>
                       <a:r>
-                        <a:rPr lang="en-US" sz="1050" dirty="0">
+                        <a:rPr lang="en-US" sz="1100" dirty="0">
                           <a:solidFill>
                             <a:srgbClr val="E8EEF4"/>
                           </a:solidFill>
@@ -10562,9 +10580,9 @@
                           <a:ea typeface="Arial" pitchFamily="34" charset="-122"/>
                           <a:cs typeface="Arial" pitchFamily="34" charset="-120"/>
                         </a:rPr>
-                        <a:t>0.7096</a:t>
+                        <a:t>0.8556</a:t>
                       </a:r>
-                      <a:endParaRPr lang="en-US" sz="1050" dirty="0">
+                      <a:endParaRPr lang="en-US" sz="1100" dirty="0">
                         <a:latin typeface="Arial" charset="0"/>
                         <a:ea typeface="Arial" charset="0"/>
                         <a:cs typeface="Arial" charset="0"/>
@@ -10622,7 +10640,7 @@
                         <a:buNone/>
                       </a:pPr>
                       <a:r>
-                        <a:rPr lang="en-US" sz="1050" dirty="0">
+                        <a:rPr lang="en-US" sz="1100" dirty="0">
                           <a:solidFill>
                             <a:srgbClr val="E8EEF4"/>
                           </a:solidFill>
@@ -10630,9 +10648,9 @@
                           <a:ea typeface="Arial" pitchFamily="34" charset="-122"/>
                           <a:cs typeface="Arial" pitchFamily="34" charset="-120"/>
                         </a:rPr>
-                        <a:t>-0.1622</a:t>
+                        <a:t>0.0529</a:t>
                       </a:r>
-                      <a:endParaRPr lang="en-US" sz="1050" dirty="0">
+                      <a:endParaRPr lang="en-US" sz="1100" dirty="0">
                         <a:latin typeface="Arial" charset="0"/>
                         <a:ea typeface="Arial" charset="0"/>
                         <a:cs typeface="Arial" charset="0"/>
@@ -10682,7 +10700,7 @@
                   </a:tcPr>
                 </a:tc>
               </a:tr>
-              <a:tr h="292608">
+              <a:tr h="310896">
                 <a:tc>
                   <a:txBody>
                     <a:bodyPr/>
@@ -10692,7 +10710,7 @@
                         <a:buNone/>
                       </a:pPr>
                       <a:r>
-                        <a:rPr lang="en-US" sz="1050" dirty="0">
+                        <a:rPr lang="en-US" sz="1100" dirty="0">
                           <a:solidFill>
                             <a:srgbClr val="E8EEF4"/>
                           </a:solidFill>
@@ -10700,9 +10718,9 @@
                           <a:ea typeface="Arial" pitchFamily="34" charset="-122"/>
                           <a:cs typeface="Arial" pitchFamily="34" charset="-120"/>
                         </a:rPr>
-                        <a:t>完整模型</a:t>
+                        <a:t>SAINet</a:t>
                       </a:r>
-                      <a:endParaRPr lang="en-US" sz="1050" dirty="0">
+                      <a:endParaRPr lang="en-US" sz="1100" dirty="0">
                         <a:latin typeface="Arial" charset="0"/>
                         <a:ea typeface="Arial" charset="0"/>
                         <a:cs typeface="Arial" charset="0"/>
@@ -10760,7 +10778,7 @@
                         <a:buNone/>
                       </a:pPr>
                       <a:r>
-                        <a:rPr lang="en-US" sz="1050" dirty="0">
+                        <a:rPr lang="en-US" sz="1100" dirty="0">
                           <a:solidFill>
                             <a:srgbClr val="E8EEF4"/>
                           </a:solidFill>
@@ -10768,9 +10786,9 @@
                           <a:ea typeface="Arial" pitchFamily="34" charset="-122"/>
                           <a:cs typeface="Arial" pitchFamily="34" charset="-120"/>
                         </a:rPr>
-                        <a:t>0.8718</a:t>
+                        <a:t>0.8514</a:t>
                       </a:r>
-                      <a:endParaRPr lang="en-US" sz="1050" dirty="0">
+                      <a:endParaRPr lang="en-US" sz="1100" dirty="0">
                         <a:latin typeface="Arial" charset="0"/>
                         <a:ea typeface="Arial" charset="0"/>
                         <a:cs typeface="Arial" charset="0"/>
@@ -10828,7 +10846,7 @@
                         <a:buNone/>
                       </a:pPr>
                       <a:r>
-                        <a:rPr lang="en-US" sz="1050" dirty="0">
+                        <a:rPr lang="en-US" sz="1100" dirty="0">
                           <a:solidFill>
                             <a:srgbClr val="E8EEF4"/>
                           </a:solidFill>
@@ -10836,9 +10854,9 @@
                           <a:ea typeface="Arial" pitchFamily="34" charset="-122"/>
                           <a:cs typeface="Arial" pitchFamily="34" charset="-120"/>
                         </a:rPr>
-                        <a:t>—</a:t>
+                        <a:t>0.0554</a:t>
                       </a:r>
-                      <a:endParaRPr lang="en-US" sz="1050" dirty="0">
+                      <a:endParaRPr lang="en-US" sz="1100" dirty="0">
                         <a:latin typeface="Arial" charset="0"/>
                         <a:ea typeface="Arial" charset="0"/>
                         <a:cs typeface="Arial" charset="0"/>
@@ -10894,14 +10912,14 @@
       </p:graphicFrame>
       <p:sp>
         <p:nvSpPr>
-          <p:cNvPr id="26" name="Shape 22"/>
+          <p:cNvPr id="25" name="Shape 22"/>
           <p:cNvSpPr/>
           <p:nvPr/>
         </p:nvSpPr>
         <p:spPr>
           <a:xfrm>
-            <a:off x="7699248" y="3749040"/>
-            <a:ext cx="3749040" cy="292608"/>
+            <a:off x="566928" y="3785616"/>
+            <a:ext cx="5029200" cy="310896"/>
           </a:xfrm>
           <a:prstGeom prst="rect">
             <a:avLst/>
@@ -10919,14 +10937,14 @@
       </p:sp>
       <p:sp>
         <p:nvSpPr>
-          <p:cNvPr id="27" name="Text 23"/>
+          <p:cNvPr id="26" name="Text 23"/>
           <p:cNvSpPr txBox="1"/>
           <p:nvPr/>
         </p:nvSpPr>
         <p:spPr>
           <a:xfrm>
-            <a:off x="7754112" y="3749040"/>
-            <a:ext cx="1627632" cy="292608"/>
+            <a:off x="621792" y="3785616"/>
+            <a:ext cx="2724912" cy="310896"/>
           </a:xfrm>
           <a:prstGeom prst="rect">
             <a:avLst/>
@@ -10953,7 +10971,7 @@
                 <a:ea typeface="Arial" pitchFamily="34" charset="-122"/>
                 <a:cs typeface="Arial" pitchFamily="34" charset="-120"/>
               </a:rPr>
-              <a:t>消融变体</a:t>
+              <a:t>方法</a:t>
             </a:r>
             <a:endParaRPr lang="en-US" sz="1050" dirty="0"/>
           </a:p>
@@ -10961,14 +10979,14 @@
       </p:sp>
       <p:sp>
         <p:nvSpPr>
-          <p:cNvPr id="28" name="Text 24"/>
+          <p:cNvPr id="27" name="Text 24"/>
           <p:cNvSpPr txBox="1"/>
           <p:nvPr/>
         </p:nvSpPr>
         <p:spPr>
           <a:xfrm>
-            <a:off x="9491472" y="3749040"/>
-            <a:ext cx="896112" cy="292608"/>
+            <a:off x="3456432" y="3785616"/>
+            <a:ext cx="987552" cy="310896"/>
           </a:xfrm>
           <a:prstGeom prst="rect">
             <a:avLst/>
@@ -11003,14 +11021,14 @@
       </p:sp>
       <p:sp>
         <p:nvSpPr>
-          <p:cNvPr id="29" name="Text 25"/>
+          <p:cNvPr id="28" name="Text 25"/>
           <p:cNvSpPr txBox="1"/>
           <p:nvPr/>
         </p:nvSpPr>
         <p:spPr>
           <a:xfrm>
-            <a:off x="10497312" y="3749040"/>
-            <a:ext cx="896112" cy="292608"/>
+            <a:off x="4553712" y="3785616"/>
+            <a:ext cx="987552" cy="310896"/>
           </a:xfrm>
           <a:prstGeom prst="rect">
             <a:avLst/>
@@ -11037,7 +11055,7 @@
                 <a:ea typeface="Arial" pitchFamily="34" charset="-122"/>
                 <a:cs typeface="Arial" pitchFamily="34" charset="-120"/>
               </a:rPr>
-              <a:t>ΔS</a:t>
+              <a:t>MAE</a:t>
             </a:r>
             <a:endParaRPr lang="en-US" sz="1050" dirty="0"/>
           </a:p>
@@ -11045,14 +11063,14 @@
       </p:sp>
       <p:sp>
         <p:nvSpPr>
-          <p:cNvPr id="30" name="Text 26"/>
+          <p:cNvPr id="29" name="Text 26"/>
           <p:cNvSpPr txBox="1"/>
           <p:nvPr/>
         </p:nvSpPr>
         <p:spPr>
           <a:xfrm>
-            <a:off x="7699248" y="5394960"/>
-            <a:ext cx="3931920" cy="457200"/>
+            <a:off x="7406640" y="3456432"/>
+            <a:ext cx="4206240" cy="256032"/>
           </a:xfrm>
           <a:prstGeom prst="rect">
             <a:avLst/>
@@ -11066,12 +11084,1266 @@
           <a:p>
             <a:pPr algn="l" indent="0" marL="0">
               <a:lnSpc>
+                <a:spcPct val="115000"/>
+              </a:lnSpc>
+              <a:buNone/>
+            </a:pPr>
+            <a:r>
+              <a:rPr lang="en-US" sz="1150" dirty="0">
+                <a:solidFill>
+                  <a:srgbClr val="F5C542"/>
+                </a:solidFill>
+                <a:latin typeface="Arial" pitchFamily="34" charset="0"/>
+                <a:ea typeface="Arial" pitchFamily="34" charset="-122"/>
+                <a:cs typeface="Arial" pitchFamily="34" charset="-120"/>
+              </a:rPr>
+              <a:t>四个消融变体的 S 与差值</a:t>
+            </a:r>
+            <a:endParaRPr lang="en-US" sz="1150" dirty="0"/>
+          </a:p>
+        </p:txBody>
+      </p:sp>
+      <p:graphicFrame>
+        <p:nvGraphicFramePr>
+          <p:cNvPr id="9" name="Table 1"/>
+          <p:cNvGraphicFramePr>
+            <a:graphicFrameLocks noGrp="1"/>
+          </p:cNvGraphicFramePr>
+          <p:nvPr>
+            <p:extLst>
+              <p:ext uri="{D42A27DB-BD31-4B8C-83A1-F6EECF244321}">
+                <p14:modId xmlns:p14="http://schemas.microsoft.com/office/powerpoint/2010/main" val="1579011935"/>
+              </p:ext>
+            </p:extLst>
+          </p:nvPr>
+        </p:nvGraphicFramePr>
+        <p:xfrm>
+          <a:off x="7406640" y="3785616"/>
+          <a:ext cx="3840480" cy="914400"/>
+        </p:xfrm>
+        <a:graphic>
+          <a:graphicData uri="http://schemas.openxmlformats.org/drawingml/2006/table">
+            <a:tbl>
+              <a:tblPr/>
+              <a:tblGrid>
+                <a:gridCol w="1828800"/>
+                <a:gridCol w="1005840"/>
+                <a:gridCol w="1005840"/>
+              </a:tblGrid>
+              <a:tr h="310896">
+                <a:tc>
+                  <a:txBody>
+                    <a:bodyPr/>
+                    <a:lstStyle/>
+                    <a:p>
+                      <a:pPr indent="0" marL="0">
+                        <a:buNone/>
+                      </a:pPr>
+                      <a:r>
+                        <a:rPr lang="en-US" sz="1100" dirty="0">
+                          <a:solidFill>
+                            <a:srgbClr val="E8EEF4"/>
+                          </a:solidFill>
+                          <a:latin typeface="Arial" pitchFamily="34" charset="0"/>
+                          <a:ea typeface="Arial" pitchFamily="34" charset="-122"/>
+                          <a:cs typeface="Arial" pitchFamily="34" charset="-120"/>
+                        </a:rPr>
+                        <a:t>消融变体</a:t>
+                      </a:r>
+                      <a:endParaRPr lang="en-US" sz="1100" dirty="0">
+                        <a:latin typeface="Arial" charset="0"/>
+                        <a:ea typeface="Arial" charset="0"/>
+                        <a:cs typeface="Arial" charset="0"/>
+                      </a:endParaRPr>
+                    </a:p>
+                  </a:txBody>
+                  <a:tcPr marL="54864" marR="54864" marT="54864" marB="54864" anchor="ctr">
+                    <a:lnL w="9525" cap="flat" cmpd="sng" algn="ctr">
+                      <a:solidFill>
+                        <a:srgbClr val="24303D"/>
+                      </a:solidFill>
+                      <a:prstDash val="solid"/>
+                      <a:round/>
+                      <a:headEnd type="none" w="med" len="med"/>
+                      <a:tailEnd type="none" w="med" len="med"/>
+                    </a:lnL>
+                    <a:lnR w="9525" cap="flat" cmpd="sng" algn="ctr">
+                      <a:solidFill>
+                        <a:srgbClr val="24303D"/>
+                      </a:solidFill>
+                      <a:prstDash val="solid"/>
+                      <a:round/>
+                      <a:headEnd type="none" w="med" len="med"/>
+                      <a:tailEnd type="none" w="med" len="med"/>
+                    </a:lnR>
+                    <a:lnT w="9525" cap="flat" cmpd="sng" algn="ctr">
+                      <a:solidFill>
+                        <a:srgbClr val="24303D"/>
+                      </a:solidFill>
+                      <a:prstDash val="solid"/>
+                      <a:round/>
+                      <a:headEnd type="none" w="med" len="med"/>
+                      <a:tailEnd type="none" w="med" len="med"/>
+                    </a:lnT>
+                    <a:lnB w="9525" cap="flat" cmpd="sng" algn="ctr">
+                      <a:solidFill>
+                        <a:srgbClr val="24303D"/>
+                      </a:solidFill>
+                      <a:prstDash val="solid"/>
+                      <a:round/>
+                      <a:headEnd type="none" w="med" len="med"/>
+                      <a:tailEnd type="none" w="med" len="med"/>
+                    </a:lnB>
+                    <a:solidFill>
+                      <a:srgbClr val="151E27"/>
+                    </a:solidFill>
+                  </a:tcPr>
+                </a:tc>
+                <a:tc>
+                  <a:txBody>
+                    <a:bodyPr/>
+                    <a:lstStyle/>
+                    <a:p>
+                      <a:pPr indent="0" marL="0">
+                        <a:buNone/>
+                      </a:pPr>
+                      <a:r>
+                        <a:rPr lang="en-US" sz="1100" dirty="0">
+                          <a:solidFill>
+                            <a:srgbClr val="E8EEF4"/>
+                          </a:solidFill>
+                          <a:latin typeface="Arial" pitchFamily="34" charset="0"/>
+                          <a:ea typeface="Arial" pitchFamily="34" charset="-122"/>
+                          <a:cs typeface="Arial" pitchFamily="34" charset="-120"/>
+                        </a:rPr>
+                        <a:t>S</a:t>
+                      </a:r>
+                      <a:endParaRPr lang="en-US" sz="1100" dirty="0">
+                        <a:latin typeface="Arial" charset="0"/>
+                        <a:ea typeface="Arial" charset="0"/>
+                        <a:cs typeface="Arial" charset="0"/>
+                      </a:endParaRPr>
+                    </a:p>
+                  </a:txBody>
+                  <a:tcPr marL="54864" marR="54864" marT="54864" marB="54864" anchor="ctr">
+                    <a:lnL w="9525" cap="flat" cmpd="sng" algn="ctr">
+                      <a:solidFill>
+                        <a:srgbClr val="24303D"/>
+                      </a:solidFill>
+                      <a:prstDash val="solid"/>
+                      <a:round/>
+                      <a:headEnd type="none" w="med" len="med"/>
+                      <a:tailEnd type="none" w="med" len="med"/>
+                    </a:lnL>
+                    <a:lnR w="9525" cap="flat" cmpd="sng" algn="ctr">
+                      <a:solidFill>
+                        <a:srgbClr val="24303D"/>
+                      </a:solidFill>
+                      <a:prstDash val="solid"/>
+                      <a:round/>
+                      <a:headEnd type="none" w="med" len="med"/>
+                      <a:tailEnd type="none" w="med" len="med"/>
+                    </a:lnR>
+                    <a:lnT w="9525" cap="flat" cmpd="sng" algn="ctr">
+                      <a:solidFill>
+                        <a:srgbClr val="24303D"/>
+                      </a:solidFill>
+                      <a:prstDash val="solid"/>
+                      <a:round/>
+                      <a:headEnd type="none" w="med" len="med"/>
+                      <a:tailEnd type="none" w="med" len="med"/>
+                    </a:lnT>
+                    <a:lnB w="9525" cap="flat" cmpd="sng" algn="ctr">
+                      <a:solidFill>
+                        <a:srgbClr val="24303D"/>
+                      </a:solidFill>
+                      <a:prstDash val="solid"/>
+                      <a:round/>
+                      <a:headEnd type="none" w="med" len="med"/>
+                      <a:tailEnd type="none" w="med" len="med"/>
+                    </a:lnB>
+                    <a:solidFill>
+                      <a:srgbClr val="151E27"/>
+                    </a:solidFill>
+                  </a:tcPr>
+                </a:tc>
+                <a:tc>
+                  <a:txBody>
+                    <a:bodyPr/>
+                    <a:lstStyle/>
+                    <a:p>
+                      <a:pPr indent="0" marL="0">
+                        <a:buNone/>
+                      </a:pPr>
+                      <a:r>
+                        <a:rPr lang="en-US" sz="1100" dirty="0">
+                          <a:solidFill>
+                            <a:srgbClr val="E8EEF4"/>
+                          </a:solidFill>
+                          <a:latin typeface="Arial" pitchFamily="34" charset="0"/>
+                          <a:ea typeface="Arial" pitchFamily="34" charset="-122"/>
+                          <a:cs typeface="Arial" pitchFamily="34" charset="-120"/>
+                        </a:rPr>
+                        <a:t>ΔS</a:t>
+                      </a:r>
+                      <a:endParaRPr lang="en-US" sz="1100" dirty="0">
+                        <a:latin typeface="Arial" charset="0"/>
+                        <a:ea typeface="Arial" charset="0"/>
+                        <a:cs typeface="Arial" charset="0"/>
+                      </a:endParaRPr>
+                    </a:p>
+                  </a:txBody>
+                  <a:tcPr marL="54864" marR="54864" marT="54864" marB="54864" anchor="ctr">
+                    <a:lnL w="9525" cap="flat" cmpd="sng" algn="ctr">
+                      <a:solidFill>
+                        <a:srgbClr val="24303D"/>
+                      </a:solidFill>
+                      <a:prstDash val="solid"/>
+                      <a:round/>
+                      <a:headEnd type="none" w="med" len="med"/>
+                      <a:tailEnd type="none" w="med" len="med"/>
+                    </a:lnL>
+                    <a:lnR w="9525" cap="flat" cmpd="sng" algn="ctr">
+                      <a:solidFill>
+                        <a:srgbClr val="24303D"/>
+                      </a:solidFill>
+                      <a:prstDash val="solid"/>
+                      <a:round/>
+                      <a:headEnd type="none" w="med" len="med"/>
+                      <a:tailEnd type="none" w="med" len="med"/>
+                    </a:lnR>
+                    <a:lnT w="9525" cap="flat" cmpd="sng" algn="ctr">
+                      <a:solidFill>
+                        <a:srgbClr val="24303D"/>
+                      </a:solidFill>
+                      <a:prstDash val="solid"/>
+                      <a:round/>
+                      <a:headEnd type="none" w="med" len="med"/>
+                      <a:tailEnd type="none" w="med" len="med"/>
+                    </a:lnT>
+                    <a:lnB w="9525" cap="flat" cmpd="sng" algn="ctr">
+                      <a:solidFill>
+                        <a:srgbClr val="24303D"/>
+                      </a:solidFill>
+                      <a:prstDash val="solid"/>
+                      <a:round/>
+                      <a:headEnd type="none" w="med" len="med"/>
+                      <a:tailEnd type="none" w="med" len="med"/>
+                    </a:lnB>
+                    <a:solidFill>
+                      <a:srgbClr val="151E27"/>
+                    </a:solidFill>
+                  </a:tcPr>
+                </a:tc>
+              </a:tr>
+              <a:tr h="310896">
+                <a:tc>
+                  <a:txBody>
+                    <a:bodyPr/>
+                    <a:lstStyle/>
+                    <a:p>
+                      <a:pPr indent="0" marL="0">
+                        <a:buNone/>
+                      </a:pPr>
+                      <a:r>
+                        <a:rPr lang="en-US" sz="1100" dirty="0">
+                          <a:solidFill>
+                            <a:srgbClr val="E8EEF4"/>
+                          </a:solidFill>
+                          <a:latin typeface="Arial" pitchFamily="34" charset="0"/>
+                          <a:ea typeface="Arial" pitchFamily="34" charset="-122"/>
+                          <a:cs typeface="Arial" pitchFamily="34" charset="-120"/>
+                        </a:rPr>
+                        <a:t>w_o_Transformer</a:t>
+                      </a:r>
+                      <a:endParaRPr lang="en-US" sz="1100" dirty="0">
+                        <a:latin typeface="Arial" charset="0"/>
+                        <a:ea typeface="Arial" charset="0"/>
+                        <a:cs typeface="Arial" charset="0"/>
+                      </a:endParaRPr>
+                    </a:p>
+                  </a:txBody>
+                  <a:tcPr marL="54864" marR="54864" marT="54864" marB="54864" anchor="ctr">
+                    <a:lnL w="9525" cap="flat" cmpd="sng" algn="ctr">
+                      <a:solidFill>
+                        <a:srgbClr val="24303D"/>
+                      </a:solidFill>
+                      <a:prstDash val="solid"/>
+                      <a:round/>
+                      <a:headEnd type="none" w="med" len="med"/>
+                      <a:tailEnd type="none" w="med" len="med"/>
+                    </a:lnL>
+                    <a:lnR w="9525" cap="flat" cmpd="sng" algn="ctr">
+                      <a:solidFill>
+                        <a:srgbClr val="24303D"/>
+                      </a:solidFill>
+                      <a:prstDash val="solid"/>
+                      <a:round/>
+                      <a:headEnd type="none" w="med" len="med"/>
+                      <a:tailEnd type="none" w="med" len="med"/>
+                    </a:lnR>
+                    <a:lnT w="9525" cap="flat" cmpd="sng" algn="ctr">
+                      <a:solidFill>
+                        <a:srgbClr val="24303D"/>
+                      </a:solidFill>
+                      <a:prstDash val="solid"/>
+                      <a:round/>
+                      <a:headEnd type="none" w="med" len="med"/>
+                      <a:tailEnd type="none" w="med" len="med"/>
+                    </a:lnT>
+                    <a:lnB w="9525" cap="flat" cmpd="sng" algn="ctr">
+                      <a:solidFill>
+                        <a:srgbClr val="24303D"/>
+                      </a:solidFill>
+                      <a:prstDash val="solid"/>
+                      <a:round/>
+                      <a:headEnd type="none" w="med" len="med"/>
+                      <a:tailEnd type="none" w="med" len="med"/>
+                    </a:lnB>
+                    <a:solidFill>
+                      <a:srgbClr val="151E27"/>
+                    </a:solidFill>
+                  </a:tcPr>
+                </a:tc>
+                <a:tc>
+                  <a:txBody>
+                    <a:bodyPr/>
+                    <a:lstStyle/>
+                    <a:p>
+                      <a:pPr indent="0" marL="0">
+                        <a:buNone/>
+                      </a:pPr>
+                      <a:r>
+                        <a:rPr lang="en-US" sz="1100" dirty="0">
+                          <a:solidFill>
+                            <a:srgbClr val="E8EEF4"/>
+                          </a:solidFill>
+                          <a:latin typeface="Arial" pitchFamily="34" charset="0"/>
+                          <a:ea typeface="Arial" pitchFamily="34" charset="-122"/>
+                          <a:cs typeface="Arial" pitchFamily="34" charset="-120"/>
+                        </a:rPr>
+                        <a:t>0.7096</a:t>
+                      </a:r>
+                      <a:endParaRPr lang="en-US" sz="1100" dirty="0">
+                        <a:latin typeface="Arial" charset="0"/>
+                        <a:ea typeface="Arial" charset="0"/>
+                        <a:cs typeface="Arial" charset="0"/>
+                      </a:endParaRPr>
+                    </a:p>
+                  </a:txBody>
+                  <a:tcPr marL="54864" marR="54864" marT="54864" marB="54864" anchor="ctr">
+                    <a:lnL w="9525" cap="flat" cmpd="sng" algn="ctr">
+                      <a:solidFill>
+                        <a:srgbClr val="24303D"/>
+                      </a:solidFill>
+                      <a:prstDash val="solid"/>
+                      <a:round/>
+                      <a:headEnd type="none" w="med" len="med"/>
+                      <a:tailEnd type="none" w="med" len="med"/>
+                    </a:lnL>
+                    <a:lnR w="9525" cap="flat" cmpd="sng" algn="ctr">
+                      <a:solidFill>
+                        <a:srgbClr val="24303D"/>
+                      </a:solidFill>
+                      <a:prstDash val="solid"/>
+                      <a:round/>
+                      <a:headEnd type="none" w="med" len="med"/>
+                      <a:tailEnd type="none" w="med" len="med"/>
+                    </a:lnR>
+                    <a:lnT w="9525" cap="flat" cmpd="sng" algn="ctr">
+                      <a:solidFill>
+                        <a:srgbClr val="24303D"/>
+                      </a:solidFill>
+                      <a:prstDash val="solid"/>
+                      <a:round/>
+                      <a:headEnd type="none" w="med" len="med"/>
+                      <a:tailEnd type="none" w="med" len="med"/>
+                    </a:lnT>
+                    <a:lnB w="9525" cap="flat" cmpd="sng" algn="ctr">
+                      <a:solidFill>
+                        <a:srgbClr val="24303D"/>
+                      </a:solidFill>
+                      <a:prstDash val="solid"/>
+                      <a:round/>
+                      <a:headEnd type="none" w="med" len="med"/>
+                      <a:tailEnd type="none" w="med" len="med"/>
+                    </a:lnB>
+                    <a:solidFill>
+                      <a:srgbClr val="151E27"/>
+                    </a:solidFill>
+                  </a:tcPr>
+                </a:tc>
+                <a:tc>
+                  <a:txBody>
+                    <a:bodyPr/>
+                    <a:lstStyle/>
+                    <a:p>
+                      <a:pPr indent="0" marL="0">
+                        <a:buNone/>
+                      </a:pPr>
+                      <a:r>
+                        <a:rPr lang="en-US" sz="1100" dirty="0">
+                          <a:solidFill>
+                            <a:srgbClr val="E8EEF4"/>
+                          </a:solidFill>
+                          <a:latin typeface="Arial" pitchFamily="34" charset="0"/>
+                          <a:ea typeface="Arial" pitchFamily="34" charset="-122"/>
+                          <a:cs typeface="Arial" pitchFamily="34" charset="-120"/>
+                        </a:rPr>
+                        <a:t>-0.1622</a:t>
+                      </a:r>
+                      <a:endParaRPr lang="en-US" sz="1100" dirty="0">
+                        <a:latin typeface="Arial" charset="0"/>
+                        <a:ea typeface="Arial" charset="0"/>
+                        <a:cs typeface="Arial" charset="0"/>
+                      </a:endParaRPr>
+                    </a:p>
+                  </a:txBody>
+                  <a:tcPr marL="54864" marR="54864" marT="54864" marB="54864" anchor="ctr">
+                    <a:lnL w="9525" cap="flat" cmpd="sng" algn="ctr">
+                      <a:solidFill>
+                        <a:srgbClr val="24303D"/>
+                      </a:solidFill>
+                      <a:prstDash val="solid"/>
+                      <a:round/>
+                      <a:headEnd type="none" w="med" len="med"/>
+                      <a:tailEnd type="none" w="med" len="med"/>
+                    </a:lnL>
+                    <a:lnR w="9525" cap="flat" cmpd="sng" algn="ctr">
+                      <a:solidFill>
+                        <a:srgbClr val="24303D"/>
+                      </a:solidFill>
+                      <a:prstDash val="solid"/>
+                      <a:round/>
+                      <a:headEnd type="none" w="med" len="med"/>
+                      <a:tailEnd type="none" w="med" len="med"/>
+                    </a:lnR>
+                    <a:lnT w="9525" cap="flat" cmpd="sng" algn="ctr">
+                      <a:solidFill>
+                        <a:srgbClr val="24303D"/>
+                      </a:solidFill>
+                      <a:prstDash val="solid"/>
+                      <a:round/>
+                      <a:headEnd type="none" w="med" len="med"/>
+                      <a:tailEnd type="none" w="med" len="med"/>
+                    </a:lnT>
+                    <a:lnB w="9525" cap="flat" cmpd="sng" algn="ctr">
+                      <a:solidFill>
+                        <a:srgbClr val="24303D"/>
+                      </a:solidFill>
+                      <a:prstDash val="solid"/>
+                      <a:round/>
+                      <a:headEnd type="none" w="med" len="med"/>
+                      <a:tailEnd type="none" w="med" len="med"/>
+                    </a:lnB>
+                    <a:solidFill>
+                      <a:srgbClr val="151E27"/>
+                    </a:solidFill>
+                  </a:tcPr>
+                </a:tc>
+              </a:tr>
+              <a:tr h="310896">
+                <a:tc>
+                  <a:txBody>
+                    <a:bodyPr/>
+                    <a:lstStyle/>
+                    <a:p>
+                      <a:pPr indent="0" marL="0">
+                        <a:buNone/>
+                      </a:pPr>
+                      <a:r>
+                        <a:rPr lang="en-US" sz="1100" dirty="0">
+                          <a:solidFill>
+                            <a:srgbClr val="E8EEF4"/>
+                          </a:solidFill>
+                          <a:latin typeface="Arial" pitchFamily="34" charset="0"/>
+                          <a:ea typeface="Arial" pitchFamily="34" charset="-122"/>
+                          <a:cs typeface="Arial" pitchFamily="34" charset="-120"/>
+                        </a:rPr>
+                        <a:t>w_o_MSDEF</a:t>
+                      </a:r>
+                      <a:endParaRPr lang="en-US" sz="1100" dirty="0">
+                        <a:latin typeface="Arial" charset="0"/>
+                        <a:ea typeface="Arial" charset="0"/>
+                        <a:cs typeface="Arial" charset="0"/>
+                      </a:endParaRPr>
+                    </a:p>
+                  </a:txBody>
+                  <a:tcPr marL="54864" marR="54864" marT="54864" marB="54864" anchor="ctr">
+                    <a:lnL w="9525" cap="flat" cmpd="sng" algn="ctr">
+                      <a:solidFill>
+                        <a:srgbClr val="24303D"/>
+                      </a:solidFill>
+                      <a:prstDash val="solid"/>
+                      <a:round/>
+                      <a:headEnd type="none" w="med" len="med"/>
+                      <a:tailEnd type="none" w="med" len="med"/>
+                    </a:lnL>
+                    <a:lnR w="9525" cap="flat" cmpd="sng" algn="ctr">
+                      <a:solidFill>
+                        <a:srgbClr val="24303D"/>
+                      </a:solidFill>
+                      <a:prstDash val="solid"/>
+                      <a:round/>
+                      <a:headEnd type="none" w="med" len="med"/>
+                      <a:tailEnd type="none" w="med" len="med"/>
+                    </a:lnR>
+                    <a:lnT w="9525" cap="flat" cmpd="sng" algn="ctr">
+                      <a:solidFill>
+                        <a:srgbClr val="24303D"/>
+                      </a:solidFill>
+                      <a:prstDash val="solid"/>
+                      <a:round/>
+                      <a:headEnd type="none" w="med" len="med"/>
+                      <a:tailEnd type="none" w="med" len="med"/>
+                    </a:lnT>
+                    <a:lnB w="9525" cap="flat" cmpd="sng" algn="ctr">
+                      <a:solidFill>
+                        <a:srgbClr val="24303D"/>
+                      </a:solidFill>
+                      <a:prstDash val="solid"/>
+                      <a:round/>
+                      <a:headEnd type="none" w="med" len="med"/>
+                      <a:tailEnd type="none" w="med" len="med"/>
+                    </a:lnB>
+                    <a:solidFill>
+                      <a:srgbClr val="151E27"/>
+                    </a:solidFill>
+                  </a:tcPr>
+                </a:tc>
+                <a:tc>
+                  <a:txBody>
+                    <a:bodyPr/>
+                    <a:lstStyle/>
+                    <a:p>
+                      <a:pPr indent="0" marL="0">
+                        <a:buNone/>
+                      </a:pPr>
+                      <a:r>
+                        <a:rPr lang="en-US" sz="1100" dirty="0">
+                          <a:solidFill>
+                            <a:srgbClr val="E8EEF4"/>
+                          </a:solidFill>
+                          <a:latin typeface="Arial" pitchFamily="34" charset="0"/>
+                          <a:ea typeface="Arial" pitchFamily="34" charset="-122"/>
+                          <a:cs typeface="Arial" pitchFamily="34" charset="-120"/>
+                        </a:rPr>
+                        <a:t>0.8641</a:t>
+                      </a:r>
+                      <a:endParaRPr lang="en-US" sz="1100" dirty="0">
+                        <a:latin typeface="Arial" charset="0"/>
+                        <a:ea typeface="Arial" charset="0"/>
+                        <a:cs typeface="Arial" charset="0"/>
+                      </a:endParaRPr>
+                    </a:p>
+                  </a:txBody>
+                  <a:tcPr marL="54864" marR="54864" marT="54864" marB="54864" anchor="ctr">
+                    <a:lnL w="9525" cap="flat" cmpd="sng" algn="ctr">
+                      <a:solidFill>
+                        <a:srgbClr val="24303D"/>
+                      </a:solidFill>
+                      <a:prstDash val="solid"/>
+                      <a:round/>
+                      <a:headEnd type="none" w="med" len="med"/>
+                      <a:tailEnd type="none" w="med" len="med"/>
+                    </a:lnL>
+                    <a:lnR w="9525" cap="flat" cmpd="sng" algn="ctr">
+                      <a:solidFill>
+                        <a:srgbClr val="24303D"/>
+                      </a:solidFill>
+                      <a:prstDash val="solid"/>
+                      <a:round/>
+                      <a:headEnd type="none" w="med" len="med"/>
+                      <a:tailEnd type="none" w="med" len="med"/>
+                    </a:lnR>
+                    <a:lnT w="9525" cap="flat" cmpd="sng" algn="ctr">
+                      <a:solidFill>
+                        <a:srgbClr val="24303D"/>
+                      </a:solidFill>
+                      <a:prstDash val="solid"/>
+                      <a:round/>
+                      <a:headEnd type="none" w="med" len="med"/>
+                      <a:tailEnd type="none" w="med" len="med"/>
+                    </a:lnT>
+                    <a:lnB w="9525" cap="flat" cmpd="sng" algn="ctr">
+                      <a:solidFill>
+                        <a:srgbClr val="24303D"/>
+                      </a:solidFill>
+                      <a:prstDash val="solid"/>
+                      <a:round/>
+                      <a:headEnd type="none" w="med" len="med"/>
+                      <a:tailEnd type="none" w="med" len="med"/>
+                    </a:lnB>
+                    <a:solidFill>
+                      <a:srgbClr val="151E27"/>
+                    </a:solidFill>
+                  </a:tcPr>
+                </a:tc>
+                <a:tc>
+                  <a:txBody>
+                    <a:bodyPr/>
+                    <a:lstStyle/>
+                    <a:p>
+                      <a:pPr indent="0" marL="0">
+                        <a:buNone/>
+                      </a:pPr>
+                      <a:r>
+                        <a:rPr lang="en-US" sz="1100" dirty="0">
+                          <a:solidFill>
+                            <a:srgbClr val="E8EEF4"/>
+                          </a:solidFill>
+                          <a:latin typeface="Arial" pitchFamily="34" charset="0"/>
+                          <a:ea typeface="Arial" pitchFamily="34" charset="-122"/>
+                          <a:cs typeface="Arial" pitchFamily="34" charset="-120"/>
+                        </a:rPr>
+                        <a:t>-0.0077</a:t>
+                      </a:r>
+                      <a:endParaRPr lang="en-US" sz="1100" dirty="0">
+                        <a:latin typeface="Arial" charset="0"/>
+                        <a:ea typeface="Arial" charset="0"/>
+                        <a:cs typeface="Arial" charset="0"/>
+                      </a:endParaRPr>
+                    </a:p>
+                  </a:txBody>
+                  <a:tcPr marL="54864" marR="54864" marT="54864" marB="54864" anchor="ctr">
+                    <a:lnL w="9525" cap="flat" cmpd="sng" algn="ctr">
+                      <a:solidFill>
+                        <a:srgbClr val="24303D"/>
+                      </a:solidFill>
+                      <a:prstDash val="solid"/>
+                      <a:round/>
+                      <a:headEnd type="none" w="med" len="med"/>
+                      <a:tailEnd type="none" w="med" len="med"/>
+                    </a:lnL>
+                    <a:lnR w="9525" cap="flat" cmpd="sng" algn="ctr">
+                      <a:solidFill>
+                        <a:srgbClr val="24303D"/>
+                      </a:solidFill>
+                      <a:prstDash val="solid"/>
+                      <a:round/>
+                      <a:headEnd type="none" w="med" len="med"/>
+                      <a:tailEnd type="none" w="med" len="med"/>
+                    </a:lnR>
+                    <a:lnT w="9525" cap="flat" cmpd="sng" algn="ctr">
+                      <a:solidFill>
+                        <a:srgbClr val="24303D"/>
+                      </a:solidFill>
+                      <a:prstDash val="solid"/>
+                      <a:round/>
+                      <a:headEnd type="none" w="med" len="med"/>
+                      <a:tailEnd type="none" w="med" len="med"/>
+                    </a:lnT>
+                    <a:lnB w="9525" cap="flat" cmpd="sng" algn="ctr">
+                      <a:solidFill>
+                        <a:srgbClr val="24303D"/>
+                      </a:solidFill>
+                      <a:prstDash val="solid"/>
+                      <a:round/>
+                      <a:headEnd type="none" w="med" len="med"/>
+                      <a:tailEnd type="none" w="med" len="med"/>
+                    </a:lnB>
+                    <a:solidFill>
+                      <a:srgbClr val="151E27"/>
+                    </a:solidFill>
+                  </a:tcPr>
+                </a:tc>
+              </a:tr>
+              <a:tr h="310896">
+                <a:tc>
+                  <a:txBody>
+                    <a:bodyPr/>
+                    <a:lstStyle/>
+                    <a:p>
+                      <a:pPr indent="0" marL="0">
+                        <a:buNone/>
+                      </a:pPr>
+                      <a:r>
+                        <a:rPr lang="en-US" sz="1100" dirty="0">
+                          <a:solidFill>
+                            <a:srgbClr val="E8EEF4"/>
+                          </a:solidFill>
+                          <a:latin typeface="Arial" pitchFamily="34" charset="0"/>
+                          <a:ea typeface="Arial" pitchFamily="34" charset="-122"/>
+                          <a:cs typeface="Arial" pitchFamily="34" charset="-120"/>
+                        </a:rPr>
+                        <a:t>w_o_CMF</a:t>
+                      </a:r>
+                      <a:endParaRPr lang="en-US" sz="1100" dirty="0">
+                        <a:latin typeface="Arial" charset="0"/>
+                        <a:ea typeface="Arial" charset="0"/>
+                        <a:cs typeface="Arial" charset="0"/>
+                      </a:endParaRPr>
+                    </a:p>
+                  </a:txBody>
+                  <a:tcPr marL="54864" marR="54864" marT="54864" marB="54864" anchor="ctr">
+                    <a:lnL w="9525" cap="flat" cmpd="sng" algn="ctr">
+                      <a:solidFill>
+                        <a:srgbClr val="24303D"/>
+                      </a:solidFill>
+                      <a:prstDash val="solid"/>
+                      <a:round/>
+                      <a:headEnd type="none" w="med" len="med"/>
+                      <a:tailEnd type="none" w="med" len="med"/>
+                    </a:lnL>
+                    <a:lnR w="9525" cap="flat" cmpd="sng" algn="ctr">
+                      <a:solidFill>
+                        <a:srgbClr val="24303D"/>
+                      </a:solidFill>
+                      <a:prstDash val="solid"/>
+                      <a:round/>
+                      <a:headEnd type="none" w="med" len="med"/>
+                      <a:tailEnd type="none" w="med" len="med"/>
+                    </a:lnR>
+                    <a:lnT w="9525" cap="flat" cmpd="sng" algn="ctr">
+                      <a:solidFill>
+                        <a:srgbClr val="24303D"/>
+                      </a:solidFill>
+                      <a:prstDash val="solid"/>
+                      <a:round/>
+                      <a:headEnd type="none" w="med" len="med"/>
+                      <a:tailEnd type="none" w="med" len="med"/>
+                    </a:lnT>
+                    <a:lnB w="9525" cap="flat" cmpd="sng" algn="ctr">
+                      <a:solidFill>
+                        <a:srgbClr val="24303D"/>
+                      </a:solidFill>
+                      <a:prstDash val="solid"/>
+                      <a:round/>
+                      <a:headEnd type="none" w="med" len="med"/>
+                      <a:tailEnd type="none" w="med" len="med"/>
+                    </a:lnB>
+                    <a:solidFill>
+                      <a:srgbClr val="151E27"/>
+                    </a:solidFill>
+                  </a:tcPr>
+                </a:tc>
+                <a:tc>
+                  <a:txBody>
+                    <a:bodyPr/>
+                    <a:lstStyle/>
+                    <a:p>
+                      <a:pPr indent="0" marL="0">
+                        <a:buNone/>
+                      </a:pPr>
+                      <a:r>
+                        <a:rPr lang="en-US" sz="1100" dirty="0">
+                          <a:solidFill>
+                            <a:srgbClr val="E8EEF4"/>
+                          </a:solidFill>
+                          <a:latin typeface="Arial" pitchFamily="34" charset="0"/>
+                          <a:ea typeface="Arial" pitchFamily="34" charset="-122"/>
+                          <a:cs typeface="Arial" pitchFamily="34" charset="-120"/>
+                        </a:rPr>
+                        <a:t>0.8662</a:t>
+                      </a:r>
+                      <a:endParaRPr lang="en-US" sz="1100" dirty="0">
+                        <a:latin typeface="Arial" charset="0"/>
+                        <a:ea typeface="Arial" charset="0"/>
+                        <a:cs typeface="Arial" charset="0"/>
+                      </a:endParaRPr>
+                    </a:p>
+                  </a:txBody>
+                  <a:tcPr marL="54864" marR="54864" marT="54864" marB="54864" anchor="ctr">
+                    <a:lnL w="9525" cap="flat" cmpd="sng" algn="ctr">
+                      <a:solidFill>
+                        <a:srgbClr val="24303D"/>
+                      </a:solidFill>
+                      <a:prstDash val="solid"/>
+                      <a:round/>
+                      <a:headEnd type="none" w="med" len="med"/>
+                      <a:tailEnd type="none" w="med" len="med"/>
+                    </a:lnL>
+                    <a:lnR w="9525" cap="flat" cmpd="sng" algn="ctr">
+                      <a:solidFill>
+                        <a:srgbClr val="24303D"/>
+                      </a:solidFill>
+                      <a:prstDash val="solid"/>
+                      <a:round/>
+                      <a:headEnd type="none" w="med" len="med"/>
+                      <a:tailEnd type="none" w="med" len="med"/>
+                    </a:lnR>
+                    <a:lnT w="9525" cap="flat" cmpd="sng" algn="ctr">
+                      <a:solidFill>
+                        <a:srgbClr val="24303D"/>
+                      </a:solidFill>
+                      <a:prstDash val="solid"/>
+                      <a:round/>
+                      <a:headEnd type="none" w="med" len="med"/>
+                      <a:tailEnd type="none" w="med" len="med"/>
+                    </a:lnT>
+                    <a:lnB w="9525" cap="flat" cmpd="sng" algn="ctr">
+                      <a:solidFill>
+                        <a:srgbClr val="24303D"/>
+                      </a:solidFill>
+                      <a:prstDash val="solid"/>
+                      <a:round/>
+                      <a:headEnd type="none" w="med" len="med"/>
+                      <a:tailEnd type="none" w="med" len="med"/>
+                    </a:lnB>
+                    <a:solidFill>
+                      <a:srgbClr val="151E27"/>
+                    </a:solidFill>
+                  </a:tcPr>
+                </a:tc>
+                <a:tc>
+                  <a:txBody>
+                    <a:bodyPr/>
+                    <a:lstStyle/>
+                    <a:p>
+                      <a:pPr indent="0" marL="0">
+                        <a:buNone/>
+                      </a:pPr>
+                      <a:r>
+                        <a:rPr lang="en-US" sz="1100" dirty="0">
+                          <a:solidFill>
+                            <a:srgbClr val="E8EEF4"/>
+                          </a:solidFill>
+                          <a:latin typeface="Arial" pitchFamily="34" charset="0"/>
+                          <a:ea typeface="Arial" pitchFamily="34" charset="-122"/>
+                          <a:cs typeface="Arial" pitchFamily="34" charset="-120"/>
+                        </a:rPr>
+                        <a:t>-0.0056</a:t>
+                      </a:r>
+                      <a:endParaRPr lang="en-US" sz="1100" dirty="0">
+                        <a:latin typeface="Arial" charset="0"/>
+                        <a:ea typeface="Arial" charset="0"/>
+                        <a:cs typeface="Arial" charset="0"/>
+                      </a:endParaRPr>
+                    </a:p>
+                  </a:txBody>
+                  <a:tcPr marL="54864" marR="54864" marT="54864" marB="54864" anchor="ctr">
+                    <a:lnL w="9525" cap="flat" cmpd="sng" algn="ctr">
+                      <a:solidFill>
+                        <a:srgbClr val="24303D"/>
+                      </a:solidFill>
+                      <a:prstDash val="solid"/>
+                      <a:round/>
+                      <a:headEnd type="none" w="med" len="med"/>
+                      <a:tailEnd type="none" w="med" len="med"/>
+                    </a:lnL>
+                    <a:lnR w="9525" cap="flat" cmpd="sng" algn="ctr">
+                      <a:solidFill>
+                        <a:srgbClr val="24303D"/>
+                      </a:solidFill>
+                      <a:prstDash val="solid"/>
+                      <a:round/>
+                      <a:headEnd type="none" w="med" len="med"/>
+                      <a:tailEnd type="none" w="med" len="med"/>
+                    </a:lnR>
+                    <a:lnT w="9525" cap="flat" cmpd="sng" algn="ctr">
+                      <a:solidFill>
+                        <a:srgbClr val="24303D"/>
+                      </a:solidFill>
+                      <a:prstDash val="solid"/>
+                      <a:round/>
+                      <a:headEnd type="none" w="med" len="med"/>
+                      <a:tailEnd type="none" w="med" len="med"/>
+                    </a:lnT>
+                    <a:lnB w="9525" cap="flat" cmpd="sng" algn="ctr">
+                      <a:solidFill>
+                        <a:srgbClr val="24303D"/>
+                      </a:solidFill>
+                      <a:prstDash val="solid"/>
+                      <a:round/>
+                      <a:headEnd type="none" w="med" len="med"/>
+                      <a:tailEnd type="none" w="med" len="med"/>
+                    </a:lnB>
+                    <a:solidFill>
+                      <a:srgbClr val="151E27"/>
+                    </a:solidFill>
+                  </a:tcPr>
+                </a:tc>
+              </a:tr>
+              <a:tr h="310896">
+                <a:tc>
+                  <a:txBody>
+                    <a:bodyPr/>
+                    <a:lstStyle/>
+                    <a:p>
+                      <a:pPr indent="0" marL="0">
+                        <a:buNone/>
+                      </a:pPr>
+                      <a:r>
+                        <a:rPr lang="en-US" sz="1100" dirty="0">
+                          <a:solidFill>
+                            <a:srgbClr val="E8EEF4"/>
+                          </a:solidFill>
+                          <a:latin typeface="Arial" pitchFamily="34" charset="0"/>
+                          <a:ea typeface="Arial" pitchFamily="34" charset="-122"/>
+                          <a:cs typeface="Arial" pitchFamily="34" charset="-120"/>
+                        </a:rPr>
+                        <a:t>w_o_CNN</a:t>
+                      </a:r>
+                      <a:endParaRPr lang="en-US" sz="1100" dirty="0">
+                        <a:latin typeface="Arial" charset="0"/>
+                        <a:ea typeface="Arial" charset="0"/>
+                        <a:cs typeface="Arial" charset="0"/>
+                      </a:endParaRPr>
+                    </a:p>
+                  </a:txBody>
+                  <a:tcPr marL="54864" marR="54864" marT="54864" marB="54864" anchor="ctr">
+                    <a:lnL w="9525" cap="flat" cmpd="sng" algn="ctr">
+                      <a:solidFill>
+                        <a:srgbClr val="24303D"/>
+                      </a:solidFill>
+                      <a:prstDash val="solid"/>
+                      <a:round/>
+                      <a:headEnd type="none" w="med" len="med"/>
+                      <a:tailEnd type="none" w="med" len="med"/>
+                    </a:lnL>
+                    <a:lnR w="9525" cap="flat" cmpd="sng" algn="ctr">
+                      <a:solidFill>
+                        <a:srgbClr val="24303D"/>
+                      </a:solidFill>
+                      <a:prstDash val="solid"/>
+                      <a:round/>
+                      <a:headEnd type="none" w="med" len="med"/>
+                      <a:tailEnd type="none" w="med" len="med"/>
+                    </a:lnR>
+                    <a:lnT w="9525" cap="flat" cmpd="sng" algn="ctr">
+                      <a:solidFill>
+                        <a:srgbClr val="24303D"/>
+                      </a:solidFill>
+                      <a:prstDash val="solid"/>
+                      <a:round/>
+                      <a:headEnd type="none" w="med" len="med"/>
+                      <a:tailEnd type="none" w="med" len="med"/>
+                    </a:lnT>
+                    <a:lnB w="9525" cap="flat" cmpd="sng" algn="ctr">
+                      <a:solidFill>
+                        <a:srgbClr val="24303D"/>
+                      </a:solidFill>
+                      <a:prstDash val="solid"/>
+                      <a:round/>
+                      <a:headEnd type="none" w="med" len="med"/>
+                      <a:tailEnd type="none" w="med" len="med"/>
+                    </a:lnB>
+                    <a:solidFill>
+                      <a:srgbClr val="151E27"/>
+                    </a:solidFill>
+                  </a:tcPr>
+                </a:tc>
+                <a:tc>
+                  <a:txBody>
+                    <a:bodyPr/>
+                    <a:lstStyle/>
+                    <a:p>
+                      <a:pPr indent="0" marL="0">
+                        <a:buNone/>
+                      </a:pPr>
+                      <a:r>
+                        <a:rPr lang="en-US" sz="1100" dirty="0">
+                          <a:solidFill>
+                            <a:srgbClr val="E8EEF4"/>
+                          </a:solidFill>
+                          <a:latin typeface="Arial" pitchFamily="34" charset="0"/>
+                          <a:ea typeface="Arial" pitchFamily="34" charset="-122"/>
+                          <a:cs typeface="Arial" pitchFamily="34" charset="-120"/>
+                        </a:rPr>
+                        <a:t>0.8676</a:t>
+                      </a:r>
+                      <a:endParaRPr lang="en-US" sz="1100" dirty="0">
+                        <a:latin typeface="Arial" charset="0"/>
+                        <a:ea typeface="Arial" charset="0"/>
+                        <a:cs typeface="Arial" charset="0"/>
+                      </a:endParaRPr>
+                    </a:p>
+                  </a:txBody>
+                  <a:tcPr marL="54864" marR="54864" marT="54864" marB="54864" anchor="ctr">
+                    <a:lnL w="9525" cap="flat" cmpd="sng" algn="ctr">
+                      <a:solidFill>
+                        <a:srgbClr val="24303D"/>
+                      </a:solidFill>
+                      <a:prstDash val="solid"/>
+                      <a:round/>
+                      <a:headEnd type="none" w="med" len="med"/>
+                      <a:tailEnd type="none" w="med" len="med"/>
+                    </a:lnL>
+                    <a:lnR w="9525" cap="flat" cmpd="sng" algn="ctr">
+                      <a:solidFill>
+                        <a:srgbClr val="24303D"/>
+                      </a:solidFill>
+                      <a:prstDash val="solid"/>
+                      <a:round/>
+                      <a:headEnd type="none" w="med" len="med"/>
+                      <a:tailEnd type="none" w="med" len="med"/>
+                    </a:lnR>
+                    <a:lnT w="9525" cap="flat" cmpd="sng" algn="ctr">
+                      <a:solidFill>
+                        <a:srgbClr val="24303D"/>
+                      </a:solidFill>
+                      <a:prstDash val="solid"/>
+                      <a:round/>
+                      <a:headEnd type="none" w="med" len="med"/>
+                      <a:tailEnd type="none" w="med" len="med"/>
+                    </a:lnT>
+                    <a:lnB w="9525" cap="flat" cmpd="sng" algn="ctr">
+                      <a:solidFill>
+                        <a:srgbClr val="24303D"/>
+                      </a:solidFill>
+                      <a:prstDash val="solid"/>
+                      <a:round/>
+                      <a:headEnd type="none" w="med" len="med"/>
+                      <a:tailEnd type="none" w="med" len="med"/>
+                    </a:lnB>
+                    <a:solidFill>
+                      <a:srgbClr val="151E27"/>
+                    </a:solidFill>
+                  </a:tcPr>
+                </a:tc>
+                <a:tc>
+                  <a:txBody>
+                    <a:bodyPr/>
+                    <a:lstStyle/>
+                    <a:p>
+                      <a:pPr indent="0" marL="0">
+                        <a:buNone/>
+                      </a:pPr>
+                      <a:r>
+                        <a:rPr lang="en-US" sz="1100" dirty="0">
+                          <a:solidFill>
+                            <a:srgbClr val="E8EEF4"/>
+                          </a:solidFill>
+                          <a:latin typeface="Arial" pitchFamily="34" charset="0"/>
+                          <a:ea typeface="Arial" pitchFamily="34" charset="-122"/>
+                          <a:cs typeface="Arial" pitchFamily="34" charset="-120"/>
+                        </a:rPr>
+                        <a:t>-0.0042</a:t>
+                      </a:r>
+                      <a:endParaRPr lang="en-US" sz="1100" dirty="0">
+                        <a:latin typeface="Arial" charset="0"/>
+                        <a:ea typeface="Arial" charset="0"/>
+                        <a:cs typeface="Arial" charset="0"/>
+                      </a:endParaRPr>
+                    </a:p>
+                  </a:txBody>
+                  <a:tcPr marL="54864" marR="54864" marT="54864" marB="54864" anchor="ctr">
+                    <a:lnL w="9525" cap="flat" cmpd="sng" algn="ctr">
+                      <a:solidFill>
+                        <a:srgbClr val="24303D"/>
+                      </a:solidFill>
+                      <a:prstDash val="solid"/>
+                      <a:round/>
+                      <a:headEnd type="none" w="med" len="med"/>
+                      <a:tailEnd type="none" w="med" len="med"/>
+                    </a:lnL>
+                    <a:lnR w="9525" cap="flat" cmpd="sng" algn="ctr">
+                      <a:solidFill>
+                        <a:srgbClr val="24303D"/>
+                      </a:solidFill>
+                      <a:prstDash val="solid"/>
+                      <a:round/>
+                      <a:headEnd type="none" w="med" len="med"/>
+                      <a:tailEnd type="none" w="med" len="med"/>
+                    </a:lnR>
+                    <a:lnT w="9525" cap="flat" cmpd="sng" algn="ctr">
+                      <a:solidFill>
+                        <a:srgbClr val="24303D"/>
+                      </a:solidFill>
+                      <a:prstDash val="solid"/>
+                      <a:round/>
+                      <a:headEnd type="none" w="med" len="med"/>
+                      <a:tailEnd type="none" w="med" len="med"/>
+                    </a:lnT>
+                    <a:lnB w="9525" cap="flat" cmpd="sng" algn="ctr">
+                      <a:solidFill>
+                        <a:srgbClr val="24303D"/>
+                      </a:solidFill>
+                      <a:prstDash val="solid"/>
+                      <a:round/>
+                      <a:headEnd type="none" w="med" len="med"/>
+                      <a:tailEnd type="none" w="med" len="med"/>
+                    </a:lnB>
+                    <a:solidFill>
+                      <a:srgbClr val="151E27"/>
+                    </a:solidFill>
+                  </a:tcPr>
+                </a:tc>
+              </a:tr>
+            </a:tbl>
+          </a:graphicData>
+        </a:graphic>
+      </p:graphicFrame>
+      <p:sp>
+        <p:nvSpPr>
+          <p:cNvPr id="31" name="Shape 27"/>
+          <p:cNvSpPr/>
+          <p:nvPr/>
+        </p:nvSpPr>
+        <p:spPr>
+          <a:xfrm>
+            <a:off x="7406640" y="3785616"/>
+            <a:ext cx="3840480" cy="310896"/>
+          </a:xfrm>
+          <a:prstGeom prst="rect">
+            <a:avLst/>
+          </a:prstGeom>
+          <a:solidFill>
+            <a:srgbClr val="101821"/>
+          </a:solidFill>
+          <a:ln w="12700">
+            <a:solidFill>
+              <a:srgbClr val="101821"/>
+            </a:solidFill>
+            <a:prstDash val="solid"/>
+          </a:ln>
+        </p:spPr>
+      </p:sp>
+      <p:sp>
+        <p:nvSpPr>
+          <p:cNvPr id="32" name="Text 28"/>
+          <p:cNvSpPr txBox="1"/>
+          <p:nvPr/>
+        </p:nvSpPr>
+        <p:spPr>
+          <a:xfrm>
+            <a:off x="7461504" y="3785616"/>
+            <a:ext cx="1719072" cy="310896"/>
+          </a:xfrm>
+          <a:prstGeom prst="rect">
+            <a:avLst/>
+          </a:prstGeom>
+          <a:noFill/>
+          <a:ln/>
+        </p:spPr>
+        <p:txBody>
+          <a:bodyPr wrap="square" lIns="0" tIns="0" rIns="0" bIns="0" rtlCol="0" anchor="ctr"/>
+          <a:lstStyle/>
+          <a:p>
+            <a:pPr algn="l" indent="0" marL="0">
+              <a:lnSpc>
+                <a:spcPct val="115000"/>
+              </a:lnSpc>
+              <a:buNone/>
+            </a:pPr>
+            <a:r>
+              <a:rPr lang="en-US" sz="1050" b="1" dirty="0">
+                <a:solidFill>
+                  <a:srgbClr val="F5C542"/>
+                </a:solidFill>
+                <a:latin typeface="Arial" pitchFamily="34" charset="0"/>
+                <a:ea typeface="Arial" pitchFamily="34" charset="-122"/>
+                <a:cs typeface="Arial" pitchFamily="34" charset="-120"/>
+              </a:rPr>
+              <a:t>消融变体</a:t>
+            </a:r>
+            <a:endParaRPr lang="en-US" sz="1050" dirty="0"/>
+          </a:p>
+        </p:txBody>
+      </p:sp>
+      <p:sp>
+        <p:nvSpPr>
+          <p:cNvPr id="33" name="Text 29"/>
+          <p:cNvSpPr txBox="1"/>
+          <p:nvPr/>
+        </p:nvSpPr>
+        <p:spPr>
+          <a:xfrm>
+            <a:off x="9290304" y="3785616"/>
+            <a:ext cx="896112" cy="310896"/>
+          </a:xfrm>
+          <a:prstGeom prst="rect">
+            <a:avLst/>
+          </a:prstGeom>
+          <a:noFill/>
+          <a:ln/>
+        </p:spPr>
+        <p:txBody>
+          <a:bodyPr wrap="square" lIns="0" tIns="0" rIns="0" bIns="0" rtlCol="0" anchor="ctr"/>
+          <a:lstStyle/>
+          <a:p>
+            <a:pPr algn="l" indent="0" marL="0">
+              <a:lnSpc>
+                <a:spcPct val="115000"/>
+              </a:lnSpc>
+              <a:buNone/>
+            </a:pPr>
+            <a:r>
+              <a:rPr lang="en-US" sz="1050" b="1" dirty="0">
+                <a:solidFill>
+                  <a:srgbClr val="F5C542"/>
+                </a:solidFill>
+                <a:latin typeface="Arial" pitchFamily="34" charset="0"/>
+                <a:ea typeface="Arial" pitchFamily="34" charset="-122"/>
+                <a:cs typeface="Arial" pitchFamily="34" charset="-120"/>
+              </a:rPr>
+              <a:t>S</a:t>
+            </a:r>
+            <a:endParaRPr lang="en-US" sz="1050" dirty="0"/>
+          </a:p>
+        </p:txBody>
+      </p:sp>
+      <p:sp>
+        <p:nvSpPr>
+          <p:cNvPr id="34" name="Text 30"/>
+          <p:cNvSpPr txBox="1"/>
+          <p:nvPr/>
+        </p:nvSpPr>
+        <p:spPr>
+          <a:xfrm>
+            <a:off x="10296144" y="3785616"/>
+            <a:ext cx="896112" cy="310896"/>
+          </a:xfrm>
+          <a:prstGeom prst="rect">
+            <a:avLst/>
+          </a:prstGeom>
+          <a:noFill/>
+          <a:ln/>
+        </p:spPr>
+        <p:txBody>
+          <a:bodyPr wrap="square" lIns="0" tIns="0" rIns="0" bIns="0" rtlCol="0" anchor="ctr"/>
+          <a:lstStyle/>
+          <a:p>
+            <a:pPr algn="l" indent="0" marL="0">
+              <a:lnSpc>
+                <a:spcPct val="115000"/>
+              </a:lnSpc>
+              <a:buNone/>
+            </a:pPr>
+            <a:r>
+              <a:rPr lang="en-US" sz="1050" b="1" dirty="0">
+                <a:solidFill>
+                  <a:srgbClr val="F5C542"/>
+                </a:solidFill>
+                <a:latin typeface="Arial" pitchFamily="34" charset="0"/>
+                <a:ea typeface="Arial" pitchFamily="34" charset="-122"/>
+                <a:cs typeface="Arial" pitchFamily="34" charset="-120"/>
+              </a:rPr>
+              <a:t>ΔS</a:t>
+            </a:r>
+            <a:endParaRPr lang="en-US" sz="1050" dirty="0"/>
+          </a:p>
+        </p:txBody>
+      </p:sp>
+      <p:sp>
+        <p:nvSpPr>
+          <p:cNvPr id="35" name="Text 31"/>
+          <p:cNvSpPr txBox="1"/>
+          <p:nvPr/>
+        </p:nvSpPr>
+        <p:spPr>
+          <a:xfrm>
+            <a:off x="7406640" y="5358384"/>
+            <a:ext cx="4023360" cy="548640"/>
+          </a:xfrm>
+          <a:prstGeom prst="rect">
+            <a:avLst/>
+          </a:prstGeom>
+          <a:noFill/>
+          <a:ln/>
+        </p:spPr>
+        <p:txBody>
+          <a:bodyPr wrap="square" lIns="0" tIns="0" rIns="0" bIns="0" rtlCol="0" anchor="t"/>
+          <a:lstStyle/>
+          <a:p>
+            <a:pPr algn="l" indent="0" marL="0">
+              <a:lnSpc>
                 <a:spcPct val="130000"/>
               </a:lnSpc>
               <a:buNone/>
             </a:pPr>
             <a:r>
-              <a:rPr lang="en-US" sz="950" dirty="0">
+              <a:rPr lang="en-US" sz="1000" dirty="0">
                 <a:solidFill>
                   <a:srgbClr val="8695A4"/>
                 </a:solidFill>
@@ -11079,15 +12351,15 @@
                 <a:ea typeface="Arial" pitchFamily="34" charset="-122"/>
                 <a:cs typeface="Arial" pitchFamily="34" charset="-120"/>
               </a:rPr>
-              <a:t>ΔS 相对完整模型；去掉 Transformer 直接掉 0.16</a:t>
-            </a:r>
-            <a:endParaRPr lang="en-US" sz="950" dirty="0"/>
-          </a:p>
-        </p:txBody>
-      </p:sp>
-      <p:sp>
-        <p:nvSpPr>
-          <p:cNvPr id="31" name="Text 27"/>
+              <a:t>拿掉 Transformer 掉 0.16，模型基本失效。其余三项都在 0.008 以内。</a:t>
+            </a:r>
+            <a:endParaRPr lang="en-US" sz="1000" dirty="0"/>
+          </a:p>
+        </p:txBody>
+      </p:sp>
+      <p:sp>
+        <p:nvSpPr>
+          <p:cNvPr id="36" name="Text 32"/>
           <p:cNvSpPr txBox="1"/>
           <p:nvPr/>
         </p:nvSpPr>
@@ -11121,7 +12393,7 @@
                 <a:ea typeface="Arial" pitchFamily="34" charset="-122"/>
                 <a:cs typeface="Arial" pitchFamily="34" charset="-120"/>
               </a:rPr>
-              <a:t>来源 predictions/metrics.csv、ablation/metrics.csv；图为 tools/make_charts.py 生成</a:t>
+              <a:t>数据来自 predictions/metrics.csv 和 ablation/metrics.csv，对比图在 docs/assets/comparison-bars.png</a:t>
             </a:r>
             <a:endParaRPr lang="en-US" sz="900" dirty="0"/>
           </a:p>
@@ -11303,7 +12575,7 @@
                 <a:ea typeface="Arial" pitchFamily="34" charset="-122"/>
                 <a:cs typeface="Arial" pitchFamily="34" charset="-120"/>
               </a:rPr>
-              <a:t>Transformer 是命脉，深度分支几乎没吃到</a:t>
+              <a:t>消融里最值得追问的一项</a:t>
             </a:r>
             <a:endParaRPr lang="en-US" sz="3000" dirty="0"/>
           </a:p>
@@ -11345,50 +12617,662 @@
                 <a:ea typeface="Arial" pitchFamily="34" charset="-122"/>
                 <a:cs typeface="Arial" pitchFamily="34" charset="-120"/>
               </a:rPr>
-              <a:t>最有价值的一条不是“哪个模块有用”，而是“为什么深度没用”——它指向一个数据管线缺陷</a:t>
+              <a:t>四个变体都按预期下降，唯独去掉深度 CNN 只掉 0.0042。查下来问题在数据管线，不在模型</a:t>
             </a:r>
             <a:endParaRPr lang="en-US" sz="1250" dirty="0"/>
           </a:p>
         </p:txBody>
       </p:sp>
-      <p:pic>
-        <p:nvPicPr>
-          <p:cNvPr id="7" name="Image 0" descr="D:\projects\vpteam\GLIDE-Net\docs\assets\ablation-bars.png">    </p:cNvPr>
-          <p:cNvPicPr>
-            <a:picLocks noChangeAspect="1"/>
-          </p:cNvPicPr>
-          <p:nvPr/>
-        </p:nvPicPr>
-        <p:blipFill>
-          <a:blip r:embed="rId1"/>
-          <a:stretch>
-            <a:fillRect/>
-          </a:stretch>
-        </p:blipFill>
-        <p:spPr>
-          <a:xfrm>
-            <a:off x="493776" y="1920240"/>
-            <a:ext cx="6858000" cy="914400"/>
-          </a:xfrm>
-          <a:prstGeom prst="rect">
-            <a:avLst/>
-          </a:prstGeom>
-        </p:spPr>
-      </p:pic>
-      <p:sp>
-        <p:nvSpPr>
-          <p:cNvPr id="8" name="Shape 5"/>
+      <p:sp>
+        <p:nvSpPr>
+          <p:cNvPr id="7" name="Text 5"/>
+          <p:cNvSpPr txBox="1"/>
+          <p:nvPr/>
+        </p:nvSpPr>
+        <p:spPr>
+          <a:xfrm>
+            <a:off x="566928" y="2249424"/>
+            <a:ext cx="3017520" cy="310896"/>
+          </a:xfrm>
+          <a:prstGeom prst="rect">
+            <a:avLst/>
+          </a:prstGeom>
+          <a:noFill/>
+          <a:ln/>
+        </p:spPr>
+        <p:txBody>
+          <a:bodyPr wrap="square" lIns="0" tIns="0" rIns="0" bIns="0" rtlCol="0" anchor="ctr"/>
+          <a:lstStyle/>
+          <a:p>
+            <a:pPr algn="l" indent="0" marL="0">
+              <a:lnSpc>
+                <a:spcPct val="115000"/>
+              </a:lnSpc>
+              <a:buNone/>
+            </a:pPr>
+            <a:r>
+              <a:rPr lang="en-US" sz="1250" dirty="0">
+                <a:solidFill>
+                  <a:srgbClr val="E8EEF4"/>
+                </a:solidFill>
+                <a:latin typeface="Arial" pitchFamily="34" charset="0"/>
+                <a:ea typeface="Arial" pitchFamily="34" charset="-122"/>
+                <a:cs typeface="Arial" pitchFamily="34" charset="-120"/>
+              </a:rPr>
+              <a:t>w_o_Transformer</a:t>
+            </a:r>
+            <a:endParaRPr lang="en-US" sz="1250" dirty="0"/>
+          </a:p>
+        </p:txBody>
+      </p:sp>
+      <p:sp>
+        <p:nvSpPr>
+          <p:cNvPr id="8" name="Shape 6"/>
           <p:cNvSpPr/>
           <p:nvPr/>
         </p:nvSpPr>
         <p:spPr>
           <a:xfrm>
-            <a:off x="7589520" y="1920240"/>
-            <a:ext cx="4041648" cy="2103120"/>
+            <a:off x="3675888" y="2276856"/>
+            <a:ext cx="3383280" cy="256032"/>
           </a:xfrm>
           <a:prstGeom prst="roundRect">
             <a:avLst>
-              <a:gd name="adj" fmla="val 2609"/>
+              <a:gd name="adj" fmla="val 10714"/>
+            </a:avLst>
+          </a:prstGeom>
+          <a:solidFill>
+            <a:srgbClr val="101821"/>
+          </a:solidFill>
+          <a:ln w="12700">
+            <a:solidFill>
+              <a:srgbClr val="101821"/>
+            </a:solidFill>
+            <a:prstDash val="solid"/>
+          </a:ln>
+        </p:spPr>
+      </p:sp>
+      <p:sp>
+        <p:nvSpPr>
+          <p:cNvPr id="9" name="Shape 7"/>
+          <p:cNvSpPr/>
+          <p:nvPr/>
+        </p:nvSpPr>
+        <p:spPr>
+          <a:xfrm>
+            <a:off x="3675888" y="2276856"/>
+            <a:ext cx="3383280" cy="256032"/>
+          </a:xfrm>
+          <a:prstGeom prst="roundRect">
+            <a:avLst>
+              <a:gd name="adj" fmla="val 10714"/>
+            </a:avLst>
+          </a:prstGeom>
+          <a:solidFill>
+            <a:srgbClr val="E5484D"/>
+          </a:solidFill>
+          <a:ln w="12700">
+            <a:solidFill>
+              <a:srgbClr val="E5484D"/>
+            </a:solidFill>
+            <a:prstDash val="solid"/>
+          </a:ln>
+        </p:spPr>
+      </p:sp>
+      <p:sp>
+        <p:nvSpPr>
+          <p:cNvPr id="10" name="Text 8"/>
+          <p:cNvSpPr txBox="1"/>
+          <p:nvPr/>
+        </p:nvSpPr>
+        <p:spPr>
+          <a:xfrm>
+            <a:off x="7205472" y="2249424"/>
+            <a:ext cx="914400" cy="310896"/>
+          </a:xfrm>
+          <a:prstGeom prst="rect">
+            <a:avLst/>
+          </a:prstGeom>
+          <a:noFill/>
+          <a:ln/>
+        </p:spPr>
+        <p:txBody>
+          <a:bodyPr wrap="square" lIns="0" tIns="0" rIns="0" bIns="0" rtlCol="0" anchor="ctr"/>
+          <a:lstStyle/>
+          <a:p>
+            <a:pPr algn="l" indent="0" marL="0">
+              <a:lnSpc>
+                <a:spcPct val="115000"/>
+              </a:lnSpc>
+              <a:buNone/>
+            </a:pPr>
+            <a:r>
+              <a:rPr lang="en-US" sz="1250" b="1" dirty="0">
+                <a:solidFill>
+                  <a:srgbClr val="E5484D"/>
+                </a:solidFill>
+                <a:latin typeface="Arial" pitchFamily="34" charset="0"/>
+                <a:ea typeface="Arial" pitchFamily="34" charset="-122"/>
+                <a:cs typeface="Arial" pitchFamily="34" charset="-120"/>
+              </a:rPr>
+              <a:t>-0.1622</a:t>
+            </a:r>
+            <a:endParaRPr lang="en-US" sz="1250" dirty="0"/>
+          </a:p>
+        </p:txBody>
+      </p:sp>
+      <p:sp>
+        <p:nvSpPr>
+          <p:cNvPr id="11" name="Text 9"/>
+          <p:cNvSpPr txBox="1"/>
+          <p:nvPr/>
+        </p:nvSpPr>
+        <p:spPr>
+          <a:xfrm>
+            <a:off x="566928" y="2907792"/>
+            <a:ext cx="3017520" cy="310896"/>
+          </a:xfrm>
+          <a:prstGeom prst="rect">
+            <a:avLst/>
+          </a:prstGeom>
+          <a:noFill/>
+          <a:ln/>
+        </p:spPr>
+        <p:txBody>
+          <a:bodyPr wrap="square" lIns="0" tIns="0" rIns="0" bIns="0" rtlCol="0" anchor="ctr"/>
+          <a:lstStyle/>
+          <a:p>
+            <a:pPr algn="l" indent="0" marL="0">
+              <a:lnSpc>
+                <a:spcPct val="115000"/>
+              </a:lnSpc>
+              <a:buNone/>
+            </a:pPr>
+            <a:r>
+              <a:rPr lang="en-US" sz="1250" dirty="0">
+                <a:solidFill>
+                  <a:srgbClr val="8695A4"/>
+                </a:solidFill>
+                <a:latin typeface="Arial" pitchFamily="34" charset="0"/>
+                <a:ea typeface="Arial" pitchFamily="34" charset="-122"/>
+                <a:cs typeface="Arial" pitchFamily="34" charset="-120"/>
+              </a:rPr>
+              <a:t>w_o_MSDEF</a:t>
+            </a:r>
+            <a:endParaRPr lang="en-US" sz="1250" dirty="0"/>
+          </a:p>
+        </p:txBody>
+      </p:sp>
+      <p:sp>
+        <p:nvSpPr>
+          <p:cNvPr id="12" name="Shape 10"/>
+          <p:cNvSpPr/>
+          <p:nvPr/>
+        </p:nvSpPr>
+        <p:spPr>
+          <a:xfrm>
+            <a:off x="3675888" y="2935224"/>
+            <a:ext cx="3383280" cy="256032"/>
+          </a:xfrm>
+          <a:prstGeom prst="roundRect">
+            <a:avLst>
+              <a:gd name="adj" fmla="val 10714"/>
+            </a:avLst>
+          </a:prstGeom>
+          <a:solidFill>
+            <a:srgbClr val="101821"/>
+          </a:solidFill>
+          <a:ln w="12700">
+            <a:solidFill>
+              <a:srgbClr val="101821"/>
+            </a:solidFill>
+            <a:prstDash val="solid"/>
+          </a:ln>
+        </p:spPr>
+      </p:sp>
+      <p:sp>
+        <p:nvSpPr>
+          <p:cNvPr id="13" name="Shape 11"/>
+          <p:cNvSpPr/>
+          <p:nvPr/>
+        </p:nvSpPr>
+        <p:spPr>
+          <a:xfrm>
+            <a:off x="3675888" y="2935224"/>
+            <a:ext cx="160612" cy="256032"/>
+          </a:xfrm>
+          <a:prstGeom prst="roundRect">
+            <a:avLst>
+              <a:gd name="adj" fmla="val 17080"/>
+            </a:avLst>
+          </a:prstGeom>
+          <a:solidFill>
+            <a:srgbClr val="F5C542"/>
+          </a:solidFill>
+          <a:ln w="12700">
+            <a:solidFill>
+              <a:srgbClr val="F5C542"/>
+            </a:solidFill>
+            <a:prstDash val="solid"/>
+          </a:ln>
+        </p:spPr>
+      </p:sp>
+      <p:sp>
+        <p:nvSpPr>
+          <p:cNvPr id="14" name="Text 12"/>
+          <p:cNvSpPr txBox="1"/>
+          <p:nvPr/>
+        </p:nvSpPr>
+        <p:spPr>
+          <a:xfrm>
+            <a:off x="7205472" y="2907792"/>
+            <a:ext cx="914400" cy="310896"/>
+          </a:xfrm>
+          <a:prstGeom prst="rect">
+            <a:avLst/>
+          </a:prstGeom>
+          <a:noFill/>
+          <a:ln/>
+        </p:spPr>
+        <p:txBody>
+          <a:bodyPr wrap="square" lIns="0" tIns="0" rIns="0" bIns="0" rtlCol="0" anchor="ctr"/>
+          <a:lstStyle/>
+          <a:p>
+            <a:pPr algn="l" indent="0" marL="0">
+              <a:lnSpc>
+                <a:spcPct val="115000"/>
+              </a:lnSpc>
+              <a:buNone/>
+            </a:pPr>
+            <a:r>
+              <a:rPr lang="en-US" sz="1250" b="1" dirty="0">
+                <a:solidFill>
+                  <a:srgbClr val="E8EEF4"/>
+                </a:solidFill>
+                <a:latin typeface="Arial" pitchFamily="34" charset="0"/>
+                <a:ea typeface="Arial" pitchFamily="34" charset="-122"/>
+                <a:cs typeface="Arial" pitchFamily="34" charset="-120"/>
+              </a:rPr>
+              <a:t>-0.0077</a:t>
+            </a:r>
+            <a:endParaRPr lang="en-US" sz="1250" dirty="0"/>
+          </a:p>
+        </p:txBody>
+      </p:sp>
+      <p:sp>
+        <p:nvSpPr>
+          <p:cNvPr id="15" name="Text 13"/>
+          <p:cNvSpPr txBox="1"/>
+          <p:nvPr/>
+        </p:nvSpPr>
+        <p:spPr>
+          <a:xfrm>
+            <a:off x="566928" y="3566160"/>
+            <a:ext cx="3017520" cy="310896"/>
+          </a:xfrm>
+          <a:prstGeom prst="rect">
+            <a:avLst/>
+          </a:prstGeom>
+          <a:noFill/>
+          <a:ln/>
+        </p:spPr>
+        <p:txBody>
+          <a:bodyPr wrap="square" lIns="0" tIns="0" rIns="0" bIns="0" rtlCol="0" anchor="ctr"/>
+          <a:lstStyle/>
+          <a:p>
+            <a:pPr algn="l" indent="0" marL="0">
+              <a:lnSpc>
+                <a:spcPct val="115000"/>
+              </a:lnSpc>
+              <a:buNone/>
+            </a:pPr>
+            <a:r>
+              <a:rPr lang="en-US" sz="1250" dirty="0">
+                <a:solidFill>
+                  <a:srgbClr val="8695A4"/>
+                </a:solidFill>
+                <a:latin typeface="Arial" pitchFamily="34" charset="0"/>
+                <a:ea typeface="Arial" pitchFamily="34" charset="-122"/>
+                <a:cs typeface="Arial" pitchFamily="34" charset="-120"/>
+              </a:rPr>
+              <a:t>w_o_CMF</a:t>
+            </a:r>
+            <a:endParaRPr lang="en-US" sz="1250" dirty="0"/>
+          </a:p>
+        </p:txBody>
+      </p:sp>
+      <p:sp>
+        <p:nvSpPr>
+          <p:cNvPr id="16" name="Shape 14"/>
+          <p:cNvSpPr/>
+          <p:nvPr/>
+        </p:nvSpPr>
+        <p:spPr>
+          <a:xfrm>
+            <a:off x="3675888" y="3593592"/>
+            <a:ext cx="3383280" cy="256032"/>
+          </a:xfrm>
+          <a:prstGeom prst="roundRect">
+            <a:avLst>
+              <a:gd name="adj" fmla="val 10714"/>
+            </a:avLst>
+          </a:prstGeom>
+          <a:solidFill>
+            <a:srgbClr val="101821"/>
+          </a:solidFill>
+          <a:ln w="12700">
+            <a:solidFill>
+              <a:srgbClr val="101821"/>
+            </a:solidFill>
+            <a:prstDash val="solid"/>
+          </a:ln>
+        </p:spPr>
+      </p:sp>
+      <p:sp>
+        <p:nvSpPr>
+          <p:cNvPr id="17" name="Shape 15"/>
+          <p:cNvSpPr/>
+          <p:nvPr/>
+        </p:nvSpPr>
+        <p:spPr>
+          <a:xfrm>
+            <a:off x="3675888" y="3593592"/>
+            <a:ext cx="116809" cy="256032"/>
+          </a:xfrm>
+          <a:prstGeom prst="roundRect">
+            <a:avLst>
+              <a:gd name="adj" fmla="val 23484"/>
+            </a:avLst>
+          </a:prstGeom>
+          <a:solidFill>
+            <a:srgbClr val="F5C542"/>
+          </a:solidFill>
+          <a:ln w="12700">
+            <a:solidFill>
+              <a:srgbClr val="F5C542"/>
+            </a:solidFill>
+            <a:prstDash val="solid"/>
+          </a:ln>
+        </p:spPr>
+      </p:sp>
+      <p:sp>
+        <p:nvSpPr>
+          <p:cNvPr id="18" name="Text 16"/>
+          <p:cNvSpPr txBox="1"/>
+          <p:nvPr/>
+        </p:nvSpPr>
+        <p:spPr>
+          <a:xfrm>
+            <a:off x="7205472" y="3566160"/>
+            <a:ext cx="914400" cy="310896"/>
+          </a:xfrm>
+          <a:prstGeom prst="rect">
+            <a:avLst/>
+          </a:prstGeom>
+          <a:noFill/>
+          <a:ln/>
+        </p:spPr>
+        <p:txBody>
+          <a:bodyPr wrap="square" lIns="0" tIns="0" rIns="0" bIns="0" rtlCol="0" anchor="ctr"/>
+          <a:lstStyle/>
+          <a:p>
+            <a:pPr algn="l" indent="0" marL="0">
+              <a:lnSpc>
+                <a:spcPct val="115000"/>
+              </a:lnSpc>
+              <a:buNone/>
+            </a:pPr>
+            <a:r>
+              <a:rPr lang="en-US" sz="1250" b="1" dirty="0">
+                <a:solidFill>
+                  <a:srgbClr val="E8EEF4"/>
+                </a:solidFill>
+                <a:latin typeface="Arial" pitchFamily="34" charset="0"/>
+                <a:ea typeface="Arial" pitchFamily="34" charset="-122"/>
+                <a:cs typeface="Arial" pitchFamily="34" charset="-120"/>
+              </a:rPr>
+              <a:t>-0.0056</a:t>
+            </a:r>
+            <a:endParaRPr lang="en-US" sz="1250" dirty="0"/>
+          </a:p>
+        </p:txBody>
+      </p:sp>
+      <p:sp>
+        <p:nvSpPr>
+          <p:cNvPr id="19" name="Text 17"/>
+          <p:cNvSpPr txBox="1"/>
+          <p:nvPr/>
+        </p:nvSpPr>
+        <p:spPr>
+          <a:xfrm>
+            <a:off x="566928" y="4224528"/>
+            <a:ext cx="3017520" cy="310896"/>
+          </a:xfrm>
+          <a:prstGeom prst="rect">
+            <a:avLst/>
+          </a:prstGeom>
+          <a:noFill/>
+          <a:ln/>
+        </p:spPr>
+        <p:txBody>
+          <a:bodyPr wrap="square" lIns="0" tIns="0" rIns="0" bIns="0" rtlCol="0" anchor="ctr"/>
+          <a:lstStyle/>
+          <a:p>
+            <a:pPr algn="l" indent="0" marL="0">
+              <a:lnSpc>
+                <a:spcPct val="115000"/>
+              </a:lnSpc>
+              <a:buNone/>
+            </a:pPr>
+            <a:r>
+              <a:rPr lang="en-US" sz="1250" dirty="0">
+                <a:solidFill>
+                  <a:srgbClr val="8695A4"/>
+                </a:solidFill>
+                <a:latin typeface="Arial" pitchFamily="34" charset="0"/>
+                <a:ea typeface="Arial" pitchFamily="34" charset="-122"/>
+                <a:cs typeface="Arial" pitchFamily="34" charset="-120"/>
+              </a:rPr>
+              <a:t>w_o_CNN</a:t>
+            </a:r>
+            <a:endParaRPr lang="en-US" sz="1250" dirty="0"/>
+          </a:p>
+        </p:txBody>
+      </p:sp>
+      <p:sp>
+        <p:nvSpPr>
+          <p:cNvPr id="20" name="Shape 18"/>
+          <p:cNvSpPr/>
+          <p:nvPr/>
+        </p:nvSpPr>
+        <p:spPr>
+          <a:xfrm>
+            <a:off x="3675888" y="4251960"/>
+            <a:ext cx="3383280" cy="256032"/>
+          </a:xfrm>
+          <a:prstGeom prst="roundRect">
+            <a:avLst>
+              <a:gd name="adj" fmla="val 10714"/>
+            </a:avLst>
+          </a:prstGeom>
+          <a:solidFill>
+            <a:srgbClr val="101821"/>
+          </a:solidFill>
+          <a:ln w="12700">
+            <a:solidFill>
+              <a:srgbClr val="101821"/>
+            </a:solidFill>
+            <a:prstDash val="solid"/>
+          </a:ln>
+        </p:spPr>
+      </p:sp>
+      <p:sp>
+        <p:nvSpPr>
+          <p:cNvPr id="21" name="Shape 19"/>
+          <p:cNvSpPr/>
+          <p:nvPr/>
+        </p:nvSpPr>
+        <p:spPr>
+          <a:xfrm>
+            <a:off x="3675888" y="4251960"/>
+            <a:ext cx="87607" cy="256032"/>
+          </a:xfrm>
+          <a:prstGeom prst="roundRect">
+            <a:avLst>
+              <a:gd name="adj" fmla="val 31313"/>
+            </a:avLst>
+          </a:prstGeom>
+          <a:solidFill>
+            <a:srgbClr val="F5C542"/>
+          </a:solidFill>
+          <a:ln w="12700">
+            <a:solidFill>
+              <a:srgbClr val="F5C542"/>
+            </a:solidFill>
+            <a:prstDash val="solid"/>
+          </a:ln>
+        </p:spPr>
+      </p:sp>
+      <p:sp>
+        <p:nvSpPr>
+          <p:cNvPr id="22" name="Text 20"/>
+          <p:cNvSpPr txBox="1"/>
+          <p:nvPr/>
+        </p:nvSpPr>
+        <p:spPr>
+          <a:xfrm>
+            <a:off x="7205472" y="4224528"/>
+            <a:ext cx="914400" cy="310896"/>
+          </a:xfrm>
+          <a:prstGeom prst="rect">
+            <a:avLst/>
+          </a:prstGeom>
+          <a:noFill/>
+          <a:ln/>
+        </p:spPr>
+        <p:txBody>
+          <a:bodyPr wrap="square" lIns="0" tIns="0" rIns="0" bIns="0" rtlCol="0" anchor="ctr"/>
+          <a:lstStyle/>
+          <a:p>
+            <a:pPr algn="l" indent="0" marL="0">
+              <a:lnSpc>
+                <a:spcPct val="115000"/>
+              </a:lnSpc>
+              <a:buNone/>
+            </a:pPr>
+            <a:r>
+              <a:rPr lang="en-US" sz="1250" b="1" dirty="0">
+                <a:solidFill>
+                  <a:srgbClr val="E8EEF4"/>
+                </a:solidFill>
+                <a:latin typeface="Arial" pitchFamily="34" charset="0"/>
+                <a:ea typeface="Arial" pitchFamily="34" charset="-122"/>
+                <a:cs typeface="Arial" pitchFamily="34" charset="-120"/>
+              </a:rPr>
+              <a:t>-0.0042</a:t>
+            </a:r>
+            <a:endParaRPr lang="en-US" sz="1250" dirty="0"/>
+          </a:p>
+        </p:txBody>
+      </p:sp>
+      <p:sp>
+        <p:nvSpPr>
+          <p:cNvPr id="23" name="Text 21"/>
+          <p:cNvSpPr txBox="1"/>
+          <p:nvPr/>
+        </p:nvSpPr>
+        <p:spPr>
+          <a:xfrm>
+            <a:off x="566928" y="1847088"/>
+            <a:ext cx="5486400" cy="237744"/>
+          </a:xfrm>
+          <a:prstGeom prst="rect">
+            <a:avLst/>
+          </a:prstGeom>
+          <a:noFill/>
+          <a:ln/>
+        </p:spPr>
+        <p:txBody>
+          <a:bodyPr wrap="square" lIns="0" tIns="0" rIns="0" bIns="0" rtlCol="0" anchor="t"/>
+          <a:lstStyle/>
+          <a:p>
+            <a:pPr algn="l" indent="0" marL="0">
+              <a:lnSpc>
+                <a:spcPct val="115000"/>
+              </a:lnSpc>
+              <a:buNone/>
+            </a:pPr>
+            <a:r>
+              <a:rPr lang="en-US" sz="1100" dirty="0">
+                <a:solidFill>
+                  <a:srgbClr val="8695A4"/>
+                </a:solidFill>
+                <a:latin typeface="Arial" pitchFamily="34" charset="0"/>
+                <a:ea typeface="Arial" pitchFamily="34" charset="-122"/>
+                <a:cs typeface="Arial" pitchFamily="34" charset="-120"/>
+              </a:rPr>
+              <a:t>ΔS 相对完整模型（S = 0.8718）</a:t>
+            </a:r>
+            <a:endParaRPr lang="en-US" sz="1100" dirty="0"/>
+          </a:p>
+        </p:txBody>
+      </p:sp>
+      <p:sp>
+        <p:nvSpPr>
+          <p:cNvPr id="24" name="Text 22"/>
+          <p:cNvSpPr txBox="1"/>
+          <p:nvPr/>
+        </p:nvSpPr>
+        <p:spPr>
+          <a:xfrm>
+            <a:off x="566928" y="4956048"/>
+            <a:ext cx="7498080" cy="548640"/>
+          </a:xfrm>
+          <a:prstGeom prst="rect">
+            <a:avLst/>
+          </a:prstGeom>
+          <a:noFill/>
+          <a:ln/>
+        </p:spPr>
+        <p:txBody>
+          <a:bodyPr wrap="square" lIns="0" tIns="0" rIns="0" bIns="0" rtlCol="0" anchor="t"/>
+          <a:lstStyle/>
+          <a:p>
+            <a:pPr algn="l" indent="0" marL="0">
+              <a:lnSpc>
+                <a:spcPct val="135000"/>
+              </a:lnSpc>
+              <a:buNone/>
+            </a:pPr>
+            <a:r>
+              <a:rPr lang="en-US" sz="1150" dirty="0">
+                <a:solidFill>
+                  <a:srgbClr val="E8EEF4"/>
+                </a:solidFill>
+                <a:latin typeface="Arial" pitchFamily="34" charset="0"/>
+                <a:ea typeface="Arial" pitchFamily="34" charset="-122"/>
+                <a:cs typeface="Arial" pitchFamily="34" charset="-120"/>
+              </a:rPr>
+              <a:t>Transformer 是主干，拿掉就塌。另外三项各自不到 0.01，单看数字会以为这三个模块都没用。</a:t>
+            </a:r>
+            <a:endParaRPr lang="en-US" sz="1150" dirty="0"/>
+          </a:p>
+        </p:txBody>
+      </p:sp>
+      <p:sp>
+        <p:nvSpPr>
+          <p:cNvPr id="25" name="Shape 23"/>
+          <p:cNvSpPr/>
+          <p:nvPr/>
+        </p:nvSpPr>
+        <p:spPr>
+          <a:xfrm>
+            <a:off x="8247888" y="1847088"/>
+            <a:ext cx="3364992" cy="3017520"/>
+          </a:xfrm>
+          <a:prstGeom prst="roundRect">
+            <a:avLst>
+              <a:gd name="adj" fmla="val 1818"/>
             </a:avLst>
           </a:prstGeom>
           <a:solidFill>
@@ -11411,14 +13295,14 @@
       </p:sp>
       <p:sp>
         <p:nvSpPr>
-          <p:cNvPr id="9" name="Text 6"/>
+          <p:cNvPr id="26" name="Text 24"/>
           <p:cNvSpPr txBox="1"/>
           <p:nvPr/>
         </p:nvSpPr>
         <p:spPr>
           <a:xfrm>
-            <a:off x="7790688" y="2066544"/>
-            <a:ext cx="3639312" cy="219456"/>
+            <a:off x="8449056" y="1993392"/>
+            <a:ext cx="2962656" cy="219456"/>
           </a:xfrm>
           <a:prstGeom prst="rect">
             <a:avLst/>
@@ -11439,13 +13323,13 @@
             <a:r>
               <a:rPr lang="en-US" sz="1100" b="1" spc="60" kern="0" dirty="0">
                 <a:solidFill>
-                  <a:srgbClr val="E5484D"/>
-                </a:solidFill>
-                <a:latin typeface="Arial" pitchFamily="34" charset="0"/>
-                <a:ea typeface="Arial" pitchFamily="34" charset="-122"/>
-                <a:cs typeface="Arial" pitchFamily="34" charset="-120"/>
-              </a:rPr>
-              <a:t>四个变体的 ΔS</a:t>
+                  <a:srgbClr val="F5C542"/>
+                </a:solidFill>
+                <a:latin typeface="Arial" pitchFamily="34" charset="0"/>
+                <a:ea typeface="Arial" pitchFamily="34" charset="-122"/>
+                <a:cs typeface="Arial" pitchFamily="34" charset="-120"/>
+              </a:rPr>
+              <a:t>深度这一项为什么可疑</a:t>
             </a:r>
             <a:endParaRPr lang="en-US" sz="1100" dirty="0"/>
           </a:p>
@@ -11453,14 +13337,14 @@
       </p:sp>
       <p:sp>
         <p:nvSpPr>
-          <p:cNvPr id="10" name="Text 7"/>
+          <p:cNvPr id="27" name="Text 25"/>
           <p:cNvSpPr txBox="1"/>
           <p:nvPr/>
         </p:nvSpPr>
         <p:spPr>
           <a:xfrm>
-            <a:off x="7790688" y="2377440"/>
-            <a:ext cx="3639312" cy="1444752"/>
+            <a:off x="8449056" y="2304288"/>
+            <a:ext cx="2962656" cy="2359152"/>
           </a:xfrm>
           <a:prstGeom prst="rect">
             <a:avLst/>
@@ -11479,7 +13363,7 @@
               <a:buNone/>
             </a:pPr>
             <a:r>
-              <a:rPr lang="en-US" sz="1200" dirty="0">
+              <a:rPr lang="en-US" sz="1050" dirty="0">
                 <a:solidFill>
                   <a:srgbClr val="E8EEF4"/>
                 </a:solidFill>
@@ -11487,9 +13371,9 @@
                 <a:ea typeface="Arial" pitchFamily="34" charset="-122"/>
                 <a:cs typeface="Arial" pitchFamily="34" charset="-120"/>
               </a:rPr>
-              <a:t>w/o Transformer　−0.1622　模型基本失效</a:t>
-            </a:r>
-            <a:endParaRPr lang="en-US" sz="1200" dirty="0"/>
+              <a:t>数据集里的深度是 16 位 TIFF，PIL 的 convert("L") 会把它压成纯白，深度通道实际是常数。</a:t>
+            </a:r>
+            <a:endParaRPr lang="en-US" sz="1050" dirty="0"/>
           </a:p>
           <a:p>
             <a:pPr algn="l" indent="0" marL="0">
@@ -11498,8 +13382,17 @@
               </a:lnSpc>
               <a:buNone/>
             </a:pPr>
-            <a:r>
-              <a:rPr lang="en-US" sz="1200" dirty="0">
+            <a:endParaRPr lang="en-US" sz="1050" dirty="0"/>
+          </a:p>
+          <a:p>
+            <a:pPr algn="l" indent="0" marL="0">
+              <a:lnSpc>
+                <a:spcPct val="132000"/>
+              </a:lnSpc>
+              <a:buNone/>
+            </a:pPr>
+            <a:r>
+              <a:rPr lang="en-US" sz="1050" dirty="0">
                 <a:solidFill>
                   <a:srgbClr val="E8EEF4"/>
                 </a:solidFill>
@@ -11507,9 +13400,9 @@
                 <a:ea typeface="Arial" pitchFamily="34" charset="-122"/>
                 <a:cs typeface="Arial" pitchFamily="34" charset="-120"/>
               </a:rPr>
-              <a:t>w/o MSDEF　　　 −0.0077</a:t>
-            </a:r>
-            <a:endParaRPr lang="en-US" sz="1200" dirty="0"/>
+              <a:t>换成 min-max 拉伸后，掩膜 IoU 仍是 0.9916，说明现权重没学到深度。</a:t>
+            </a:r>
+            <a:endParaRPr lang="en-US" sz="1050" dirty="0"/>
           </a:p>
           <a:p>
             <a:pPr algn="l" indent="0" marL="0">
@@ -11518,8 +13411,17 @@
               </a:lnSpc>
               <a:buNone/>
             </a:pPr>
-            <a:r>
-              <a:rPr lang="en-US" sz="1200" dirty="0">
+            <a:endParaRPr lang="en-US" sz="1050" dirty="0"/>
+          </a:p>
+          <a:p>
+            <a:pPr algn="l" indent="0" marL="0">
+              <a:lnSpc>
+                <a:spcPct val="132000"/>
+              </a:lnSpc>
+              <a:buNone/>
+            </a:pPr>
+            <a:r>
+              <a:rPr lang="en-US" sz="1050" dirty="0">
                 <a:solidFill>
                   <a:srgbClr val="E8EEF4"/>
                 </a:solidFill>
@@ -11527,173 +13429,15 @@
                 <a:ea typeface="Arial" pitchFamily="34" charset="-122"/>
                 <a:cs typeface="Arial" pitchFamily="34" charset="-120"/>
               </a:rPr>
-              <a:t>w/o CMF　　　　 −0.0056</a:t>
-            </a:r>
-            <a:endParaRPr lang="en-US" sz="1200" dirty="0"/>
-          </a:p>
-          <a:p>
-            <a:pPr algn="l" indent="0" marL="0">
-              <a:lnSpc>
-                <a:spcPct val="132000"/>
-              </a:lnSpc>
-              <a:buNone/>
-            </a:pPr>
-            <a:r>
-              <a:rPr lang="en-US" sz="1200" dirty="0">
-                <a:solidFill>
-                  <a:srgbClr val="E8EEF4"/>
-                </a:solidFill>
-                <a:latin typeface="Arial" pitchFamily="34" charset="0"/>
-                <a:ea typeface="Arial" pitchFamily="34" charset="-122"/>
-                <a:cs typeface="Arial" pitchFamily="34" charset="-120"/>
-              </a:rPr>
-              <a:t>w/o CNN(深度)　−0.0042</a:t>
-            </a:r>
-            <a:endParaRPr lang="en-US" sz="1200" dirty="0"/>
-          </a:p>
-        </p:txBody>
-      </p:sp>
-      <p:sp>
-        <p:nvSpPr>
-          <p:cNvPr id="11" name="Shape 8"/>
-          <p:cNvSpPr/>
-          <p:nvPr/>
-        </p:nvSpPr>
-        <p:spPr>
-          <a:xfrm>
-            <a:off x="7589520" y="4169664"/>
-            <a:ext cx="4041648" cy="1481328"/>
-          </a:xfrm>
-          <a:prstGeom prst="roundRect">
-            <a:avLst>
-              <a:gd name="adj" fmla="val 3704"/>
-            </a:avLst>
-          </a:prstGeom>
-          <a:solidFill>
-            <a:srgbClr val="151E27"/>
-          </a:solidFill>
-          <a:ln w="12700">
-            <a:solidFill>
-              <a:srgbClr val="1B2531"/>
-            </a:solidFill>
-            <a:prstDash val="solid"/>
-          </a:ln>
-          <a:effectLst>
-            <a:outerShdw sx="100000" sy="100000" kx="0" ky="0" algn="bl" rotWithShape="0" blurRad="152400" dist="38100" dir="5400000">
-              <a:srgbClr val="000000">
-                <a:alpha val="35000"/>
-              </a:srgbClr>
-            </a:outerShdw>
-          </a:effectLst>
-        </p:spPr>
-      </p:sp>
-      <p:sp>
-        <p:nvSpPr>
-          <p:cNvPr id="12" name="Text 9"/>
-          <p:cNvSpPr txBox="1"/>
-          <p:nvPr/>
-        </p:nvSpPr>
-        <p:spPr>
-          <a:xfrm>
-            <a:off x="7790688" y="4315968"/>
-            <a:ext cx="3639312" cy="219456"/>
-          </a:xfrm>
-          <a:prstGeom prst="rect">
-            <a:avLst/>
-          </a:prstGeom>
-          <a:noFill/>
-          <a:ln/>
-        </p:spPr>
-        <p:txBody>
-          <a:bodyPr wrap="square" lIns="0" tIns="0" rIns="0" bIns="0" rtlCol="0" anchor="t"/>
-          <a:lstStyle/>
-          <a:p>
-            <a:pPr algn="l" indent="0" marL="0">
-              <a:lnSpc>
-                <a:spcPct val="115000"/>
-              </a:lnSpc>
-              <a:buNone/>
-            </a:pPr>
-            <a:r>
-              <a:rPr lang="en-US" sz="1100" b="1" spc="60" kern="0" dirty="0">
-                <a:solidFill>
-                  <a:srgbClr val="F5C542"/>
-                </a:solidFill>
-                <a:latin typeface="Arial" pitchFamily="34" charset="0"/>
-                <a:ea typeface="Arial" pitchFamily="34" charset="-122"/>
-                <a:cs typeface="Arial" pitchFamily="34" charset="-120"/>
-              </a:rPr>
-              <a:t>为什么深度几乎无效</a:t>
-            </a:r>
-            <a:endParaRPr lang="en-US" sz="1100" dirty="0"/>
-          </a:p>
-        </p:txBody>
-      </p:sp>
-      <p:sp>
-        <p:nvSpPr>
-          <p:cNvPr id="13" name="Text 10"/>
-          <p:cNvSpPr txBox="1"/>
-          <p:nvPr/>
-        </p:nvSpPr>
-        <p:spPr>
-          <a:xfrm>
-            <a:off x="7790688" y="4626864"/>
-            <a:ext cx="3639312" cy="822960"/>
-          </a:xfrm>
-          <a:prstGeom prst="rect">
-            <a:avLst/>
-          </a:prstGeom>
-          <a:noFill/>
-          <a:ln/>
-        </p:spPr>
-        <p:txBody>
-          <a:bodyPr wrap="square" lIns="0" tIns="0" rIns="0" bIns="0" rtlCol="0" anchor="t"/>
-          <a:lstStyle/>
-          <a:p>
-            <a:pPr algn="l" indent="0" marL="0">
-              <a:lnSpc>
-                <a:spcPct val="132000"/>
-              </a:lnSpc>
-              <a:buNone/>
-            </a:pPr>
-            <a:r>
-              <a:rPr lang="en-US" sz="1050" dirty="0">
-                <a:solidFill>
-                  <a:srgbClr val="E8EEF4"/>
-                </a:solidFill>
-                <a:latin typeface="Arial" pitchFamily="34" charset="0"/>
-                <a:ea typeface="Arial" pitchFamily="34" charset="-122"/>
-                <a:cs typeface="Arial" pitchFamily="34" charset="-120"/>
-              </a:rPr>
-              <a:t>16 位 TIFF 被 convert("L") 饱和成纯白，深度通道是常数；</a:t>
+              <a:t>要验证这部分模块的贡献，得用拉伸后的数据重训，这条列进了后续工作。</a:t>
             </a:r>
             <a:endParaRPr lang="en-US" sz="1050" dirty="0"/>
           </a:p>
-          <a:p>
-            <a:pPr algn="l" indent="0" marL="0">
-              <a:lnSpc>
-                <a:spcPct val="132000"/>
-              </a:lnSpc>
-              <a:buNone/>
-            </a:pPr>
-            <a:r>
-              <a:rPr lang="en-US" sz="1050" dirty="0">
-                <a:solidFill>
-                  <a:srgbClr val="E8EEF4"/>
-                </a:solidFill>
-                <a:latin typeface="Arial" pitchFamily="34" charset="0"/>
-                <a:ea typeface="Arial" pitchFamily="34" charset="-122"/>
-                <a:cs typeface="Arial" pitchFamily="34" charset="-120"/>
-              </a:rPr>
-              <a:t>换成 min-max 拉伸后掩膜 IoU 仍为 0.9916 → 现权重对深度不敏感，需重训才能验真。</a:t>
-            </a:r>
-            <a:endParaRPr lang="en-US" sz="1050" dirty="0"/>
-          </a:p>
-        </p:txBody>
-      </p:sp>
-      <p:sp>
-        <p:nvSpPr>
-          <p:cNvPr id="14" name="Text 11"/>
+        </p:txBody>
+      </p:sp>
+      <p:sp>
+        <p:nvSpPr>
+          <p:cNvPr id="28" name="Text 26"/>
           <p:cNvSpPr txBox="1"/>
           <p:nvPr/>
         </p:nvSpPr>
@@ -11909,7 +13653,7 @@
                 <a:ea typeface="Arial" pitchFamily="34" charset="-122"/>
                 <a:cs typeface="Arial" pitchFamily="34" charset="-120"/>
               </a:rPr>
-              <a:t>把模型变成系统</a:t>
+              <a:t>从模型到能演示的系统</a:t>
             </a:r>
             <a:endParaRPr lang="en-US" sz="3000" dirty="0"/>
           </a:p>
@@ -11951,7 +13695,7 @@
                 <a:ea typeface="Arial" pitchFamily="34" charset="-122"/>
                 <a:cs typeface="Arial" pitchFamily="34" charset="-120"/>
               </a:rPr>
-              <a:t>论文只评掩膜；课程实践要的是能按下按钮、能写报告、能追责的东西</a:t>
+              <a:t>论文只评掩膜，课堂演示需要能上传、能出报告、能批量跑</a:t>
             </a:r>
             <a:endParaRPr lang="en-US" sz="1250" dirty="0"/>
           </a:p>
@@ -11973,8 +13717,8 @@
         </p:blipFill>
         <p:spPr>
           <a:xfrm>
-            <a:off x="475488" y="1901952"/>
-            <a:ext cx="11240719" cy="914400"/>
+            <a:off x="457200" y="1792224"/>
+            <a:ext cx="8138160" cy="3684367"/>
           </a:xfrm>
           <a:prstGeom prst="rect">
             <a:avLst/>
@@ -11983,14 +13727,48 @@
       </p:pic>
       <p:sp>
         <p:nvSpPr>
-          <p:cNvPr id="8" name="Text 5"/>
+          <p:cNvPr id="8" name="Shape 5"/>
+          <p:cNvSpPr/>
+          <p:nvPr/>
+        </p:nvSpPr>
+        <p:spPr>
+          <a:xfrm>
+            <a:off x="8796528" y="1792224"/>
+            <a:ext cx="2834640" cy="3200400"/>
+          </a:xfrm>
+          <a:prstGeom prst="roundRect">
+            <a:avLst>
+              <a:gd name="adj" fmla="val 1935"/>
+            </a:avLst>
+          </a:prstGeom>
+          <a:solidFill>
+            <a:srgbClr val="151E27"/>
+          </a:solidFill>
+          <a:ln w="12700">
+            <a:solidFill>
+              <a:srgbClr val="1B2531"/>
+            </a:solidFill>
+            <a:prstDash val="solid"/>
+          </a:ln>
+          <a:effectLst>
+            <a:outerShdw sx="100000" sy="100000" kx="0" ky="0" algn="bl" rotWithShape="0" blurRad="152400" dist="38100" dir="5400000">
+              <a:srgbClr val="000000">
+                <a:alpha val="35000"/>
+              </a:srgbClr>
+            </a:outerShdw>
+          </a:effectLst>
+        </p:spPr>
+      </p:sp>
+      <p:sp>
+        <p:nvSpPr>
+          <p:cNvPr id="9" name="Text 6"/>
           <p:cNvSpPr txBox="1"/>
           <p:nvPr/>
         </p:nvSpPr>
         <p:spPr>
           <a:xfrm>
-            <a:off x="566928" y="5797296"/>
-            <a:ext cx="8412480" cy="274320"/>
+            <a:off x="8997696" y="1938528"/>
+            <a:ext cx="2432304" cy="219456"/>
           </a:xfrm>
           <a:prstGeom prst="rect">
             <a:avLst/>
@@ -12009,30 +13787,30 @@
               <a:buNone/>
             </a:pPr>
             <a:r>
-              <a:rPr lang="en-US" sz="1150" dirty="0">
-                <a:solidFill>
-                  <a:srgbClr val="E8EEF4"/>
-                </a:solidFill>
-                <a:latin typeface="Arial" pitchFamily="34" charset="0"/>
-                <a:ea typeface="Arial" pitchFamily="34" charset="-122"/>
-                <a:cs typeface="Arial" pitchFamily="34" charset="-120"/>
-              </a:rPr>
-              <a:t>四层：数据 → 模型（分割 / 检测 / 分级）→ 服务（引擎 + 融合 + 容错）→ 展示（工作站 / CLI / 报告）</a:t>
-            </a:r>
-            <a:endParaRPr lang="en-US" sz="1150" dirty="0"/>
-          </a:p>
-        </p:txBody>
-      </p:sp>
-      <p:sp>
-        <p:nvSpPr>
-          <p:cNvPr id="9" name="Text 6"/>
+              <a:rPr lang="en-US" sz="1100" b="1" spc="60" kern="0" dirty="0">
+                <a:solidFill>
+                  <a:srgbClr val="F5C542"/>
+                </a:solidFill>
+                <a:latin typeface="Arial" pitchFamily="34" charset="0"/>
+                <a:ea typeface="Arial" pitchFamily="34" charset="-122"/>
+                <a:cs typeface="Arial" pitchFamily="34" charset="-120"/>
+              </a:rPr>
+              <a:t>四层各管什么</a:t>
+            </a:r>
+            <a:endParaRPr lang="en-US" sz="1100" dirty="0"/>
+          </a:p>
+        </p:txBody>
+      </p:sp>
+      <p:sp>
+        <p:nvSpPr>
+          <p:cNvPr id="10" name="Text 7"/>
           <p:cNvSpPr txBox="1"/>
           <p:nvPr/>
         </p:nvSpPr>
         <p:spPr>
           <a:xfrm>
-            <a:off x="566928" y="6062472"/>
-            <a:ext cx="8412480" cy="274320"/>
+            <a:off x="8997696" y="2249424"/>
+            <a:ext cx="2432304" cy="2542032"/>
           </a:xfrm>
           <a:prstGeom prst="rect">
             <a:avLst/>
@@ -12046,28 +13824,157 @@
           <a:p>
             <a:pPr algn="l" indent="0" marL="0">
               <a:lnSpc>
+                <a:spcPct val="132000"/>
+              </a:lnSpc>
+              <a:buNone/>
+            </a:pPr>
+            <a:r>
+              <a:rPr lang="en-US" sz="1050" dirty="0">
+                <a:solidFill>
+                  <a:srgbClr val="E8EEF4"/>
+                </a:solidFill>
+                <a:latin typeface="Arial" pitchFamily="34" charset="0"/>
+                <a:ea typeface="Arial" pitchFamily="34" charset="-122"/>
+                <a:cs typeface="Arial" pitchFamily="34" charset="-120"/>
+              </a:rPr>
+              <a:t>数据层 读取 RGB 与深度，做 EXIF 校正和归一化</a:t>
+            </a:r>
+            <a:endParaRPr lang="en-US" sz="1050" dirty="0"/>
+          </a:p>
+          <a:p>
+            <a:pPr algn="l" indent="0" marL="0">
+              <a:lnSpc>
+                <a:spcPct val="132000"/>
+              </a:lnSpc>
+              <a:buNone/>
+            </a:pPr>
+            <a:endParaRPr lang="en-US" sz="1050" dirty="0"/>
+          </a:p>
+          <a:p>
+            <a:pPr algn="l" indent="0" marL="0">
+              <a:lnSpc>
+                <a:spcPct val="132000"/>
+              </a:lnSpc>
+              <a:buNone/>
+            </a:pPr>
+            <a:r>
+              <a:rPr lang="en-US" sz="1050" dirty="0">
+                <a:solidFill>
+                  <a:srgbClr val="E8EEF4"/>
+                </a:solidFill>
+                <a:latin typeface="Arial" pitchFamily="34" charset="0"/>
+                <a:ea typeface="Arial" pitchFamily="34" charset="-122"/>
+                <a:cs typeface="Arial" pitchFamily="34" charset="-120"/>
+              </a:rPr>
+              <a:t>模型层 分割、检测、分级三个引擎</a:t>
+            </a:r>
+            <a:endParaRPr lang="en-US" sz="1050" dirty="0"/>
+          </a:p>
+          <a:p>
+            <a:pPr algn="l" indent="0" marL="0">
+              <a:lnSpc>
+                <a:spcPct val="132000"/>
+              </a:lnSpc>
+              <a:buNone/>
+            </a:pPr>
+            <a:endParaRPr lang="en-US" sz="1050" dirty="0"/>
+          </a:p>
+          <a:p>
+            <a:pPr algn="l" indent="0" marL="0">
+              <a:lnSpc>
+                <a:spcPct val="132000"/>
+              </a:lnSpc>
+              <a:buNone/>
+            </a:pPr>
+            <a:r>
+              <a:rPr lang="en-US" sz="1050" dirty="0">
+                <a:solidFill>
+                  <a:srgbClr val="E8EEF4"/>
+                </a:solidFill>
+                <a:latin typeface="Arial" pitchFamily="34" charset="0"/>
+                <a:ea typeface="Arial" pitchFamily="34" charset="-122"/>
+                <a:cs typeface="Arial" pitchFamily="34" charset="-120"/>
+              </a:rPr>
+              <a:t>服务层 调度、结果融合、异常兜底</a:t>
+            </a:r>
+            <a:endParaRPr lang="en-US" sz="1050" dirty="0"/>
+          </a:p>
+          <a:p>
+            <a:pPr algn="l" indent="0" marL="0">
+              <a:lnSpc>
+                <a:spcPct val="132000"/>
+              </a:lnSpc>
+              <a:buNone/>
+            </a:pPr>
+            <a:endParaRPr lang="en-US" sz="1050" dirty="0"/>
+          </a:p>
+          <a:p>
+            <a:pPr algn="l" indent="0" marL="0">
+              <a:lnSpc>
+                <a:spcPct val="132000"/>
+              </a:lnSpc>
+              <a:buNone/>
+            </a:pPr>
+            <a:r>
+              <a:rPr lang="en-US" sz="1050" dirty="0">
+                <a:solidFill>
+                  <a:srgbClr val="E8EEF4"/>
+                </a:solidFill>
+                <a:latin typeface="Arial" pitchFamily="34" charset="0"/>
+                <a:ea typeface="Arial" pitchFamily="34" charset="-122"/>
+                <a:cs typeface="Arial" pitchFamily="34" charset="-120"/>
+              </a:rPr>
+              <a:t>展示层 工作站界面、命令行、报告</a:t>
+            </a:r>
+            <a:endParaRPr lang="en-US" sz="1050" dirty="0"/>
+          </a:p>
+        </p:txBody>
+      </p:sp>
+      <p:sp>
+        <p:nvSpPr>
+          <p:cNvPr id="11" name="Text 8"/>
+          <p:cNvSpPr txBox="1"/>
+          <p:nvPr/>
+        </p:nvSpPr>
+        <p:spPr>
+          <a:xfrm>
+            <a:off x="566928" y="5614416"/>
+            <a:ext cx="10881360" cy="274320"/>
+          </a:xfrm>
+          <a:prstGeom prst="rect">
+            <a:avLst/>
+          </a:prstGeom>
+          <a:noFill/>
+          <a:ln/>
+        </p:spPr>
+        <p:txBody>
+          <a:bodyPr wrap="square" lIns="0" tIns="0" rIns="0" bIns="0" rtlCol="0" anchor="t"/>
+          <a:lstStyle/>
+          <a:p>
+            <a:pPr algn="l" indent="0" marL="0">
+              <a:lnSpc>
                 <a:spcPct val="115000"/>
               </a:lnSpc>
               <a:buNone/>
             </a:pPr>
             <a:r>
-              <a:rPr lang="en-US" sz="1050" dirty="0">
-                <a:solidFill>
-                  <a:srgbClr val="8695A4"/>
-                </a:solidFill>
-                <a:latin typeface="Arial" pitchFamily="34" charset="0"/>
-                <a:ea typeface="Arial" pitchFamily="34" charset="-122"/>
-                <a:cs typeface="Arial" pitchFamily="34" charset="-120"/>
-              </a:rPr>
-              <a:t>接口只定义一次：InspectionReport.as_dict() 同时喂给 UI、CSV 与评测脚本</a:t>
-            </a:r>
-            <a:endParaRPr lang="en-US" sz="1050" dirty="0"/>
-          </a:p>
-        </p:txBody>
-      </p:sp>
-      <p:sp>
-        <p:nvSpPr>
-          <p:cNvPr id="10" name="Text 7"/>
+              <a:rPr lang="en-US" sz="1150" dirty="0">
+                <a:solidFill>
+                  <a:srgbClr val="E8EEF4"/>
+                </a:solidFill>
+                <a:latin typeface="Arial" pitchFamily="34" charset="0"/>
+                <a:ea typeface="Arial" pitchFamily="34" charset="-122"/>
+                <a:cs typeface="Arial" pitchFamily="34" charset="-120"/>
+              </a:rPr>
+              <a:t>接口只定义一次，InspectionReport.as_dict() 同时喂给界面、CSV 和评测脚本。</a:t>
+            </a:r>
+            <a:endParaRPr lang="en-US" sz="1150" dirty="0"/>
+          </a:p>
+        </p:txBody>
+      </p:sp>
+      <p:sp>
+        <p:nvSpPr>
+          <p:cNvPr id="12" name="Text 9"/>
           <p:cNvSpPr txBox="1"/>
           <p:nvPr/>
         </p:nvSpPr>
@@ -12101,7 +14008,7 @@
                 <a:ea typeface="Arial" pitchFamily="34" charset="-122"/>
                 <a:cs typeface="Arial" pitchFamily="34" charset="-120"/>
               </a:rPr>
-              <a:t>图为 tools/make_diagrams.py 生成的 drawio 源文件导出，可编辑</a:t>
+              <a:t>图为 tools/make_diagrams.py 生成的 drawio 源文件导出，可以继续编辑；每条连线上都标了真实数据形状</a:t>
             </a:r>
             <a:endParaRPr lang="en-US" sz="900" dirty="0"/>
           </a:p>
@@ -12283,7 +14190,7 @@
                 <a:ea typeface="Arial" pitchFamily="34" charset="-122"/>
                 <a:cs typeface="Arial" pitchFamily="34" charset="-120"/>
               </a:rPr>
-              <a:t>两条分支，一个报告</a:t>
+              <a:t>单图流水线怎么走</a:t>
             </a:r>
             <a:endParaRPr lang="en-US" sz="3000" dirty="0"/>
           </a:p>
@@ -12325,7 +14232,7 @@
                 <a:ea typeface="Arial" pitchFamily="34" charset="-122"/>
                 <a:cs typeface="Arial" pitchFamily="34" charset="-120"/>
               </a:rPr>
-              <a:t>串行 P50 60.9 ms；阈值滑块改变的不只是图，而是下游每一个数字</a:t>
+              <a:t>全量 362 张串行跑下来 P50 是 60.9 ms，其中分割 40.2 ms、检测 11.3 ms</a:t>
             </a:r>
             <a:endParaRPr lang="en-US" sz="1250" dirty="0"/>
           </a:p>
@@ -12347,8 +14254,8 @@
         </p:blipFill>
         <p:spPr>
           <a:xfrm>
-            <a:off x="292608" y="1920240"/>
-            <a:ext cx="11606479" cy="914400"/>
+            <a:off x="246888" y="1810512"/>
+            <a:ext cx="11475720" cy="4047799"/>
           </a:xfrm>
           <a:prstGeom prst="rect">
             <a:avLst/>
@@ -12357,37 +14264,45 @@
       </p:pic>
       <p:sp>
         <p:nvSpPr>
-          <p:cNvPr id="8" name="Shape 5"/>
-          <p:cNvSpPr/>
-          <p:nvPr/>
-        </p:nvSpPr>
-        <p:spPr>
-          <a:xfrm>
-            <a:off x="566928" y="4224528"/>
-            <a:ext cx="11057839" cy="1298448"/>
-          </a:xfrm>
-          <a:prstGeom prst="roundRect">
-            <a:avLst>
-              <a:gd name="adj" fmla="val 4225"/>
-            </a:avLst>
-          </a:prstGeom>
-          <a:solidFill>
-            <a:srgbClr val="151E27"/>
-          </a:solidFill>
-          <a:ln w="12700">
-            <a:solidFill>
-              <a:srgbClr val="1B2531"/>
-            </a:solidFill>
-            <a:prstDash val="solid"/>
-          </a:ln>
-          <a:effectLst>
-            <a:outerShdw sx="100000" sy="100000" kx="0" ky="0" algn="bl" rotWithShape="0" blurRad="152400" dist="38100" dir="5400000">
-              <a:srgbClr val="000000">
-                <a:alpha val="35000"/>
-              </a:srgbClr>
-            </a:outerShdw>
-          </a:effectLst>
-        </p:spPr>
+          <p:cNvPr id="8" name="Text 5"/>
+          <p:cNvSpPr txBox="1"/>
+          <p:nvPr/>
+        </p:nvSpPr>
+        <p:spPr>
+          <a:xfrm>
+            <a:off x="566928" y="5907024"/>
+            <a:ext cx="10881360" cy="274320"/>
+          </a:xfrm>
+          <a:prstGeom prst="rect">
+            <a:avLst/>
+          </a:prstGeom>
+          <a:noFill/>
+          <a:ln/>
+        </p:spPr>
+        <p:txBody>
+          <a:bodyPr wrap="square" lIns="0" tIns="0" rIns="0" bIns="0" rtlCol="0" anchor="t"/>
+          <a:lstStyle/>
+          <a:p>
+            <a:pPr algn="l" indent="0" marL="0">
+              <a:lnSpc>
+                <a:spcPct val="115000"/>
+              </a:lnSpc>
+              <a:buNone/>
+            </a:pPr>
+            <a:r>
+              <a:rPr lang="en-US" sz="1150" dirty="0">
+                <a:solidFill>
+                  <a:srgbClr val="E8EEF4"/>
+                </a:solidFill>
+                <a:latin typeface="Arial" pitchFamily="34" charset="0"/>
+                <a:ea typeface="Arial" pitchFamily="34" charset="-122"/>
+                <a:cs typeface="Arial" pitchFamily="34" charset="-120"/>
+              </a:rPr>
+              <a:t>两个阈值的实际取值是 26 和 55，图像级判定取最严重的那一块区域。</a:t>
+            </a:r>
+            <a:endParaRPr lang="en-US" sz="1150" dirty="0"/>
+          </a:p>
+        </p:txBody>
       </p:sp>
       <p:sp>
         <p:nvSpPr>
@@ -12397,8 +14312,8 @@
         </p:nvSpPr>
         <p:spPr>
           <a:xfrm>
-            <a:off x="768096" y="4370832"/>
-            <a:ext cx="10655503" cy="219456"/>
+            <a:off x="566928" y="6355080"/>
+            <a:ext cx="11057839" cy="219456"/>
           </a:xfrm>
           <a:prstGeom prst="rect">
             <a:avLst/>
@@ -12417,110 +14332,6 @@
               <a:buNone/>
             </a:pPr>
             <a:r>
-              <a:rPr lang="en-US" sz="1100" b="1" spc="60" kern="0" dirty="0">
-                <a:solidFill>
-                  <a:srgbClr val="F5C542"/>
-                </a:solidFill>
-                <a:latin typeface="Arial" pitchFamily="34" charset="0"/>
-                <a:ea typeface="Arial" pitchFamily="34" charset="-122"/>
-                <a:cs typeface="Arial" pitchFamily="34" charset="-120"/>
-              </a:rPr>
-              <a:t>分级规则（唯一事实来源：app/engines/severity.py）</a:t>
-            </a:r>
-            <a:endParaRPr lang="en-US" sz="1100" dirty="0"/>
-          </a:p>
-        </p:txBody>
-      </p:sp>
-      <p:sp>
-        <p:nvSpPr>
-          <p:cNvPr id="10" name="Text 7"/>
-          <p:cNvSpPr txBox="1"/>
-          <p:nvPr/>
-        </p:nvSpPr>
-        <p:spPr>
-          <a:xfrm>
-            <a:off x="768096" y="4681728"/>
-            <a:ext cx="10655503" cy="640080"/>
-          </a:xfrm>
-          <a:prstGeom prst="rect">
-            <a:avLst/>
-          </a:prstGeom>
-          <a:noFill/>
-          <a:ln/>
-        </p:spPr>
-        <p:txBody>
-          <a:bodyPr wrap="square" lIns="0" tIns="0" rIns="0" bIns="0" rtlCol="0" anchor="t"/>
-          <a:lstStyle/>
-          <a:p>
-            <a:pPr algn="l" indent="0" marL="0">
-              <a:lnSpc>
-                <a:spcPct val="132000"/>
-              </a:lnSpc>
-              <a:buNone/>
-            </a:pPr>
-            <a:r>
-              <a:rPr lang="en-US" sz="1250" dirty="0">
-                <a:solidFill>
-                  <a:srgbClr val="E8EEF4"/>
-                </a:solidFill>
-                <a:latin typeface="Arial" pitchFamily="34" charset="0"/>
-                <a:ea typeface="Arial" pitchFamily="34" charset="-122"/>
-                <a:cs typeface="Arial" pitchFamily="34" charset="-120"/>
-              </a:rPr>
-              <a:t>score = 100 · min(1, area / 0.55) · (1 + 0.18 · min(1, (elong − 1) / 6)) · (0.75 + 0.25 · conf)</a:t>
-            </a:r>
-            <a:endParaRPr lang="en-US" sz="1250" dirty="0"/>
-          </a:p>
-          <a:p>
-            <a:pPr algn="l" indent="0" marL="0">
-              <a:lnSpc>
-                <a:spcPct val="132000"/>
-              </a:lnSpc>
-              <a:buNone/>
-            </a:pPr>
-            <a:r>
-              <a:rPr lang="en-US" sz="1250" dirty="0">
-                <a:solidFill>
-                  <a:srgbClr val="E8EEF4"/>
-                </a:solidFill>
-                <a:latin typeface="Arial" pitchFamily="34" charset="0"/>
-                <a:ea typeface="Arial" pitchFamily="34" charset="-122"/>
-                <a:cs typeface="Arial" pitchFamily="34" charset="-120"/>
-              </a:rPr>
-              <a:t>light  &lt;  26  ≤  medium  &lt;  55  ≤  severe　　图像级判定取最严重区域</a:t>
-            </a:r>
-            <a:endParaRPr lang="en-US" sz="1250" dirty="0"/>
-          </a:p>
-        </p:txBody>
-      </p:sp>
-      <p:sp>
-        <p:nvSpPr>
-          <p:cNvPr id="11" name="Text 8"/>
-          <p:cNvSpPr txBox="1"/>
-          <p:nvPr/>
-        </p:nvSpPr>
-        <p:spPr>
-          <a:xfrm>
-            <a:off x="566928" y="6355080"/>
-            <a:ext cx="11057839" cy="219456"/>
-          </a:xfrm>
-          <a:prstGeom prst="rect">
-            <a:avLst/>
-          </a:prstGeom>
-          <a:noFill/>
-          <a:ln/>
-        </p:spPr>
-        <p:txBody>
-          <a:bodyPr wrap="square" lIns="0" tIns="0" rIns="0" bIns="0" rtlCol="0" anchor="t"/>
-          <a:lstStyle/>
-          <a:p>
-            <a:pPr algn="l" indent="0" marL="0">
-              <a:lnSpc>
-                <a:spcPct val="115000"/>
-              </a:lnSpc>
-              <a:buNone/>
-            </a:pPr>
-            <a:r>
               <a:rPr lang="en-US" sz="900" dirty="0">
                 <a:solidFill>
                   <a:srgbClr val="5A6875"/>
@@ -12529,7 +14340,7 @@
                 <a:ea typeface="Arial" pitchFamily="34" charset="-122"/>
                 <a:cs typeface="Arial" pitchFamily="34" charset="-120"/>
               </a:rPr>
-              <a:t>改阈值只需要动一行常量；UI、CSV、评测报告同步变化，不会出现口径漂移</a:t>
+              <a:t>图为 tools/make_diagrams.py 生成，底部虚线框里是分级公式和阈值；改常量后界面、CSV 与评测脚本一起变，不会各说各话</a:t>
             </a:r>
             <a:endParaRPr lang="en-US" sz="900" dirty="0"/>
           </a:p>
@@ -12711,7 +14522,7 @@
                 <a:ea typeface="Arial" pitchFamily="34" charset="-122"/>
                 <a:cs typeface="Arial" pitchFamily="34" charset="-120"/>
               </a:rPr>
-              <a:t>先量数据，再定阈值</a:t>
+              <a:t>分级阈值是量出来的</a:t>
             </a:r>
             <a:endParaRPr lang="en-US" sz="3000" dirty="0"/>
           </a:p>
@@ -12753,7 +14564,7 @@
                 <a:ea typeface="Arial" pitchFamily="34" charset="-122"/>
                 <a:cs typeface="Arial" pitchFamily="34" charset="-120"/>
               </a:rPr>
-              <a:t>数据集只有二值掩膜、没有严重度标注，所以分级是规则不是模型——但阈值必须由数据决定</a:t>
+              <a:t>数据集只有二值掩膜，没有严重度标注，分级只能做成规则。可阈值不能凭感觉定</a:t>
             </a:r>
             <a:endParaRPr lang="en-US" sz="1250" dirty="0"/>
           </a:p>
@@ -12775,8 +14586,8 @@
         </p:blipFill>
         <p:spPr>
           <a:xfrm>
-            <a:off x="521208" y="1975104"/>
-            <a:ext cx="6766560" cy="914400"/>
+            <a:off x="521208" y="1920240"/>
+            <a:ext cx="7223760" cy="2302617"/>
           </a:xfrm>
           <a:prstGeom prst="rect">
             <a:avLst/>
@@ -12791,12 +14602,12 @@
         </p:nvSpPr>
         <p:spPr>
           <a:xfrm>
-            <a:off x="7534656" y="1975104"/>
-            <a:ext cx="4114800" cy="1993392"/>
+            <a:off x="7863840" y="1920240"/>
+            <a:ext cx="3749040" cy="2212848"/>
           </a:xfrm>
           <a:prstGeom prst="roundRect">
             <a:avLst>
-              <a:gd name="adj" fmla="val 2752"/>
+              <a:gd name="adj" fmla="val 2479"/>
             </a:avLst>
           </a:prstGeom>
           <a:solidFill>
@@ -12825,8 +14636,8 @@
         </p:nvSpPr>
         <p:spPr>
           <a:xfrm>
-            <a:off x="7735824" y="2121408"/>
-            <a:ext cx="3712464" cy="219456"/>
+            <a:off x="8065008" y="2066544"/>
+            <a:ext cx="3346704" cy="219456"/>
           </a:xfrm>
           <a:prstGeom prst="rect">
             <a:avLst/>
@@ -12853,7 +14664,7 @@
                 <a:ea typeface="Arial" pitchFamily="34" charset="-122"/>
                 <a:cs typeface="Arial" pitchFamily="34" charset="-120"/>
               </a:rPr>
-              <a:t>初版踩的坑</a:t>
+              <a:t>第一版定错了</a:t>
             </a:r>
             <a:endParaRPr lang="en-US" sz="1100" dirty="0"/>
           </a:p>
@@ -12867,8 +14678,8 @@
         </p:nvSpPr>
         <p:spPr>
           <a:xfrm>
-            <a:off x="7735824" y="2432304"/>
-            <a:ext cx="3712464" cy="1335024"/>
+            <a:off x="8065008" y="2377440"/>
+            <a:ext cx="3346704" cy="1554480"/>
           </a:xfrm>
           <a:prstGeom prst="rect">
             <a:avLst/>
@@ -12895,7 +14706,7 @@
                 <a:ea typeface="Arial" pitchFamily="34" charset="-122"/>
                 <a:cs typeface="Arial" pitchFamily="34" charset="-120"/>
               </a:rPr>
-              <a:t>AREA_REFERENCE = 0.12 + sqrt</a:t>
+              <a:t>AREA_REFERENCE = 0.12 还带 sqrt，抽 40 张跑下来 40 张全判严重，三档退化成一档。</a:t>
             </a:r>
             <a:endParaRPr lang="en-US" sz="1150" dirty="0"/>
           </a:p>
@@ -12915,56 +14726,7 @@
                 <a:ea typeface="Arial" pitchFamily="34" charset="-122"/>
                 <a:cs typeface="Arial" pitchFamily="34" charset="-120"/>
               </a:rPr>
-              <a:t>→ 40 张里 40 张全判 severe</a:t>
-            </a:r>
-            <a:endParaRPr lang="en-US" sz="1150" dirty="0"/>
-          </a:p>
-          <a:p>
-            <a:pPr algn="l" indent="0" marL="0">
-              <a:lnSpc>
-                <a:spcPct val="132000"/>
-              </a:lnSpc>
-              <a:buNone/>
-            </a:pPr>
-            <a:r>
-              <a:rPr lang="en-US" sz="1150" dirty="0">
-                <a:solidFill>
-                  <a:srgbClr val="E8EEF4"/>
-                </a:solidFill>
-                <a:latin typeface="Arial" pitchFamily="34" charset="0"/>
-                <a:ea typeface="Arial" pitchFamily="34" charset="-122"/>
-                <a:cs typeface="Arial" pitchFamily="34" charset="-120"/>
-              </a:rPr>
-              <a:t>（三档退化成一档，无法用于决策）</a:t>
-            </a:r>
-            <a:endParaRPr lang="en-US" sz="1150" dirty="0"/>
-          </a:p>
-          <a:p>
-            <a:pPr algn="l" indent="0" marL="0">
-              <a:lnSpc>
-                <a:spcPct val="132000"/>
-              </a:lnSpc>
-              <a:buNone/>
-            </a:pPr>
-            <a:endParaRPr lang="en-US" sz="1150" dirty="0"/>
-          </a:p>
-          <a:p>
-            <a:pPr algn="l" indent="0" marL="0">
-              <a:lnSpc>
-                <a:spcPct val="132000"/>
-              </a:lnSpc>
-              <a:buNone/>
-            </a:pPr>
-            <a:r>
-              <a:rPr lang="en-US" sz="1150" dirty="0">
-                <a:solidFill>
-                  <a:srgbClr val="E8EEF4"/>
-                </a:solidFill>
-                <a:latin typeface="Arial" pitchFamily="34" charset="0"/>
-                <a:ea typeface="Arial" pitchFamily="34" charset="-122"/>
-                <a:cs typeface="Arial" pitchFamily="34" charset="-120"/>
-              </a:rPr>
-              <a:t>真值面积分位：p50 0.25 / p90 0.52</a:t>
+              <a:t>真值面积的分位数是 p50 0.25、p90 0.52。</a:t>
             </a:r>
             <a:endParaRPr lang="en-US" sz="1150" dirty="0"/>
           </a:p>
@@ -12978,12 +14740,12 @@
         </p:nvSpPr>
         <p:spPr>
           <a:xfrm>
-            <a:off x="7534656" y="4114800"/>
-            <a:ext cx="4114800" cy="1225296"/>
+            <a:off x="7863840" y="4315968"/>
+            <a:ext cx="3749040" cy="1280160"/>
           </a:xfrm>
           <a:prstGeom prst="roundRect">
             <a:avLst>
-              <a:gd name="adj" fmla="val 4478"/>
+              <a:gd name="adj" fmla="val 4286"/>
             </a:avLst>
           </a:prstGeom>
           <a:solidFill>
@@ -13012,8 +14774,8 @@
         </p:nvSpPr>
         <p:spPr>
           <a:xfrm>
-            <a:off x="7735824" y="4261104"/>
-            <a:ext cx="3712464" cy="219456"/>
+            <a:off x="8065008" y="4462272"/>
+            <a:ext cx="3346704" cy="219456"/>
           </a:xfrm>
           <a:prstGeom prst="rect">
             <a:avLst/>
@@ -13040,7 +14802,7 @@
                 <a:ea typeface="Arial" pitchFamily="34" charset="-122"/>
                 <a:cs typeface="Arial" pitchFamily="34" charset="-120"/>
               </a:rPr>
-              <a:t>标定后（全量 362 张）</a:t>
+              <a:t>重新标定后（全量 362 张）</a:t>
             </a:r>
             <a:endParaRPr lang="en-US" sz="1100" dirty="0"/>
           </a:p>
@@ -13054,8 +14816,8 @@
         </p:nvSpPr>
         <p:spPr>
           <a:xfrm>
-            <a:off x="7735824" y="4572000"/>
-            <a:ext cx="3712464" cy="566928"/>
+            <a:off x="8065008" y="4773168"/>
+            <a:ext cx="3346704" cy="621792"/>
           </a:xfrm>
           <a:prstGeom prst="rect">
             <a:avLst/>
@@ -13082,7 +14844,7 @@
                 <a:ea typeface="Arial" pitchFamily="34" charset="-122"/>
                 <a:cs typeface="Arial" pitchFamily="34" charset="-120"/>
               </a:rPr>
-              <a:t>light 102 / medium 120 / severe 140　三档均衡</a:t>
+              <a:t>轻微 102 / 中等 120 / 严重 140，三档比例接近</a:t>
             </a:r>
             <a:endParaRPr lang="en-US" sz="1200" dirty="0"/>
           </a:p>
@@ -13096,8 +14858,8 @@
         </p:nvSpPr>
         <p:spPr>
           <a:xfrm>
-            <a:off x="566928" y="5486400"/>
-            <a:ext cx="6766560" cy="457200"/>
+            <a:off x="566928" y="4443984"/>
+            <a:ext cx="7040880" cy="640080"/>
           </a:xfrm>
           <a:prstGeom prst="rect">
             <a:avLst/>
@@ -13111,12 +14873,12 @@
           <a:p>
             <a:pPr algn="l" indent="0" marL="0">
               <a:lnSpc>
-                <a:spcPct val="130000"/>
-              </a:lnSpc>
-              <a:buNone/>
-            </a:pPr>
-            <a:r>
-              <a:rPr lang="en-US" sz="1050" dirty="0">
+                <a:spcPct val="135000"/>
+              </a:lnSpc>
+              <a:buNone/>
+            </a:pPr>
+            <a:r>
+              <a:rPr lang="en-US" sz="1100" dirty="0">
                 <a:solidFill>
                   <a:srgbClr val="8695A4"/>
                 </a:solidFill>
@@ -13124,9 +14886,9 @@
                 <a:ea typeface="Arial" pitchFamily="34" charset="-122"/>
                 <a:cs typeface="Arial" pitchFamily="34" charset="-120"/>
               </a:rPr>
-              <a:t>改为 AREA_REFERENCE = 0.55（≈ p93）+ 去掉 sqrt，并做全量复测——抽样验证曾给出错误结论。</a:t>
-            </a:r>
-            <a:endParaRPr lang="en-US" sz="1050" dirty="0"/>
+              <a:t>参考值改成 0.55，约等于真值面积的 p93，同时去掉 sqrt。第一次只抽 40 张就下结论，全量复测才看出来。</a:t>
+            </a:r>
+            <a:endParaRPr lang="en-US" sz="1100" dirty="0"/>
           </a:p>
         </p:txBody>
       </p:sp>
@@ -13348,7 +15110,7 @@
                 <a:ea typeface="Arial" pitchFamily="34" charset="-122"/>
                 <a:cs typeface="Arial" pitchFamily="34" charset="-120"/>
               </a:rPr>
-              <a:t>数字、口径，和一条反例</a:t>
+              <a:t>362 张测试图的实测数据</a:t>
             </a:r>
             <a:endParaRPr lang="en-US" sz="3000" dirty="0"/>
           </a:p>
@@ -13390,7 +15152,7 @@
                 <a:ea typeface="Arial" pitchFamily="34" charset="-122"/>
                 <a:cs typeface="Arial" pitchFamily="34" charset="-120"/>
               </a:rPr>
-              <a:t>全量 362 张 + 批量 100 张；下表每个数都能用一条命令重跑</a:t>
+              <a:t>下表每个数字都能用一条命令重跑，口径写在第三列</a:t>
             </a:r>
             <a:endParaRPr lang="en-US" sz="1250" dirty="0"/>
           </a:p>
@@ -13412,16 +15174,16 @@
         </p:nvGraphicFramePr>
         <p:xfrm>
           <a:off x="566928" y="1993392"/>
-          <a:ext cx="6492240" cy="914400"/>
+          <a:ext cx="6675120" cy="914400"/>
         </p:xfrm>
         <a:graphic>
           <a:graphicData uri="http://schemas.openxmlformats.org/drawingml/2006/table">
             <a:tbl>
               <a:tblPr/>
               <a:tblGrid>
-                <a:gridCol w="2103120"/>
-                <a:gridCol w="2011680"/>
-                <a:gridCol w="2377440"/>
+                <a:gridCol w="2194560"/>
+                <a:gridCol w="2286000"/>
+                <a:gridCol w="2194560"/>
               </a:tblGrid>
               <a:tr h="329184">
                 <a:tc>
@@ -14539,7 +16301,7 @@
                           <a:ea typeface="Arial" pitchFamily="34" charset="-122"/>
                           <a:cs typeface="Arial" pitchFamily="34" charset="-120"/>
                         </a:rPr>
-                        <a:t>100 / 0 失败</a:t>
+                        <a:t>100 成功 / 0 失败</a:t>
                       </a:r>
                       <a:endParaRPr lang="en-US" sz="1150" dirty="0">
                         <a:latin typeface="Arial" charset="0"/>
@@ -15084,7 +16846,7 @@
         <p:spPr>
           <a:xfrm>
             <a:off x="566928" y="1993392"/>
-            <a:ext cx="6492240" cy="329184"/>
+            <a:ext cx="6675120" cy="329184"/>
           </a:xfrm>
           <a:prstGeom prst="rect">
             <a:avLst/>
@@ -15109,7 +16871,7 @@
         <p:spPr>
           <a:xfrm>
             <a:off x="621792" y="1993392"/>
-            <a:ext cx="1993392" cy="329184"/>
+            <a:ext cx="2084832" cy="329184"/>
           </a:xfrm>
           <a:prstGeom prst="rect">
             <a:avLst/>
@@ -15150,8 +16912,8 @@
         </p:nvSpPr>
         <p:spPr>
           <a:xfrm>
-            <a:off x="2724912" y="1993392"/>
-            <a:ext cx="1901952" cy="329184"/>
+            <a:off x="2816352" y="1993392"/>
+            <a:ext cx="2176272" cy="329184"/>
           </a:xfrm>
           <a:prstGeom prst="rect">
             <a:avLst/>
@@ -15192,8 +16954,8 @@
         </p:nvSpPr>
         <p:spPr>
           <a:xfrm>
-            <a:off x="4736592" y="1993392"/>
-            <a:ext cx="2267712" cy="329184"/>
+            <a:off x="5102352" y="1993392"/>
+            <a:ext cx="2084832" cy="329184"/>
           </a:xfrm>
           <a:prstGeom prst="rect">
             <a:avLst/>
@@ -15235,11 +16997,11 @@
         <p:spPr>
           <a:xfrm>
             <a:off x="7406640" y="1993392"/>
-            <a:ext cx="4206240" cy="1737360"/>
+            <a:ext cx="4206240" cy="1627632"/>
           </a:xfrm>
           <a:prstGeom prst="roundRect">
             <a:avLst>
-              <a:gd name="adj" fmla="val 3158"/>
+              <a:gd name="adj" fmla="val 3371"/>
             </a:avLst>
           </a:prstGeom>
           <a:solidFill>
@@ -15296,7 +17058,7 @@
                 <a:ea typeface="Arial" pitchFamily="34" charset="-122"/>
                 <a:cs typeface="Arial" pitchFamily="34" charset="-120"/>
               </a:rPr>
-              <a:t>检测分支（如实报告）</a:t>
+              <a:t>检测分支的短板</a:t>
             </a:r>
             <a:endParaRPr lang="en-US" sz="1100" dirty="0"/>
           </a:p>
@@ -15311,7 +17073,7 @@
         <p:spPr>
           <a:xfrm>
             <a:off x="7607808" y="2450592"/>
-            <a:ext cx="3803904" cy="1078992"/>
+            <a:ext cx="3803904" cy="969264"/>
           </a:xfrm>
           <a:prstGeom prst="rect">
             <a:avLst/>
@@ -15338,7 +17100,7 @@
                 <a:ea typeface="Arial" pitchFamily="34" charset="-122"/>
                 <a:cs typeface="Arial" pitchFamily="34" charset="-120"/>
               </a:rPr>
-              <a:t>mAP@0.5 = 0.7721</a:t>
+              <a:t>mAP@0.5 为 0.7721，低于 0.85 的目标。</a:t>
             </a:r>
             <a:endParaRPr lang="en-US" sz="1100" dirty="0"/>
           </a:p>
@@ -15358,27 +17120,7 @@
                 <a:ea typeface="Arial" pitchFamily="34" charset="-122"/>
                 <a:cs typeface="Arial" pitchFamily="34" charset="-120"/>
               </a:rPr>
-              <a:t>P 0.718 / R 0.745</a:t>
-            </a:r>
-            <a:endParaRPr lang="en-US" sz="1100" dirty="0"/>
-          </a:p>
-          <a:p>
-            <a:pPr algn="l" indent="0" marL="0">
-              <a:lnSpc>
-                <a:spcPct val="132000"/>
-              </a:lnSpc>
-              <a:buNone/>
-            </a:pPr>
-            <a:r>
-              <a:rPr lang="en-US" sz="1100" dirty="0">
-                <a:solidFill>
-                  <a:srgbClr val="E8EEF4"/>
-                </a:solidFill>
-                <a:latin typeface="Arial" pitchFamily="34" charset="0"/>
-                <a:ea typeface="Arial" pitchFamily="34" charset="-122"/>
-                <a:cs typeface="Arial" pitchFamily="34" charset="-120"/>
-              </a:rPr>
-              <a:t>目标 0.85 → 未达标：crazing 0.403、rolled-in_scale 0.682 拖累</a:t>
+              <a:t>拖累主要来自 crazing 0.403 和 rolled-in_scale 0.682，细纹理和框标注偏主观是主因。</a:t>
             </a:r>
             <a:endParaRPr lang="en-US" sz="1100" dirty="0"/>
           </a:p>
@@ -15392,12 +17134,12 @@
         </p:nvSpPr>
         <p:spPr>
           <a:xfrm>
-            <a:off x="7406640" y="3913632"/>
-            <a:ext cx="4206240" cy="1417320"/>
+            <a:off x="7406640" y="3767328"/>
+            <a:ext cx="4206240" cy="1371600"/>
           </a:xfrm>
           <a:prstGeom prst="roundRect">
             <a:avLst>
-              <a:gd name="adj" fmla="val 3871"/>
+              <a:gd name="adj" fmla="val 4000"/>
             </a:avLst>
           </a:prstGeom>
           <a:solidFill>
@@ -15426,7 +17168,7 @@
         </p:nvSpPr>
         <p:spPr>
           <a:xfrm>
-            <a:off x="7607808" y="4059936"/>
+            <a:off x="7607808" y="3913632"/>
             <a:ext cx="3803904" cy="219456"/>
           </a:xfrm>
           <a:prstGeom prst="rect">
@@ -15454,7 +17196,7 @@
                 <a:ea typeface="Arial" pitchFamily="34" charset="-122"/>
                 <a:cs typeface="Arial" pitchFamily="34" charset="-120"/>
               </a:rPr>
-              <a:t>为什么系统仍然可用</a:t>
+              <a:t>系统为什么还能用</a:t>
             </a:r>
             <a:endParaRPr lang="en-US" sz="1100" dirty="0"/>
           </a:p>
@@ -15468,8 +17210,8 @@
         </p:nvSpPr>
         <p:spPr>
           <a:xfrm>
-            <a:off x="7607808" y="4370832"/>
-            <a:ext cx="3803904" cy="758952"/>
+            <a:off x="7607808" y="4224528"/>
+            <a:ext cx="3803904" cy="713232"/>
           </a:xfrm>
           <a:prstGeom prst="rect">
             <a:avLst/>
@@ -15496,7 +17238,7 @@
                 <a:ea typeface="Arial" pitchFamily="34" charset="-122"/>
                 <a:cs typeface="Arial" pitchFamily="34" charset="-120"/>
               </a:rPr>
-              <a:t>检测只提供类别与框，像素定位由分割保证；龟裂漏检时掩膜仍在，只是标为“未分类缺陷”。</a:t>
+              <a:t>检测只负责类别和框，像素定位由分割保证。龟裂漏检时掩膜仍在，报告里记为未分类缺陷。</a:t>
             </a:r>
             <a:endParaRPr lang="en-US" sz="1150" dirty="0"/>
           </a:p>
@@ -15504,7 +17246,125 @@
       </p:sp>
       <p:sp>
         <p:nvSpPr>
-          <p:cNvPr id="18" name="Text 15"/>
+          <p:cNvPr id="18" name="Shape 15"/>
+          <p:cNvSpPr/>
+          <p:nvPr/>
+        </p:nvSpPr>
+        <p:spPr>
+          <a:xfrm>
+            <a:off x="566928" y="4846320"/>
+            <a:ext cx="6675120" cy="932688"/>
+          </a:xfrm>
+          <a:prstGeom prst="roundRect">
+            <a:avLst>
+              <a:gd name="adj" fmla="val 5882"/>
+            </a:avLst>
+          </a:prstGeom>
+          <a:solidFill>
+            <a:srgbClr val="151E27"/>
+          </a:solidFill>
+          <a:ln w="12700">
+            <a:solidFill>
+              <a:srgbClr val="1B2531"/>
+            </a:solidFill>
+            <a:prstDash val="solid"/>
+          </a:ln>
+          <a:effectLst>
+            <a:outerShdw sx="100000" sy="100000" kx="0" ky="0" algn="bl" rotWithShape="0" blurRad="152400" dist="38100" dir="5400000">
+              <a:srgbClr val="000000">
+                <a:alpha val="35000"/>
+              </a:srgbClr>
+            </a:outerShdw>
+          </a:effectLst>
+        </p:spPr>
+      </p:sp>
+      <p:sp>
+        <p:nvSpPr>
+          <p:cNvPr id="19" name="Text 16"/>
+          <p:cNvSpPr txBox="1"/>
+          <p:nvPr/>
+        </p:nvSpPr>
+        <p:spPr>
+          <a:xfrm>
+            <a:off x="768096" y="4992624"/>
+            <a:ext cx="6272784" cy="219456"/>
+          </a:xfrm>
+          <a:prstGeom prst="rect">
+            <a:avLst/>
+          </a:prstGeom>
+          <a:noFill/>
+          <a:ln/>
+        </p:spPr>
+        <p:txBody>
+          <a:bodyPr wrap="square" lIns="0" tIns="0" rIns="0" bIns="0" rtlCol="0" anchor="t"/>
+          <a:lstStyle/>
+          <a:p>
+            <a:pPr algn="l" indent="0" marL="0">
+              <a:lnSpc>
+                <a:spcPct val="115000"/>
+              </a:lnSpc>
+              <a:buNone/>
+            </a:pPr>
+            <a:r>
+              <a:rPr lang="en-US" sz="1100" b="1" spc="60" kern="0" dirty="0">
+                <a:solidFill>
+                  <a:srgbClr val="F5C542"/>
+                </a:solidFill>
+                <a:latin typeface="Arial" pitchFamily="34" charset="0"/>
+                <a:ea typeface="Arial" pitchFamily="34" charset="-122"/>
+                <a:cs typeface="Arial" pitchFamily="34" charset="-120"/>
+              </a:rPr>
+              <a:t>批量 100 张的类别分布</a:t>
+            </a:r>
+            <a:endParaRPr lang="en-US" sz="1100" dirty="0"/>
+          </a:p>
+        </p:txBody>
+      </p:sp>
+      <p:sp>
+        <p:nvSpPr>
+          <p:cNvPr id="20" name="Text 17"/>
+          <p:cNvSpPr txBox="1"/>
+          <p:nvPr/>
+        </p:nvSpPr>
+        <p:spPr>
+          <a:xfrm>
+            <a:off x="768096" y="5303520"/>
+            <a:ext cx="6272784" cy="274320"/>
+          </a:xfrm>
+          <a:prstGeom prst="rect">
+            <a:avLst/>
+          </a:prstGeom>
+          <a:noFill/>
+          <a:ln/>
+        </p:spPr>
+        <p:txBody>
+          <a:bodyPr wrap="square" lIns="0" tIns="0" rIns="0" bIns="0" rtlCol="0" anchor="t"/>
+          <a:lstStyle/>
+          <a:p>
+            <a:pPr algn="l" indent="0" marL="0">
+              <a:lnSpc>
+                <a:spcPct val="132000"/>
+              </a:lnSpc>
+              <a:buNone/>
+            </a:pPr>
+            <a:r>
+              <a:rPr lang="en-US" sz="1150" dirty="0">
+                <a:solidFill>
+                  <a:srgbClr val="E8EEF4"/>
+                </a:solidFill>
+                <a:latin typeface="Arial" pitchFamily="34" charset="0"/>
+                <a:ea typeface="Arial" pitchFamily="34" charset="-122"/>
+                <a:cs typeface="Arial" pitchFamily="34" charset="-120"/>
+              </a:rPr>
+              <a:t>夹杂 17　斑块 16　麻点 6　划伤 4　氧化皮压入 2　龟裂 1</a:t>
+            </a:r>
+            <a:endParaRPr lang="en-US" sz="1150" dirty="0"/>
+          </a:p>
+        </p:txBody>
+      </p:sp>
+      <p:sp>
+        <p:nvSpPr>
+          <p:cNvPr id="21" name="Text 18"/>
           <p:cNvSpPr txBox="1"/>
           <p:nvPr/>
         </p:nvSpPr>
@@ -15538,7 +17398,7 @@
                 <a:ea typeface="Arial" pitchFamily="34" charset="-122"/>
                 <a:cs typeface="Arial" pitchFamily="34" charset="-120"/>
               </a:rPr>
-              <a:t>来源 docs/assets/system-eval.json、batch-summary.json、detection-metrics.json</a:t>
+              <a:t>数据来自 docs/assets/system-eval.json、batch-summary.json 和 detection-metrics.json</a:t>
             </a:r>
             <a:endParaRPr lang="en-US" sz="900" dirty="0"/>
           </a:p>

--- a/docs/slides.pptx
+++ b/docs/slides.pptx
@@ -2507,7 +2507,7 @@
                 <a:ea typeface="Arial" pitchFamily="34" charset="-122"/>
                 <a:cs typeface="Arial" pitchFamily="34" charset="-120"/>
               </a:rPr>
-              <a:t>四项指标与论文一致，12 种对比方法里 S-measure 排第一</a:t>
+              <a:t>四项指标与论文一致，与 11 种方法对比 S-measure 排第一</a:t>
             </a:r>
             <a:endParaRPr lang="en-US" sz="1150" dirty="0"/>
           </a:p>
@@ -9637,7 +9637,7 @@
                 <a:ea typeface="Arial" pitchFamily="34" charset="-122"/>
                 <a:cs typeface="Arial" pitchFamily="34" charset="-120"/>
               </a:rPr>
-              <a:t>S-measure 排名前五，完整 12 行在 predictions/metrics.csv</a:t>
+              <a:t>S-measure 排名前五，全表 12 行（含本组）在 predictions/metrics.csv</a:t>
             </a:r>
             <a:endParaRPr lang="en-US" sz="1150" dirty="0"/>
           </a:p>
@@ -14586,8 +14586,8 @@
         </p:blipFill>
         <p:spPr>
           <a:xfrm>
-            <a:off x="521208" y="1920240"/>
-            <a:ext cx="7223760" cy="2302617"/>
+            <a:off x="457200" y="1883664"/>
+            <a:ext cx="7406640" cy="2339318"/>
           </a:xfrm>
           <a:prstGeom prst="rect">
             <a:avLst/>
@@ -14602,8 +14602,8 @@
         </p:nvSpPr>
         <p:spPr>
           <a:xfrm>
-            <a:off x="7863840" y="1920240"/>
-            <a:ext cx="3749040" cy="2212848"/>
+            <a:off x="8028432" y="1920240"/>
+            <a:ext cx="3611880" cy="2212848"/>
           </a:xfrm>
           <a:prstGeom prst="roundRect">
             <a:avLst>
@@ -14636,8 +14636,8 @@
         </p:nvSpPr>
         <p:spPr>
           <a:xfrm>
-            <a:off x="8065008" y="2066544"/>
-            <a:ext cx="3346704" cy="219456"/>
+            <a:off x="8229600" y="2066544"/>
+            <a:ext cx="3209544" cy="219456"/>
           </a:xfrm>
           <a:prstGeom prst="rect">
             <a:avLst/>
@@ -14678,8 +14678,8 @@
         </p:nvSpPr>
         <p:spPr>
           <a:xfrm>
-            <a:off x="8065008" y="2377440"/>
-            <a:ext cx="3346704" cy="1554480"/>
+            <a:off x="8229600" y="2377440"/>
+            <a:ext cx="3209544" cy="1554480"/>
           </a:xfrm>
           <a:prstGeom prst="rect">
             <a:avLst/>
@@ -14740,8 +14740,8 @@
         </p:nvSpPr>
         <p:spPr>
           <a:xfrm>
-            <a:off x="7863840" y="4315968"/>
-            <a:ext cx="3749040" cy="1280160"/>
+            <a:off x="8028432" y="4315968"/>
+            <a:ext cx="3611880" cy="1280160"/>
           </a:xfrm>
           <a:prstGeom prst="roundRect">
             <a:avLst>
@@ -14774,8 +14774,8 @@
         </p:nvSpPr>
         <p:spPr>
           <a:xfrm>
-            <a:off x="8065008" y="4462272"/>
-            <a:ext cx="3346704" cy="219456"/>
+            <a:off x="8229600" y="4462272"/>
+            <a:ext cx="3209544" cy="219456"/>
           </a:xfrm>
           <a:prstGeom prst="rect">
             <a:avLst/>
@@ -14816,8 +14816,8 @@
         </p:nvSpPr>
         <p:spPr>
           <a:xfrm>
-            <a:off x="8065008" y="4773168"/>
-            <a:ext cx="3346704" cy="621792"/>
+            <a:off x="8229600" y="4773168"/>
+            <a:ext cx="3209544" cy="621792"/>
           </a:xfrm>
           <a:prstGeom prst="rect">
             <a:avLst/>
@@ -14858,8 +14858,8 @@
         </p:nvSpPr>
         <p:spPr>
           <a:xfrm>
-            <a:off x="566928" y="4443984"/>
-            <a:ext cx="7040880" cy="640080"/>
+            <a:off x="566928" y="4498848"/>
+            <a:ext cx="7223760" cy="365760"/>
           </a:xfrm>
           <a:prstGeom prst="rect">
             <a:avLst/>
@@ -14894,7 +14894,125 @@
       </p:sp>
       <p:sp>
         <p:nvSpPr>
-          <p:cNvPr id="15" name="Text 12"/>
+          <p:cNvPr id="15" name="Shape 12"/>
+          <p:cNvSpPr/>
+          <p:nvPr/>
+        </p:nvSpPr>
+        <p:spPr>
+          <a:xfrm>
+            <a:off x="566928" y="4937760"/>
+            <a:ext cx="7223760" cy="1188720"/>
+          </a:xfrm>
+          <a:prstGeom prst="roundRect">
+            <a:avLst>
+              <a:gd name="adj" fmla="val 4615"/>
+            </a:avLst>
+          </a:prstGeom>
+          <a:solidFill>
+            <a:srgbClr val="151E27"/>
+          </a:solidFill>
+          <a:ln w="12700">
+            <a:solidFill>
+              <a:srgbClr val="1B2531"/>
+            </a:solidFill>
+            <a:prstDash val="solid"/>
+          </a:ln>
+          <a:effectLst>
+            <a:outerShdw sx="100000" sy="100000" kx="0" ky="0" algn="bl" rotWithShape="0" blurRad="152400" dist="38100" dir="5400000">
+              <a:srgbClr val="000000">
+                <a:alpha val="35000"/>
+              </a:srgbClr>
+            </a:outerShdw>
+          </a:effectLst>
+        </p:spPr>
+      </p:sp>
+      <p:sp>
+        <p:nvSpPr>
+          <p:cNvPr id="16" name="Text 13"/>
+          <p:cNvSpPr txBox="1"/>
+          <p:nvPr/>
+        </p:nvSpPr>
+        <p:spPr>
+          <a:xfrm>
+            <a:off x="768096" y="5084064"/>
+            <a:ext cx="6821424" cy="219456"/>
+          </a:xfrm>
+          <a:prstGeom prst="rect">
+            <a:avLst/>
+          </a:prstGeom>
+          <a:noFill/>
+          <a:ln/>
+        </p:spPr>
+        <p:txBody>
+          <a:bodyPr wrap="square" lIns="0" tIns="0" rIns="0" bIns="0" rtlCol="0" anchor="t"/>
+          <a:lstStyle/>
+          <a:p>
+            <a:pPr algn="l" indent="0" marL="0">
+              <a:lnSpc>
+                <a:spcPct val="115000"/>
+              </a:lnSpc>
+              <a:buNone/>
+            </a:pPr>
+            <a:r>
+              <a:rPr lang="en-US" sz="1100" b="1" spc="60" kern="0" dirty="0">
+                <a:solidFill>
+                  <a:srgbClr val="4C9AFF"/>
+                </a:solidFill>
+                <a:latin typeface="Arial" pitchFamily="34" charset="0"/>
+                <a:ea typeface="Arial" pitchFamily="34" charset="-122"/>
+                <a:cs typeface="Arial" pitchFamily="34" charset="-120"/>
+              </a:rPr>
+              <a:t>标定没有碰评测指标</a:t>
+            </a:r>
+            <a:endParaRPr lang="en-US" sz="1100" dirty="0"/>
+          </a:p>
+        </p:txBody>
+      </p:sp>
+      <p:sp>
+        <p:nvSpPr>
+          <p:cNvPr id="17" name="Text 14"/>
+          <p:cNvSpPr txBox="1"/>
+          <p:nvPr/>
+        </p:nvSpPr>
+        <p:spPr>
+          <a:xfrm>
+            <a:off x="768096" y="5394960"/>
+            <a:ext cx="6821424" cy="530352"/>
+          </a:xfrm>
+          <a:prstGeom prst="rect">
+            <a:avLst/>
+          </a:prstGeom>
+          <a:noFill/>
+          <a:ln/>
+        </p:spPr>
+        <p:txBody>
+          <a:bodyPr wrap="square" lIns="0" tIns="0" rIns="0" bIns="0" rtlCol="0" anchor="t"/>
+          <a:lstStyle/>
+          <a:p>
+            <a:pPr algn="l" indent="0" marL="0">
+              <a:lnSpc>
+                <a:spcPct val="132000"/>
+              </a:lnSpc>
+              <a:buNone/>
+            </a:pPr>
+            <a:r>
+              <a:rPr lang="en-US" sz="1100" dirty="0">
+                <a:solidFill>
+                  <a:srgbClr val="E8EEF4"/>
+                </a:solidFill>
+                <a:latin typeface="Arial" pitchFamily="34" charset="0"/>
+                <a:ea typeface="Arial" pitchFamily="34" charset="-122"/>
+                <a:cs typeface="Arial" pitchFamily="34" charset="-120"/>
+              </a:rPr>
+              <a:t>分位数取自真值掩膜的面积分布，S-measure 和 MAE 一个都没参与。所以调阈值只会改变判定，不会让复现分数变好看。</a:t>
+            </a:r>
+            <a:endParaRPr lang="en-US" sz="1100" dirty="0"/>
+          </a:p>
+        </p:txBody>
+      </p:sp>
+      <p:sp>
+        <p:nvSpPr>
+          <p:cNvPr id="18" name="Text 15"/>
           <p:cNvSpPr txBox="1"/>
           <p:nvPr/>
         </p:nvSpPr>

--- a/docs/slides.pptx
+++ b/docs/slides.pptx
@@ -9266,7 +9266,7 @@
                 <a:ea typeface="Arial" pitchFamily="34" charset="-122"/>
                 <a:cs typeface="Arial" pitchFamily="34" charset="-120"/>
               </a:rPr>
-              <a:t>· 龟裂和氧化皮压入是低对比度纹理，还没到位</a:t>
+              <a:t>· 另外三类是低对比度纹理，还没到位</a:t>
             </a:r>
             <a:endParaRPr lang="en-US" sz="1200" dirty="0"/>
           </a:p>
